--- a/reto3_procesamiento.pptx
+++ b/reto3_procesamiento.pptx
@@ -255,7 +255,7 @@
   </p:defaultTextStyle>
   <p:extLst>
     <p:ext uri="GoogleSlidesCustomDataVersion2">
-      <go:slidesCustomData xmlns:go="http://customooxmlschemas.google.com/" r:id="rId19" roundtripDataSignature="AMtx7mhFUxaeLGRi9tHthp+sw56WwLkvPA=="/>
+      <go:slidesCustomData xmlns:go="http://customooxmlschemas.google.com/" r:id="rId19" roundtripDataSignature="AMtx7mhT5Tbjh2d7qysJho8zOhnmS7o6qw=="/>
     </p:ext>
   </p:extLst>
 </p:presentation>
@@ -1094,7 +1094,7 @@
   <p:cSld>
     <p:spTree>
       <p:nvGrpSpPr>
-        <p:cNvPr id="271" name="Shape 271"/>
+        <p:cNvPr id="317" name="Shape 317"/>
         <p:cNvGrpSpPr/>
         <p:nvPr/>
       </p:nvGrpSpPr>
@@ -1108,7 +1108,7 @@
       </p:grpSpPr>
       <p:sp>
         <p:nvSpPr>
-          <p:cNvPr id="272" name="Google Shape;272;g39683255e89_0_2:notes"/>
+          <p:cNvPr id="318" name="Google Shape;318;g39683255e89_0_2:notes"/>
           <p:cNvSpPr/>
           <p:nvPr>
             <p:ph idx="2" type="sldImg"/>
@@ -1153,7 +1153,7 @@
       </p:sp>
       <p:sp>
         <p:nvSpPr>
-          <p:cNvPr id="273" name="Google Shape;273;g39683255e89_0_2:notes"/>
+          <p:cNvPr id="319" name="Google Shape;319;g39683255e89_0_2:notes"/>
           <p:cNvSpPr txBox="1"/>
           <p:nvPr>
             <p:ph idx="1" type="body"/>
@@ -1196,7 +1196,7 @@
       </p:sp>
       <p:sp>
         <p:nvSpPr>
-          <p:cNvPr id="274" name="Google Shape;274;g39683255e89_0_2:notes"/>
+          <p:cNvPr id="320" name="Google Shape;320;g39683255e89_0_2:notes"/>
           <p:cNvSpPr txBox="1"/>
           <p:nvPr>
             <p:ph idx="12" type="sldNum"/>
@@ -1251,7 +1251,7 @@
   <p:cSld>
     <p:spTree>
       <p:nvGrpSpPr>
-        <p:cNvPr id="296" name="Shape 296"/>
+        <p:cNvPr id="342" name="Shape 342"/>
         <p:cNvGrpSpPr/>
         <p:nvPr/>
       </p:nvGrpSpPr>
@@ -1265,7 +1265,7 @@
       </p:grpSpPr>
       <p:sp>
         <p:nvSpPr>
-          <p:cNvPr id="297" name="Google Shape;297;g39683255e89_0_41:notes"/>
+          <p:cNvPr id="343" name="Google Shape;343;g39683255e89_0_41:notes"/>
           <p:cNvSpPr/>
           <p:nvPr>
             <p:ph idx="2" type="sldImg"/>
@@ -1310,7 +1310,7 @@
       </p:sp>
       <p:sp>
         <p:nvSpPr>
-          <p:cNvPr id="298" name="Google Shape;298;g39683255e89_0_41:notes"/>
+          <p:cNvPr id="344" name="Google Shape;344;g39683255e89_0_41:notes"/>
           <p:cNvSpPr txBox="1"/>
           <p:nvPr>
             <p:ph idx="1" type="body"/>
@@ -1353,7 +1353,7 @@
       </p:sp>
       <p:sp>
         <p:nvSpPr>
-          <p:cNvPr id="299" name="Google Shape;299;g39683255e89_0_41:notes"/>
+          <p:cNvPr id="345" name="Google Shape;345;g39683255e89_0_41:notes"/>
           <p:cNvSpPr txBox="1"/>
           <p:nvPr>
             <p:ph idx="12" type="sldNum"/>
@@ -1408,7 +1408,7 @@
   <p:cSld>
     <p:spTree>
       <p:nvGrpSpPr>
-        <p:cNvPr id="321" name="Shape 321"/>
+        <p:cNvPr id="367" name="Shape 367"/>
         <p:cNvGrpSpPr/>
         <p:nvPr/>
       </p:nvGrpSpPr>
@@ -1422,7 +1422,7 @@
       </p:grpSpPr>
       <p:sp>
         <p:nvSpPr>
-          <p:cNvPr id="322" name="Google Shape;322;g39683255e89_0_78:notes"/>
+          <p:cNvPr id="368" name="Google Shape;368;g39683255e89_0_78:notes"/>
           <p:cNvSpPr/>
           <p:nvPr>
             <p:ph idx="2" type="sldImg"/>
@@ -1467,7 +1467,7 @@
       </p:sp>
       <p:sp>
         <p:nvSpPr>
-          <p:cNvPr id="323" name="Google Shape;323;g39683255e89_0_78:notes"/>
+          <p:cNvPr id="369" name="Google Shape;369;g39683255e89_0_78:notes"/>
           <p:cNvSpPr txBox="1"/>
           <p:nvPr>
             <p:ph idx="1" type="body"/>
@@ -1510,7 +1510,7 @@
       </p:sp>
       <p:sp>
         <p:nvSpPr>
-          <p:cNvPr id="324" name="Google Shape;324;g39683255e89_0_78:notes"/>
+          <p:cNvPr id="370" name="Google Shape;370;g39683255e89_0_78:notes"/>
           <p:cNvSpPr txBox="1"/>
           <p:nvPr>
             <p:ph idx="12" type="sldNum"/>
@@ -1565,7 +1565,7 @@
   <p:cSld>
     <p:spTree>
       <p:nvGrpSpPr>
-        <p:cNvPr id="344" name="Shape 344"/>
+        <p:cNvPr id="390" name="Shape 390"/>
         <p:cNvGrpSpPr/>
         <p:nvPr/>
       </p:nvGrpSpPr>
@@ -1579,7 +1579,7 @@
       </p:grpSpPr>
       <p:sp>
         <p:nvSpPr>
-          <p:cNvPr id="345" name="Google Shape;345;p10:notes"/>
+          <p:cNvPr id="391" name="Google Shape;391;p10:notes"/>
           <p:cNvSpPr/>
           <p:nvPr>
             <p:ph idx="2" type="sldImg"/>
@@ -1618,7 +1618,7 @@
       </p:sp>
       <p:sp>
         <p:nvSpPr>
-          <p:cNvPr id="346" name="Google Shape;346;p10:notes"/>
+          <p:cNvPr id="392" name="Google Shape;392;p10:notes"/>
           <p:cNvSpPr txBox="1"/>
           <p:nvPr>
             <p:ph idx="1" type="body"/>
@@ -1669,7 +1669,7 @@
       </p:sp>
       <p:sp>
         <p:nvSpPr>
-          <p:cNvPr id="347" name="Google Shape;347;p10:notes"/>
+          <p:cNvPr id="393" name="Google Shape;393;p10:notes"/>
           <p:cNvSpPr txBox="1"/>
           <p:nvPr>
             <p:ph idx="12" type="sldNum"/>
@@ -1754,7 +1754,7 @@
       </p:grpSpPr>
       <p:sp>
         <p:nvSpPr>
-          <p:cNvPr id="15" name="Google Shape;15;g3d2615fdc14_0_28:notes"/>
+          <p:cNvPr id="15" name="Google Shape;15;g39683255e89_0_128:notes"/>
           <p:cNvSpPr/>
           <p:nvPr>
             <p:ph idx="2" type="sldImg"/>
@@ -1762,8 +1762,8 @@
         </p:nvSpPr>
         <p:spPr>
           <a:xfrm>
-            <a:off x="857400" y="685800"/>
-            <a:ext cx="3429000" cy="3429000"/>
+            <a:off x="685800" y="1143000"/>
+            <a:ext cx="5486400" cy="3086100"/>
           </a:xfrm>
           <a:custGeom>
             <a:rect b="b" l="l" r="r" t="t"/>
@@ -1785,11 +1785,21 @@
               </a:path>
             </a:pathLst>
           </a:custGeom>
-        </p:spPr>
-      </p:sp>
-      <p:sp>
-        <p:nvSpPr>
-          <p:cNvPr id="16" name="Google Shape;16;g3d2615fdc14_0_28:notes"/>
+          <a:noFill/>
+          <a:ln cap="flat" cmpd="sng" w="12700">
+            <a:solidFill>
+              <a:srgbClr val="000000"/>
+            </a:solidFill>
+            <a:prstDash val="solid"/>
+            <a:round/>
+            <a:headEnd len="sm" w="sm" type="none"/>
+            <a:tailEnd len="sm" w="sm" type="none"/>
+          </a:ln>
+        </p:spPr>
+      </p:sp>
+      <p:sp>
+        <p:nvSpPr>
+          <p:cNvPr id="16" name="Google Shape;16;g39683255e89_0_128:notes"/>
           <p:cNvSpPr txBox="1"/>
           <p:nvPr>
             <p:ph idx="1" type="body"/>
@@ -1797,15 +1807,19 @@
         </p:nvSpPr>
         <p:spPr>
           <a:xfrm>
-            <a:off x="514350" y="4343400"/>
-            <a:ext cx="4114800" cy="4114800"/>
-          </a:xfrm>
-          <a:prstGeom prst="rect">
-            <a:avLst/>
-          </a:prstGeom>
-        </p:spPr>
-        <p:txBody>
-          <a:bodyPr anchorCtr="0" anchor="t" bIns="91425" lIns="91425" spcFirstLastPara="1" rIns="91425" wrap="square" tIns="91425">
+            <a:off x="685800" y="4400550"/>
+            <a:ext cx="5486400" cy="3600600"/>
+          </a:xfrm>
+          <a:prstGeom prst="rect">
+            <a:avLst/>
+          </a:prstGeom>
+          <a:noFill/>
+          <a:ln>
+            <a:noFill/>
+          </a:ln>
+        </p:spPr>
+        <p:txBody>
+          <a:bodyPr anchorCtr="0" anchor="t" bIns="45700" lIns="91425" spcFirstLastPara="1" rIns="91425" wrap="square" tIns="45700">
             <a:noAutofit/>
           </a:bodyPr>
           <a:lstStyle/>
@@ -1822,6 +1836,50 @@
             <a:r>
               <a:t/>
             </a:r>
+            <a:endParaRPr/>
+          </a:p>
+        </p:txBody>
+      </p:sp>
+      <p:sp>
+        <p:nvSpPr>
+          <p:cNvPr id="17" name="Google Shape;17;g39683255e89_0_128:notes"/>
+          <p:cNvSpPr txBox="1"/>
+          <p:nvPr>
+            <p:ph idx="12" type="sldNum"/>
+          </p:nvPr>
+        </p:nvSpPr>
+        <p:spPr>
+          <a:xfrm>
+            <a:off x="3884613" y="8685213"/>
+            <a:ext cx="2971800" cy="458700"/>
+          </a:xfrm>
+          <a:prstGeom prst="rect">
+            <a:avLst/>
+          </a:prstGeom>
+          <a:noFill/>
+          <a:ln>
+            <a:noFill/>
+          </a:ln>
+        </p:spPr>
+        <p:txBody>
+          <a:bodyPr anchorCtr="0" anchor="b" bIns="45700" lIns="91425" spcFirstLastPara="1" rIns="91425" wrap="square" tIns="45700">
+            <a:noAutofit/>
+          </a:bodyPr>
+          <a:lstStyle/>
+          <a:p>
+            <a:pPr indent="0" lvl="0" marL="0" rtl="0" algn="r">
+              <a:spcBef>
+                <a:spcPts val="0"/>
+              </a:spcBef>
+              <a:spcAft>
+                <a:spcPts val="0"/>
+              </a:spcAft>
+              <a:buNone/>
+            </a:pPr>
+            <a:fld id="{00000000-1234-1234-1234-123412341234}" type="slidenum">
+              <a:rPr lang="en-US"/>
+              <a:t>‹#›</a:t>
+            </a:fld>
             <a:endParaRPr/>
           </a:p>
         </p:txBody>
@@ -1839,7 +1897,7 @@
   <p:cSld>
     <p:spTree>
       <p:nvGrpSpPr>
-        <p:cNvPr id="19" name="Shape 19"/>
+        <p:cNvPr id="65" name="Shape 65"/>
         <p:cNvGrpSpPr/>
         <p:nvPr/>
       </p:nvGrpSpPr>
@@ -1853,7 +1911,7 @@
       </p:grpSpPr>
       <p:sp>
         <p:nvSpPr>
-          <p:cNvPr id="20" name="Google Shape;20;p3:notes"/>
+          <p:cNvPr id="66" name="Google Shape;66;p3:notes"/>
           <p:cNvSpPr/>
           <p:nvPr>
             <p:ph idx="2" type="sldImg"/>
@@ -1892,7 +1950,7 @@
       </p:sp>
       <p:sp>
         <p:nvSpPr>
-          <p:cNvPr id="21" name="Google Shape;21;p3:notes"/>
+          <p:cNvPr id="67" name="Google Shape;67;p3:notes"/>
           <p:cNvSpPr txBox="1"/>
           <p:nvPr>
             <p:ph idx="1" type="body"/>
@@ -1943,7 +2001,7 @@
       </p:sp>
       <p:sp>
         <p:nvSpPr>
-          <p:cNvPr id="22" name="Google Shape;22;p3:notes"/>
+          <p:cNvPr id="68" name="Google Shape;68;p3:notes"/>
           <p:cNvSpPr txBox="1"/>
           <p:nvPr>
             <p:ph idx="12" type="sldNum"/>
@@ -2014,7 +2072,7 @@
   <p:cSld>
     <p:spTree>
       <p:nvGrpSpPr>
-        <p:cNvPr id="40" name="Shape 40"/>
+        <p:cNvPr id="86" name="Shape 86"/>
         <p:cNvGrpSpPr/>
         <p:nvPr/>
       </p:nvGrpSpPr>
@@ -2028,7 +2086,7 @@
       </p:grpSpPr>
       <p:sp>
         <p:nvSpPr>
-          <p:cNvPr id="41" name="Google Shape;41;p4:notes"/>
+          <p:cNvPr id="87" name="Google Shape;87;p4:notes"/>
           <p:cNvSpPr/>
           <p:nvPr>
             <p:ph idx="2" type="sldImg"/>
@@ -2067,7 +2125,7 @@
       </p:sp>
       <p:sp>
         <p:nvSpPr>
-          <p:cNvPr id="42" name="Google Shape;42;p4:notes"/>
+          <p:cNvPr id="88" name="Google Shape;88;p4:notes"/>
           <p:cNvSpPr txBox="1"/>
           <p:nvPr>
             <p:ph idx="1" type="body"/>
@@ -2118,7 +2176,7 @@
       </p:sp>
       <p:sp>
         <p:nvSpPr>
-          <p:cNvPr id="43" name="Google Shape;43;p4:notes"/>
+          <p:cNvPr id="89" name="Google Shape;89;p4:notes"/>
           <p:cNvSpPr txBox="1"/>
           <p:nvPr>
             <p:ph idx="12" type="sldNum"/>
@@ -2189,7 +2247,7 @@
   <p:cSld>
     <p:spTree>
       <p:nvGrpSpPr>
-        <p:cNvPr id="81" name="Shape 81"/>
+        <p:cNvPr id="127" name="Shape 127"/>
         <p:cNvGrpSpPr/>
         <p:nvPr/>
       </p:nvGrpSpPr>
@@ -2203,7 +2261,7 @@
       </p:grpSpPr>
       <p:sp>
         <p:nvSpPr>
-          <p:cNvPr id="82" name="Google Shape;82;p5:notes"/>
+          <p:cNvPr id="128" name="Google Shape;128;p5:notes"/>
           <p:cNvSpPr/>
           <p:nvPr>
             <p:ph idx="2" type="sldImg"/>
@@ -2242,7 +2300,7 @@
       </p:sp>
       <p:sp>
         <p:nvSpPr>
-          <p:cNvPr id="83" name="Google Shape;83;p5:notes"/>
+          <p:cNvPr id="129" name="Google Shape;129;p5:notes"/>
           <p:cNvSpPr txBox="1"/>
           <p:nvPr>
             <p:ph idx="1" type="body"/>
@@ -2293,7 +2351,7 @@
       </p:sp>
       <p:sp>
         <p:nvSpPr>
-          <p:cNvPr id="84" name="Google Shape;84;p5:notes"/>
+          <p:cNvPr id="130" name="Google Shape;130;p5:notes"/>
           <p:cNvSpPr txBox="1"/>
           <p:nvPr>
             <p:ph idx="12" type="sldNum"/>
@@ -2364,7 +2422,7 @@
   <p:cSld>
     <p:spTree>
       <p:nvGrpSpPr>
-        <p:cNvPr id="135" name="Shape 135"/>
+        <p:cNvPr id="181" name="Shape 181"/>
         <p:cNvGrpSpPr/>
         <p:nvPr/>
       </p:nvGrpSpPr>
@@ -2378,7 +2436,7 @@
       </p:grpSpPr>
       <p:sp>
         <p:nvSpPr>
-          <p:cNvPr id="136" name="Google Shape;136;p6:notes"/>
+          <p:cNvPr id="182" name="Google Shape;182;p6:notes"/>
           <p:cNvSpPr/>
           <p:nvPr>
             <p:ph idx="2" type="sldImg"/>
@@ -2417,7 +2475,7 @@
       </p:sp>
       <p:sp>
         <p:nvSpPr>
-          <p:cNvPr id="137" name="Google Shape;137;p6:notes"/>
+          <p:cNvPr id="183" name="Google Shape;183;p6:notes"/>
           <p:cNvSpPr txBox="1"/>
           <p:nvPr>
             <p:ph idx="1" type="body"/>
@@ -2473,7 +2531,7 @@
       </p:sp>
       <p:sp>
         <p:nvSpPr>
-          <p:cNvPr id="138" name="Google Shape;138;p6:notes"/>
+          <p:cNvPr id="184" name="Google Shape;184;p6:notes"/>
           <p:cNvSpPr txBox="1"/>
           <p:nvPr>
             <p:ph idx="12" type="sldNum"/>
@@ -2544,7 +2602,7 @@
   <p:cSld>
     <p:spTree>
       <p:nvGrpSpPr>
-        <p:cNvPr id="189" name="Shape 189"/>
+        <p:cNvPr id="235" name="Shape 235"/>
         <p:cNvGrpSpPr/>
         <p:nvPr/>
       </p:nvGrpSpPr>
@@ -2558,7 +2616,7 @@
       </p:grpSpPr>
       <p:sp>
         <p:nvSpPr>
-          <p:cNvPr id="190" name="Google Shape;190;p7:notes"/>
+          <p:cNvPr id="236" name="Google Shape;236;p7:notes"/>
           <p:cNvSpPr/>
           <p:nvPr>
             <p:ph idx="2" type="sldImg"/>
@@ -2597,7 +2655,7 @@
       </p:sp>
       <p:sp>
         <p:nvSpPr>
-          <p:cNvPr id="191" name="Google Shape;191;p7:notes"/>
+          <p:cNvPr id="237" name="Google Shape;237;p7:notes"/>
           <p:cNvSpPr txBox="1"/>
           <p:nvPr>
             <p:ph idx="1" type="body"/>
@@ -2657,7 +2715,7 @@
       </p:sp>
       <p:sp>
         <p:nvSpPr>
-          <p:cNvPr id="192" name="Google Shape;192;p7:notes"/>
+          <p:cNvPr id="238" name="Google Shape;238;p7:notes"/>
           <p:cNvSpPr txBox="1"/>
           <p:nvPr>
             <p:ph idx="12" type="sldNum"/>
@@ -2728,7 +2786,7 @@
   <p:cSld>
     <p:spTree>
       <p:nvGrpSpPr>
-        <p:cNvPr id="213" name="Shape 213"/>
+        <p:cNvPr id="259" name="Shape 259"/>
         <p:cNvGrpSpPr/>
         <p:nvPr/>
       </p:nvGrpSpPr>
@@ -2742,7 +2800,7 @@
       </p:grpSpPr>
       <p:sp>
         <p:nvSpPr>
-          <p:cNvPr id="214" name="Google Shape;214;p8:notes"/>
+          <p:cNvPr id="260" name="Google Shape;260;p8:notes"/>
           <p:cNvSpPr/>
           <p:nvPr>
             <p:ph idx="2" type="sldImg"/>
@@ -2781,7 +2839,7 @@
       </p:sp>
       <p:sp>
         <p:nvSpPr>
-          <p:cNvPr id="215" name="Google Shape;215;p8:notes"/>
+          <p:cNvPr id="261" name="Google Shape;261;p8:notes"/>
           <p:cNvSpPr txBox="1"/>
           <p:nvPr>
             <p:ph idx="1" type="body"/>
@@ -2832,7 +2890,7 @@
       </p:sp>
       <p:sp>
         <p:nvSpPr>
-          <p:cNvPr id="216" name="Google Shape;216;p8:notes"/>
+          <p:cNvPr id="262" name="Google Shape;262;p8:notes"/>
           <p:cNvSpPr txBox="1"/>
           <p:nvPr>
             <p:ph idx="12" type="sldNum"/>
@@ -2903,7 +2961,7 @@
   <p:cSld>
     <p:spTree>
       <p:nvGrpSpPr>
-        <p:cNvPr id="245" name="Shape 245"/>
+        <p:cNvPr id="291" name="Shape 291"/>
         <p:cNvGrpSpPr/>
         <p:nvPr/>
       </p:nvGrpSpPr>
@@ -2917,7 +2975,7 @@
       </p:grpSpPr>
       <p:sp>
         <p:nvSpPr>
-          <p:cNvPr id="246" name="Google Shape;246;p9:notes"/>
+          <p:cNvPr id="292" name="Google Shape;292;p9:notes"/>
           <p:cNvSpPr/>
           <p:nvPr>
             <p:ph idx="2" type="sldImg"/>
@@ -2956,7 +3014,7 @@
       </p:sp>
       <p:sp>
         <p:nvSpPr>
-          <p:cNvPr id="247" name="Google Shape;247;p9:notes"/>
+          <p:cNvPr id="293" name="Google Shape;293;p9:notes"/>
           <p:cNvSpPr txBox="1"/>
           <p:nvPr>
             <p:ph idx="1" type="body"/>
@@ -3007,7 +3065,7 @@
       </p:sp>
       <p:sp>
         <p:nvSpPr>
-          <p:cNvPr id="248" name="Google Shape;248;p9:notes"/>
+          <p:cNvPr id="294" name="Google Shape;294;p9:notes"/>
           <p:cNvSpPr txBox="1"/>
           <p:nvPr>
             <p:ph idx="12" type="sldNum"/>
@@ -3984,7 +4042,7 @@
     </p:bg>
     <p:spTree>
       <p:nvGrpSpPr>
-        <p:cNvPr id="275" name="Shape 275"/>
+        <p:cNvPr id="321" name="Shape 321"/>
         <p:cNvGrpSpPr/>
         <p:nvPr/>
       </p:nvGrpSpPr>
@@ -3998,7 +4056,7 @@
       </p:grpSpPr>
       <p:grpSp>
         <p:nvGrpSpPr>
-          <p:cNvPr id="276" name="Google Shape;276;g39683255e89_0_2"/>
+          <p:cNvPr id="322" name="Google Shape;322;g39683255e89_0_2"/>
           <p:cNvGrpSpPr/>
           <p:nvPr/>
         </p:nvGrpSpPr>
@@ -4012,7 +4070,7 @@
         </p:grpSpPr>
         <p:sp>
           <p:nvSpPr>
-            <p:cNvPr id="277" name="Google Shape;277;g39683255e89_0_2"/>
+            <p:cNvPr id="323" name="Google Shape;323;g39683255e89_0_2"/>
             <p:cNvSpPr/>
             <p:nvPr/>
           </p:nvSpPr>
@@ -4068,7 +4126,7 @@
         </p:sp>
         <p:sp>
           <p:nvSpPr>
-            <p:cNvPr id="278" name="Google Shape;278;g39683255e89_0_2"/>
+            <p:cNvPr id="324" name="Google Shape;324;g39683255e89_0_2"/>
             <p:cNvSpPr/>
             <p:nvPr/>
           </p:nvSpPr>
@@ -4117,7 +4175,7 @@
         </p:sp>
         <p:sp>
           <p:nvSpPr>
-            <p:cNvPr id="279" name="Google Shape;279;g39683255e89_0_2"/>
+            <p:cNvPr id="325" name="Google Shape;325;g39683255e89_0_2"/>
             <p:cNvSpPr/>
             <p:nvPr/>
           </p:nvSpPr>
@@ -4180,7 +4238,7 @@
         </p:sp>
         <p:sp>
           <p:nvSpPr>
-            <p:cNvPr id="280" name="Google Shape;280;g39683255e89_0_2"/>
+            <p:cNvPr id="326" name="Google Shape;326;g39683255e89_0_2"/>
             <p:cNvSpPr/>
             <p:nvPr/>
           </p:nvSpPr>
@@ -4229,7 +4287,7 @@
         </p:sp>
         <p:sp>
           <p:nvSpPr>
-            <p:cNvPr id="281" name="Google Shape;281;g39683255e89_0_2"/>
+            <p:cNvPr id="327" name="Google Shape;327;g39683255e89_0_2"/>
             <p:cNvSpPr/>
             <p:nvPr/>
           </p:nvSpPr>
@@ -4317,7 +4375,7 @@
       </p:grpSp>
       <p:grpSp>
         <p:nvGrpSpPr>
-          <p:cNvPr id="282" name="Google Shape;282;g39683255e89_0_2"/>
+          <p:cNvPr id="328" name="Google Shape;328;g39683255e89_0_2"/>
           <p:cNvGrpSpPr/>
           <p:nvPr/>
         </p:nvGrpSpPr>
@@ -4331,7 +4389,7 @@
         </p:grpSpPr>
         <p:sp>
           <p:nvSpPr>
-            <p:cNvPr id="283" name="Google Shape;283;g39683255e89_0_2"/>
+            <p:cNvPr id="329" name="Google Shape;329;g39683255e89_0_2"/>
             <p:cNvSpPr/>
             <p:nvPr/>
           </p:nvSpPr>
@@ -4388,7 +4446,7 @@
         </p:sp>
         <p:sp>
           <p:nvSpPr>
-            <p:cNvPr id="284" name="Google Shape;284;g39683255e89_0_2"/>
+            <p:cNvPr id="330" name="Google Shape;330;g39683255e89_0_2"/>
             <p:cNvSpPr/>
             <p:nvPr/>
           </p:nvSpPr>
@@ -4437,7 +4495,7 @@
         </p:sp>
         <p:sp>
           <p:nvSpPr>
-            <p:cNvPr id="285" name="Google Shape;285;g39683255e89_0_2"/>
+            <p:cNvPr id="331" name="Google Shape;331;g39683255e89_0_2"/>
             <p:cNvSpPr/>
             <p:nvPr/>
           </p:nvSpPr>
@@ -4512,7 +4570,7 @@
         </p:sp>
         <p:sp>
           <p:nvSpPr>
-            <p:cNvPr id="286" name="Google Shape;286;g39683255e89_0_2"/>
+            <p:cNvPr id="332" name="Google Shape;332;g39683255e89_0_2"/>
             <p:cNvSpPr/>
             <p:nvPr/>
           </p:nvSpPr>
@@ -4561,7 +4619,7 @@
         </p:sp>
         <p:sp>
           <p:nvSpPr>
-            <p:cNvPr id="287" name="Google Shape;287;g39683255e89_0_2"/>
+            <p:cNvPr id="333" name="Google Shape;333;g39683255e89_0_2"/>
             <p:cNvSpPr/>
             <p:nvPr/>
           </p:nvSpPr>
@@ -4625,7 +4683,7 @@
       </p:grpSp>
       <p:sp>
         <p:nvSpPr>
-          <p:cNvPr id="288" name="Google Shape;288;g39683255e89_0_2"/>
+          <p:cNvPr id="334" name="Google Shape;334;g39683255e89_0_2"/>
           <p:cNvSpPr/>
           <p:nvPr/>
         </p:nvSpPr>
@@ -4682,7 +4740,7 @@
       </p:sp>
       <p:sp>
         <p:nvSpPr>
-          <p:cNvPr id="289" name="Google Shape;289;g39683255e89_0_2"/>
+          <p:cNvPr id="335" name="Google Shape;335;g39683255e89_0_2"/>
           <p:cNvSpPr/>
           <p:nvPr/>
         </p:nvSpPr>
@@ -4745,7 +4803,7 @@
       </p:sp>
       <p:grpSp>
         <p:nvGrpSpPr>
-          <p:cNvPr id="290" name="Google Shape;290;g39683255e89_0_2"/>
+          <p:cNvPr id="336" name="Google Shape;336;g39683255e89_0_2"/>
           <p:cNvGrpSpPr/>
           <p:nvPr/>
         </p:nvGrpSpPr>
@@ -4759,7 +4817,7 @@
         </p:grpSpPr>
         <p:sp>
           <p:nvSpPr>
-            <p:cNvPr id="291" name="Google Shape;291;g39683255e89_0_2"/>
+            <p:cNvPr id="337" name="Google Shape;337;g39683255e89_0_2"/>
             <p:cNvSpPr/>
             <p:nvPr/>
           </p:nvSpPr>
@@ -4816,7 +4874,7 @@
         </p:sp>
         <p:sp>
           <p:nvSpPr>
-            <p:cNvPr id="292" name="Google Shape;292;g39683255e89_0_2"/>
+            <p:cNvPr id="338" name="Google Shape;338;g39683255e89_0_2"/>
             <p:cNvSpPr/>
             <p:nvPr/>
           </p:nvSpPr>
@@ -4891,7 +4949,7 @@
         </p:sp>
         <p:sp>
           <p:nvSpPr>
-            <p:cNvPr id="293" name="Google Shape;293;g39683255e89_0_2"/>
+            <p:cNvPr id="339" name="Google Shape;339;g39683255e89_0_2"/>
             <p:cNvSpPr/>
             <p:nvPr/>
           </p:nvSpPr>
@@ -4940,7 +4998,7 @@
         </p:sp>
         <p:sp>
           <p:nvSpPr>
-            <p:cNvPr id="294" name="Google Shape;294;g39683255e89_0_2"/>
+            <p:cNvPr id="340" name="Google Shape;340;g39683255e89_0_2"/>
             <p:cNvSpPr/>
             <p:nvPr/>
           </p:nvSpPr>
@@ -5063,7 +5121,7 @@
         </p:sp>
         <p:sp>
           <p:nvSpPr>
-            <p:cNvPr id="295" name="Google Shape;295;g39683255e89_0_2"/>
+            <p:cNvPr id="341" name="Google Shape;341;g39683255e89_0_2"/>
             <p:cNvSpPr/>
             <p:nvPr/>
           </p:nvSpPr>
@@ -5139,7 +5197,7 @@
     </p:bg>
     <p:spTree>
       <p:nvGrpSpPr>
-        <p:cNvPr id="300" name="Shape 300"/>
+        <p:cNvPr id="346" name="Shape 346"/>
         <p:cNvGrpSpPr/>
         <p:nvPr/>
       </p:nvGrpSpPr>
@@ -5153,7 +5211,7 @@
       </p:grpSpPr>
       <p:sp>
         <p:nvSpPr>
-          <p:cNvPr id="301" name="Google Shape;301;g39683255e89_0_41"/>
+          <p:cNvPr id="347" name="Google Shape;347;g39683255e89_0_41"/>
           <p:cNvSpPr/>
           <p:nvPr/>
         </p:nvSpPr>
@@ -5240,7 +5298,7 @@
       </p:sp>
       <p:sp>
         <p:nvSpPr>
-          <p:cNvPr id="302" name="Google Shape;302;g39683255e89_0_41"/>
+          <p:cNvPr id="348" name="Google Shape;348;g39683255e89_0_41"/>
           <p:cNvSpPr/>
           <p:nvPr/>
         </p:nvSpPr>
@@ -5304,7 +5362,7 @@
       </p:sp>
       <p:sp>
         <p:nvSpPr>
-          <p:cNvPr id="303" name="Google Shape;303;g39683255e89_0_41"/>
+          <p:cNvPr id="349" name="Google Shape;349;g39683255e89_0_41"/>
           <p:cNvSpPr/>
           <p:nvPr/>
         </p:nvSpPr>
@@ -5353,7 +5411,7 @@
       </p:sp>
       <p:sp>
         <p:nvSpPr>
-          <p:cNvPr id="304" name="Google Shape;304;g39683255e89_0_41"/>
+          <p:cNvPr id="350" name="Google Shape;350;g39683255e89_0_41"/>
           <p:cNvSpPr/>
           <p:nvPr/>
         </p:nvSpPr>
@@ -5428,7 +5486,7 @@
       </p:sp>
       <p:sp>
         <p:nvSpPr>
-          <p:cNvPr id="305" name="Google Shape;305;g39683255e89_0_41"/>
+          <p:cNvPr id="351" name="Google Shape;351;g39683255e89_0_41"/>
           <p:cNvSpPr/>
           <p:nvPr/>
         </p:nvSpPr>
@@ -5491,7 +5549,7 @@
       </p:sp>
       <p:sp>
         <p:nvSpPr>
-          <p:cNvPr id="306" name="Google Shape;306;g39683255e89_0_41"/>
+          <p:cNvPr id="352" name="Google Shape;352;g39683255e89_0_41"/>
           <p:cNvSpPr/>
           <p:nvPr/>
         </p:nvSpPr>
@@ -5547,7 +5605,7 @@
       </p:sp>
       <p:sp>
         <p:nvSpPr>
-          <p:cNvPr id="307" name="Google Shape;307;g39683255e89_0_41"/>
+          <p:cNvPr id="353" name="Google Shape;353;g39683255e89_0_41"/>
           <p:cNvSpPr/>
           <p:nvPr/>
         </p:nvSpPr>
@@ -5604,7 +5662,7 @@
       </p:sp>
       <p:sp>
         <p:nvSpPr>
-          <p:cNvPr id="308" name="Google Shape;308;g39683255e89_0_41"/>
+          <p:cNvPr id="354" name="Google Shape;354;g39683255e89_0_41"/>
           <p:cNvSpPr/>
           <p:nvPr/>
         </p:nvSpPr>
@@ -5667,7 +5725,7 @@
       </p:sp>
       <p:sp>
         <p:nvSpPr>
-          <p:cNvPr id="309" name="Google Shape;309;g39683255e89_0_41"/>
+          <p:cNvPr id="355" name="Google Shape;355;g39683255e89_0_41"/>
           <p:cNvSpPr/>
           <p:nvPr/>
         </p:nvSpPr>
@@ -5716,7 +5774,7 @@
       </p:sp>
       <p:sp>
         <p:nvSpPr>
-          <p:cNvPr id="310" name="Google Shape;310;g39683255e89_0_41"/>
+          <p:cNvPr id="356" name="Google Shape;356;g39683255e89_0_41"/>
           <p:cNvSpPr/>
           <p:nvPr/>
         </p:nvSpPr>
@@ -5791,7 +5849,7 @@
       </p:sp>
       <p:sp>
         <p:nvSpPr>
-          <p:cNvPr id="311" name="Google Shape;311;g39683255e89_0_41"/>
+          <p:cNvPr id="357" name="Google Shape;357;g39683255e89_0_41"/>
           <p:cNvSpPr/>
           <p:nvPr/>
         </p:nvSpPr>
@@ -5854,7 +5912,7 @@
       </p:sp>
       <p:sp>
         <p:nvSpPr>
-          <p:cNvPr id="312" name="Google Shape;312;g39683255e89_0_41"/>
+          <p:cNvPr id="358" name="Google Shape;358;g39683255e89_0_41"/>
           <p:cNvSpPr/>
           <p:nvPr/>
         </p:nvSpPr>
@@ -5918,7 +5976,7 @@
       </p:sp>
       <p:sp>
         <p:nvSpPr>
-          <p:cNvPr id="313" name="Google Shape;313;g39683255e89_0_41"/>
+          <p:cNvPr id="359" name="Google Shape;359;g39683255e89_0_41"/>
           <p:cNvSpPr/>
           <p:nvPr/>
         </p:nvSpPr>
@@ -5967,7 +6025,7 @@
       </p:sp>
       <p:sp>
         <p:nvSpPr>
-          <p:cNvPr id="314" name="Google Shape;314;g39683255e89_0_41"/>
+          <p:cNvPr id="360" name="Google Shape;360;g39683255e89_0_41"/>
           <p:cNvSpPr/>
           <p:nvPr/>
         </p:nvSpPr>
@@ -6042,7 +6100,7 @@
       </p:sp>
       <p:sp>
         <p:nvSpPr>
-          <p:cNvPr id="315" name="Google Shape;315;g39683255e89_0_41"/>
+          <p:cNvPr id="361" name="Google Shape;361;g39683255e89_0_41"/>
           <p:cNvSpPr/>
           <p:nvPr/>
         </p:nvSpPr>
@@ -6091,7 +6149,7 @@
       </p:sp>
       <p:sp>
         <p:nvSpPr>
-          <p:cNvPr id="316" name="Google Shape;316;g39683255e89_0_41"/>
+          <p:cNvPr id="362" name="Google Shape;362;g39683255e89_0_41"/>
           <p:cNvSpPr/>
           <p:nvPr/>
         </p:nvSpPr>
@@ -6154,7 +6212,7 @@
       </p:sp>
       <p:sp>
         <p:nvSpPr>
-          <p:cNvPr id="317" name="Google Shape;317;g39683255e89_0_41"/>
+          <p:cNvPr id="363" name="Google Shape;363;g39683255e89_0_41"/>
           <p:cNvSpPr/>
           <p:nvPr/>
         </p:nvSpPr>
@@ -6217,7 +6275,7 @@
       </p:sp>
       <p:sp>
         <p:nvSpPr>
-          <p:cNvPr id="318" name="Google Shape;318;g39683255e89_0_41"/>
+          <p:cNvPr id="364" name="Google Shape;364;g39683255e89_0_41"/>
           <p:cNvSpPr/>
           <p:nvPr/>
         </p:nvSpPr>
@@ -6274,7 +6332,7 @@
       </p:sp>
       <p:sp>
         <p:nvSpPr>
-          <p:cNvPr id="319" name="Google Shape;319;g39683255e89_0_41"/>
+          <p:cNvPr id="365" name="Google Shape;365;g39683255e89_0_41"/>
           <p:cNvSpPr/>
           <p:nvPr/>
         </p:nvSpPr>
@@ -6323,7 +6381,7 @@
       </p:sp>
       <p:sp>
         <p:nvSpPr>
-          <p:cNvPr id="320" name="Google Shape;320;g39683255e89_0_41"/>
+          <p:cNvPr id="366" name="Google Shape;366;g39683255e89_0_41"/>
           <p:cNvSpPr/>
           <p:nvPr/>
         </p:nvSpPr>
@@ -6464,7 +6522,7 @@
     </p:bg>
     <p:spTree>
       <p:nvGrpSpPr>
-        <p:cNvPr id="325" name="Shape 325"/>
+        <p:cNvPr id="371" name="Shape 371"/>
         <p:cNvGrpSpPr/>
         <p:nvPr/>
       </p:nvGrpSpPr>
@@ -6478,7 +6536,7 @@
       </p:grpSpPr>
       <p:sp>
         <p:nvSpPr>
-          <p:cNvPr id="326" name="Google Shape;326;g39683255e89_0_78"/>
+          <p:cNvPr id="372" name="Google Shape;372;g39683255e89_0_78"/>
           <p:cNvSpPr/>
           <p:nvPr/>
         </p:nvSpPr>
@@ -6553,7 +6611,7 @@
       </p:sp>
       <p:sp>
         <p:nvSpPr>
-          <p:cNvPr id="327" name="Google Shape;327;g39683255e89_0_78"/>
+          <p:cNvPr id="373" name="Google Shape;373;g39683255e89_0_78"/>
           <p:cNvSpPr/>
           <p:nvPr/>
         </p:nvSpPr>
@@ -6609,7 +6667,7 @@
       </p:sp>
       <p:sp>
         <p:nvSpPr>
-          <p:cNvPr id="328" name="Google Shape;328;g39683255e89_0_78"/>
+          <p:cNvPr id="374" name="Google Shape;374;g39683255e89_0_78"/>
           <p:cNvSpPr/>
           <p:nvPr/>
         </p:nvSpPr>
@@ -6658,7 +6716,7 @@
       </p:sp>
       <p:sp>
         <p:nvSpPr>
-          <p:cNvPr id="329" name="Google Shape;329;g39683255e89_0_78"/>
+          <p:cNvPr id="375" name="Google Shape;375;g39683255e89_0_78"/>
           <p:cNvSpPr/>
           <p:nvPr/>
         </p:nvSpPr>
@@ -6721,7 +6779,7 @@
       </p:sp>
       <p:sp>
         <p:nvSpPr>
-          <p:cNvPr id="330" name="Google Shape;330;g39683255e89_0_78"/>
+          <p:cNvPr id="376" name="Google Shape;376;g39683255e89_0_78"/>
           <p:cNvSpPr/>
           <p:nvPr/>
         </p:nvSpPr>
@@ -6784,7 +6842,7 @@
       </p:sp>
       <p:sp>
         <p:nvSpPr>
-          <p:cNvPr id="331" name="Google Shape;331;g39683255e89_0_78"/>
+          <p:cNvPr id="377" name="Google Shape;377;g39683255e89_0_78"/>
           <p:cNvSpPr/>
           <p:nvPr/>
         </p:nvSpPr>
@@ -6840,7 +6898,7 @@
       </p:sp>
       <p:sp>
         <p:nvSpPr>
-          <p:cNvPr id="332" name="Google Shape;332;g39683255e89_0_78"/>
+          <p:cNvPr id="378" name="Google Shape;378;g39683255e89_0_78"/>
           <p:cNvSpPr/>
           <p:nvPr/>
         </p:nvSpPr>
@@ -6889,7 +6947,7 @@
       </p:sp>
       <p:sp>
         <p:nvSpPr>
-          <p:cNvPr id="333" name="Google Shape;333;g39683255e89_0_78"/>
+          <p:cNvPr id="379" name="Google Shape;379;g39683255e89_0_78"/>
           <p:cNvSpPr/>
           <p:nvPr/>
         </p:nvSpPr>
@@ -6952,7 +7010,7 @@
       </p:sp>
       <p:sp>
         <p:nvSpPr>
-          <p:cNvPr id="334" name="Google Shape;334;g39683255e89_0_78"/>
+          <p:cNvPr id="380" name="Google Shape;380;g39683255e89_0_78"/>
           <p:cNvSpPr/>
           <p:nvPr/>
         </p:nvSpPr>
@@ -7015,7 +7073,7 @@
       </p:sp>
       <p:sp>
         <p:nvSpPr>
-          <p:cNvPr id="335" name="Google Shape;335;g39683255e89_0_78"/>
+          <p:cNvPr id="381" name="Google Shape;381;g39683255e89_0_78"/>
           <p:cNvSpPr/>
           <p:nvPr/>
         </p:nvSpPr>
@@ -7071,7 +7129,7 @@
       </p:sp>
       <p:sp>
         <p:nvSpPr>
-          <p:cNvPr id="336" name="Google Shape;336;g39683255e89_0_78"/>
+          <p:cNvPr id="382" name="Google Shape;382;g39683255e89_0_78"/>
           <p:cNvSpPr/>
           <p:nvPr/>
         </p:nvSpPr>
@@ -7120,7 +7178,7 @@
       </p:sp>
       <p:sp>
         <p:nvSpPr>
-          <p:cNvPr id="337" name="Google Shape;337;g39683255e89_0_78"/>
+          <p:cNvPr id="383" name="Google Shape;383;g39683255e89_0_78"/>
           <p:cNvSpPr/>
           <p:nvPr/>
         </p:nvSpPr>
@@ -7183,7 +7241,7 @@
       </p:sp>
       <p:sp>
         <p:nvSpPr>
-          <p:cNvPr id="338" name="Google Shape;338;g39683255e89_0_78"/>
+          <p:cNvPr id="384" name="Google Shape;384;g39683255e89_0_78"/>
           <p:cNvSpPr/>
           <p:nvPr/>
         </p:nvSpPr>
@@ -7246,7 +7304,7 @@
       </p:sp>
       <p:sp>
         <p:nvSpPr>
-          <p:cNvPr id="339" name="Google Shape;339;g39683255e89_0_78"/>
+          <p:cNvPr id="385" name="Google Shape;385;g39683255e89_0_78"/>
           <p:cNvSpPr/>
           <p:nvPr/>
         </p:nvSpPr>
@@ -7302,7 +7360,7 @@
       </p:sp>
       <p:sp>
         <p:nvSpPr>
-          <p:cNvPr id="340" name="Google Shape;340;g39683255e89_0_78"/>
+          <p:cNvPr id="386" name="Google Shape;386;g39683255e89_0_78"/>
           <p:cNvSpPr/>
           <p:nvPr/>
         </p:nvSpPr>
@@ -7351,7 +7409,7 @@
       </p:sp>
       <p:sp>
         <p:nvSpPr>
-          <p:cNvPr id="341" name="Google Shape;341;g39683255e89_0_78"/>
+          <p:cNvPr id="387" name="Google Shape;387;g39683255e89_0_78"/>
           <p:cNvSpPr/>
           <p:nvPr/>
         </p:nvSpPr>
@@ -7414,7 +7472,7 @@
       </p:sp>
       <p:sp>
         <p:nvSpPr>
-          <p:cNvPr id="342" name="Google Shape;342;g39683255e89_0_78"/>
+          <p:cNvPr id="388" name="Google Shape;388;g39683255e89_0_78"/>
           <p:cNvSpPr/>
           <p:nvPr/>
         </p:nvSpPr>
@@ -7477,7 +7535,7 @@
       </p:sp>
       <p:sp>
         <p:nvSpPr>
-          <p:cNvPr id="343" name="Google Shape;343;g39683255e89_0_78"/>
+          <p:cNvPr id="389" name="Google Shape;389;g39683255e89_0_78"/>
           <p:cNvSpPr/>
           <p:nvPr/>
         </p:nvSpPr>
@@ -7552,7 +7610,7 @@
     </p:bg>
     <p:spTree>
       <p:nvGrpSpPr>
-        <p:cNvPr id="348" name="Shape 348"/>
+        <p:cNvPr id="394" name="Shape 394"/>
         <p:cNvGrpSpPr/>
         <p:nvPr/>
       </p:nvGrpSpPr>
@@ -7566,7 +7624,7 @@
       </p:grpSpPr>
       <p:sp>
         <p:nvSpPr>
-          <p:cNvPr id="349" name="Google Shape;349;p10"/>
+          <p:cNvPr id="395" name="Google Shape;395;p10"/>
           <p:cNvSpPr/>
           <p:nvPr/>
         </p:nvSpPr>
@@ -7623,7 +7681,7 @@
       </p:sp>
       <p:sp>
         <p:nvSpPr>
-          <p:cNvPr id="350" name="Google Shape;350;p10"/>
+          <p:cNvPr id="396" name="Google Shape;396;p10"/>
           <p:cNvSpPr/>
           <p:nvPr/>
         </p:nvSpPr>
@@ -7686,7 +7744,7 @@
       </p:sp>
       <p:sp>
         <p:nvSpPr>
-          <p:cNvPr id="351" name="Google Shape;351;p10"/>
+          <p:cNvPr id="397" name="Google Shape;397;p10"/>
           <p:cNvSpPr/>
           <p:nvPr/>
         </p:nvSpPr>
@@ -7743,7 +7801,7 @@
       </p:sp>
       <p:sp>
         <p:nvSpPr>
-          <p:cNvPr id="352" name="Google Shape;352;p10"/>
+          <p:cNvPr id="398" name="Google Shape;398;p10"/>
           <p:cNvSpPr/>
           <p:nvPr/>
         </p:nvSpPr>
@@ -7800,7 +7858,7 @@
       </p:sp>
       <p:sp>
         <p:nvSpPr>
-          <p:cNvPr id="353" name="Google Shape;353;p10"/>
+          <p:cNvPr id="399" name="Google Shape;399;p10"/>
           <p:cNvSpPr/>
           <p:nvPr/>
         </p:nvSpPr>
@@ -7863,7 +7921,7 @@
       </p:sp>
       <p:sp>
         <p:nvSpPr>
-          <p:cNvPr id="354" name="Google Shape;354;p10"/>
+          <p:cNvPr id="400" name="Google Shape;400;p10"/>
           <p:cNvSpPr/>
           <p:nvPr/>
         </p:nvSpPr>
@@ -7926,7 +7984,7 @@
       </p:sp>
       <p:sp>
         <p:nvSpPr>
-          <p:cNvPr id="355" name="Google Shape;355;p10"/>
+          <p:cNvPr id="401" name="Google Shape;401;p10"/>
           <p:cNvSpPr/>
           <p:nvPr/>
         </p:nvSpPr>
@@ -7989,7 +8047,7 @@
       </p:sp>
       <p:sp>
         <p:nvSpPr>
-          <p:cNvPr id="356" name="Google Shape;356;p10"/>
+          <p:cNvPr id="402" name="Google Shape;402;p10"/>
           <p:cNvSpPr/>
           <p:nvPr/>
         </p:nvSpPr>
@@ -8052,7 +8110,7 @@
       </p:sp>
       <p:sp>
         <p:nvSpPr>
-          <p:cNvPr id="357" name="Google Shape;357;p10"/>
+          <p:cNvPr id="403" name="Google Shape;403;p10"/>
           <p:cNvSpPr/>
           <p:nvPr/>
         </p:nvSpPr>
@@ -8109,7 +8167,7 @@
       </p:sp>
       <p:sp>
         <p:nvSpPr>
-          <p:cNvPr id="358" name="Google Shape;358;p10"/>
+          <p:cNvPr id="404" name="Google Shape;404;p10"/>
           <p:cNvSpPr/>
           <p:nvPr/>
         </p:nvSpPr>
@@ -8166,7 +8224,7 @@
       </p:sp>
       <p:sp>
         <p:nvSpPr>
-          <p:cNvPr id="359" name="Google Shape;359;p10"/>
+          <p:cNvPr id="405" name="Google Shape;405;p10"/>
           <p:cNvSpPr/>
           <p:nvPr/>
         </p:nvSpPr>
@@ -8229,7 +8287,7 @@
       </p:sp>
       <p:sp>
         <p:nvSpPr>
-          <p:cNvPr id="360" name="Google Shape;360;p10"/>
+          <p:cNvPr id="406" name="Google Shape;406;p10"/>
           <p:cNvSpPr/>
           <p:nvPr/>
         </p:nvSpPr>
@@ -8292,7 +8350,7 @@
       </p:sp>
       <p:sp>
         <p:nvSpPr>
-          <p:cNvPr id="361" name="Google Shape;361;p10"/>
+          <p:cNvPr id="407" name="Google Shape;407;p10"/>
           <p:cNvSpPr/>
           <p:nvPr/>
         </p:nvSpPr>
@@ -8355,7 +8413,7 @@
       </p:sp>
       <p:sp>
         <p:nvSpPr>
-          <p:cNvPr id="362" name="Google Shape;362;p10"/>
+          <p:cNvPr id="408" name="Google Shape;408;p10"/>
           <p:cNvSpPr/>
           <p:nvPr/>
         </p:nvSpPr>
@@ -8418,7 +8476,7 @@
       </p:sp>
       <p:sp>
         <p:nvSpPr>
-          <p:cNvPr id="363" name="Google Shape;363;p10"/>
+          <p:cNvPr id="409" name="Google Shape;409;p10"/>
           <p:cNvSpPr/>
           <p:nvPr/>
         </p:nvSpPr>
@@ -8475,7 +8533,7 @@
       </p:sp>
       <p:sp>
         <p:nvSpPr>
-          <p:cNvPr id="364" name="Google Shape;364;p10"/>
+          <p:cNvPr id="410" name="Google Shape;410;p10"/>
           <p:cNvSpPr/>
           <p:nvPr/>
         </p:nvSpPr>
@@ -8532,7 +8590,7 @@
       </p:sp>
       <p:sp>
         <p:nvSpPr>
-          <p:cNvPr id="365" name="Google Shape;365;p10"/>
+          <p:cNvPr id="411" name="Google Shape;411;p10"/>
           <p:cNvSpPr/>
           <p:nvPr/>
         </p:nvSpPr>
@@ -8595,7 +8653,7 @@
       </p:sp>
       <p:sp>
         <p:nvSpPr>
-          <p:cNvPr id="366" name="Google Shape;366;p10"/>
+          <p:cNvPr id="412" name="Google Shape;412;p10"/>
           <p:cNvSpPr/>
           <p:nvPr/>
         </p:nvSpPr>
@@ -8658,7 +8716,7 @@
       </p:sp>
       <p:sp>
         <p:nvSpPr>
-          <p:cNvPr id="367" name="Google Shape;367;p10"/>
+          <p:cNvPr id="413" name="Google Shape;413;p10"/>
           <p:cNvSpPr/>
           <p:nvPr/>
         </p:nvSpPr>
@@ -8721,7 +8779,7 @@
       </p:sp>
       <p:sp>
         <p:nvSpPr>
-          <p:cNvPr id="368" name="Google Shape;368;p10"/>
+          <p:cNvPr id="414" name="Google Shape;414;p10"/>
           <p:cNvSpPr/>
           <p:nvPr/>
         </p:nvSpPr>
@@ -8784,7 +8842,7 @@
       </p:sp>
       <p:sp>
         <p:nvSpPr>
-          <p:cNvPr id="369" name="Google Shape;369;p10"/>
+          <p:cNvPr id="415" name="Google Shape;415;p10"/>
           <p:cNvSpPr/>
           <p:nvPr/>
         </p:nvSpPr>
@@ -8841,7 +8899,7 @@
       </p:sp>
       <p:sp>
         <p:nvSpPr>
-          <p:cNvPr id="370" name="Google Shape;370;p10"/>
+          <p:cNvPr id="416" name="Google Shape;416;p10"/>
           <p:cNvSpPr/>
           <p:nvPr/>
         </p:nvSpPr>
@@ -8898,7 +8956,7 @@
       </p:sp>
       <p:sp>
         <p:nvSpPr>
-          <p:cNvPr id="371" name="Google Shape;371;p10"/>
+          <p:cNvPr id="417" name="Google Shape;417;p10"/>
           <p:cNvSpPr/>
           <p:nvPr/>
         </p:nvSpPr>
@@ -8961,7 +9019,7 @@
       </p:sp>
       <p:sp>
         <p:nvSpPr>
-          <p:cNvPr id="372" name="Google Shape;372;p10"/>
+          <p:cNvPr id="418" name="Google Shape;418;p10"/>
           <p:cNvSpPr/>
           <p:nvPr/>
         </p:nvSpPr>
@@ -9024,7 +9082,7 @@
       </p:sp>
       <p:sp>
         <p:nvSpPr>
-          <p:cNvPr id="373" name="Google Shape;373;p10"/>
+          <p:cNvPr id="419" name="Google Shape;419;p10"/>
           <p:cNvSpPr/>
           <p:nvPr/>
         </p:nvSpPr>
@@ -9161,7 +9219,7 @@
       </p:sp>
       <p:sp>
         <p:nvSpPr>
-          <p:cNvPr id="374" name="Google Shape;374;p10"/>
+          <p:cNvPr id="420" name="Google Shape;420;p10"/>
           <p:cNvSpPr/>
           <p:nvPr/>
         </p:nvSpPr>
@@ -9224,7 +9282,7 @@
       </p:sp>
       <p:sp>
         <p:nvSpPr>
-          <p:cNvPr id="375" name="Google Shape;375;p10"/>
+          <p:cNvPr id="421" name="Google Shape;421;p10"/>
           <p:cNvSpPr/>
           <p:nvPr/>
         </p:nvSpPr>
@@ -9281,7 +9339,7 @@
       </p:sp>
       <p:sp>
         <p:nvSpPr>
-          <p:cNvPr id="376" name="Google Shape;376;p10"/>
+          <p:cNvPr id="422" name="Google Shape;422;p10"/>
           <p:cNvSpPr/>
           <p:nvPr/>
         </p:nvSpPr>
@@ -9338,7 +9396,7 @@
       </p:sp>
       <p:sp>
         <p:nvSpPr>
-          <p:cNvPr id="377" name="Google Shape;377;p10"/>
+          <p:cNvPr id="423" name="Google Shape;423;p10"/>
           <p:cNvSpPr/>
           <p:nvPr/>
         </p:nvSpPr>
@@ -9401,7 +9459,7 @@
       </p:sp>
       <p:sp>
         <p:nvSpPr>
-          <p:cNvPr id="378" name="Google Shape;378;p10"/>
+          <p:cNvPr id="424" name="Google Shape;424;p10"/>
           <p:cNvSpPr/>
           <p:nvPr/>
         </p:nvSpPr>
@@ -9464,7 +9522,7 @@
       </p:sp>
       <p:sp>
         <p:nvSpPr>
-          <p:cNvPr id="379" name="Google Shape;379;p10"/>
+          <p:cNvPr id="425" name="Google Shape;425;p10"/>
           <p:cNvSpPr/>
           <p:nvPr/>
         </p:nvSpPr>
@@ -9527,7 +9585,7 @@
       </p:sp>
       <p:sp>
         <p:nvSpPr>
-          <p:cNvPr id="380" name="Google Shape;380;p10"/>
+          <p:cNvPr id="426" name="Google Shape;426;p10"/>
           <p:cNvSpPr/>
           <p:nvPr/>
         </p:nvSpPr>
@@ -9599,9 +9657,16 @@
 <file path=ppt/slides/slide2.xml><?xml version="1.0" encoding="utf-8"?>
 <p:sld xmlns:a="http://schemas.openxmlformats.org/drawingml/2006/main" xmlns:r="http://schemas.openxmlformats.org/officeDocument/2006/relationships" xmlns:mc="http://schemas.openxmlformats.org/markup-compatibility/2006" xmlns:mv="urn:schemas-microsoft-com:mac:vml" xmlns:p="http://schemas.openxmlformats.org/presentationml/2006/main" xmlns:c="http://schemas.openxmlformats.org/drawingml/2006/chart" xmlns:dgm="http://schemas.openxmlformats.org/drawingml/2006/diagram" xmlns:o="urn:schemas-microsoft-com:office:office" xmlns:v="urn:schemas-microsoft-com:vml" xmlns:pvml="urn:schemas-microsoft-com:office:powerpoint" xmlns:com="http://schemas.openxmlformats.org/drawingml/2006/compatibility" xmlns:p14="http://schemas.microsoft.com/office/powerpoint/2010/main" xmlns:p15="http://schemas.microsoft.com/office/powerpoint/2012/main" xmlns:ahyp="http://schemas.microsoft.com/office/drawing/2018/hyperlinkcolor">
   <p:cSld>
+    <p:bg>
+      <p:bgPr>
+        <a:solidFill>
+          <a:srgbClr val="04101E"/>
+        </a:solidFill>
+      </p:bgPr>
+    </p:bg>
     <p:spTree>
       <p:nvGrpSpPr>
-        <p:cNvPr id="17" name="Shape 17"/>
+        <p:cNvPr id="18" name="Shape 18"/>
         <p:cNvGrpSpPr/>
         <p:nvPr/>
       </p:nvGrpSpPr>
@@ -9613,24 +9678,65 @@
           <a:chExt cx="0" cy="0"/>
         </a:xfrm>
       </p:grpSpPr>
-      <p:pic>
-        <p:nvPicPr>
-          <p:cNvPr descr="Mejorar esta diapositiva" id="18" name="Google Shape;18;g3d2615fdc14_0_28"/>
-          <p:cNvPicPr preferRelativeResize="0"/>
-          <p:nvPr/>
-        </p:nvPicPr>
-        <p:blipFill>
-          <a:blip r:embed="rId3">
-            <a:alphaModFix/>
-          </a:blip>
-          <a:stretch>
-            <a:fillRect/>
-          </a:stretch>
-        </p:blipFill>
-        <p:spPr>
-          <a:xfrm>
-            <a:off x="-35700" y="0"/>
-            <a:ext cx="9210675" cy="5143500"/>
+      <p:sp>
+        <p:nvSpPr>
+          <p:cNvPr id="19" name="Google Shape;19;g39683255e89_0_128"/>
+          <p:cNvSpPr/>
+          <p:nvPr/>
+        </p:nvSpPr>
+        <p:spPr>
+          <a:xfrm>
+            <a:off x="0" y="0"/>
+            <a:ext cx="54900" cy="5143500"/>
+          </a:xfrm>
+          <a:prstGeom prst="rect">
+            <a:avLst/>
+          </a:prstGeom>
+          <a:solidFill>
+            <a:srgbClr val="0A7EA4"/>
+          </a:solidFill>
+          <a:ln cap="flat" cmpd="sng" w="12700">
+            <a:solidFill>
+              <a:srgbClr val="0A7EA4"/>
+            </a:solidFill>
+            <a:prstDash val="solid"/>
+            <a:round/>
+            <a:headEnd len="sm" w="sm" type="none"/>
+            <a:tailEnd len="sm" w="sm" type="none"/>
+          </a:ln>
+        </p:spPr>
+        <p:txBody>
+          <a:bodyPr anchorCtr="0" anchor="ctr" bIns="91425" lIns="91425" spcFirstLastPara="1" rIns="91425" wrap="square" tIns="91425">
+            <a:noAutofit/>
+          </a:bodyPr>
+          <a:lstStyle/>
+          <a:p>
+            <a:pPr indent="0" lvl="0" marL="0" rtl="0" algn="l">
+              <a:spcBef>
+                <a:spcPts val="0"/>
+              </a:spcBef>
+              <a:spcAft>
+                <a:spcPts val="0"/>
+              </a:spcAft>
+              <a:buNone/>
+            </a:pPr>
+            <a:r>
+              <a:t/>
+            </a:r>
+            <a:endParaRPr/>
+          </a:p>
+        </p:txBody>
+      </p:sp>
+      <p:sp>
+        <p:nvSpPr>
+          <p:cNvPr id="20" name="Google Shape;20;g39683255e89_0_128"/>
+          <p:cNvSpPr/>
+          <p:nvPr/>
+        </p:nvSpPr>
+        <p:spPr>
+          <a:xfrm>
+            <a:off x="2009145" y="256150"/>
+            <a:ext cx="4533900" cy="548700"/>
           </a:xfrm>
           <a:prstGeom prst="rect">
             <a:avLst/>
@@ -9640,7 +9746,2781 @@
             <a:noFill/>
           </a:ln>
         </p:spPr>
-      </p:pic>
+        <p:txBody>
+          <a:bodyPr anchorCtr="0" anchor="ctr" bIns="45700" lIns="91425" spcFirstLastPara="1" rIns="91425" wrap="square" tIns="45700">
+            <a:noAutofit/>
+          </a:bodyPr>
+          <a:lstStyle/>
+          <a:p>
+            <a:pPr indent="0" lvl="0" marL="0" marR="0" rtl="0" algn="l">
+              <a:spcBef>
+                <a:spcPts val="0"/>
+              </a:spcBef>
+              <a:spcAft>
+                <a:spcPts val="0"/>
+              </a:spcAft>
+              <a:buClr>
+                <a:srgbClr val="FFFFFF"/>
+              </a:buClr>
+              <a:buSzPts val="2600"/>
+              <a:buFont typeface="Calibri"/>
+              <a:buNone/>
+            </a:pPr>
+            <a:r>
+              <a:rPr b="1" i="0" lang="en-US" sz="2600" u="none" cap="none" strike="noStrike">
+                <a:solidFill>
+                  <a:srgbClr val="FFFFFF"/>
+                </a:solidFill>
+                <a:latin typeface="Calibri"/>
+                <a:ea typeface="Calibri"/>
+                <a:cs typeface="Calibri"/>
+                <a:sym typeface="Calibri"/>
+              </a:rPr>
+              <a:t>Contenido de la presentación</a:t>
+            </a:r>
+            <a:endParaRPr b="0" i="0" sz="2600" u="none" cap="none" strike="noStrike">
+              <a:solidFill>
+                <a:schemeClr val="dk1"/>
+              </a:solidFill>
+              <a:latin typeface="Calibri"/>
+              <a:ea typeface="Calibri"/>
+              <a:cs typeface="Calibri"/>
+              <a:sym typeface="Calibri"/>
+            </a:endParaRPr>
+          </a:p>
+        </p:txBody>
+      </p:sp>
+      <p:sp>
+        <p:nvSpPr>
+          <p:cNvPr id="21" name="Google Shape;21;g39683255e89_0_128"/>
+          <p:cNvSpPr/>
+          <p:nvPr/>
+        </p:nvSpPr>
+        <p:spPr>
+          <a:xfrm>
+            <a:off x="463550" y="1013765"/>
+            <a:ext cx="502800" cy="502800"/>
+          </a:xfrm>
+          <a:prstGeom prst="rect">
+            <a:avLst/>
+          </a:prstGeom>
+          <a:solidFill>
+            <a:srgbClr val="0A7EA4"/>
+          </a:solidFill>
+          <a:ln cap="flat" cmpd="sng" w="9525">
+            <a:solidFill>
+              <a:srgbClr val="0A7EA4"/>
+            </a:solidFill>
+            <a:prstDash val="solid"/>
+            <a:round/>
+            <a:headEnd len="sm" w="sm" type="none"/>
+            <a:tailEnd len="sm" w="sm" type="none"/>
+          </a:ln>
+          <a:effectLst>
+            <a:outerShdw blurRad="101600" rotWithShape="0" algn="bl" dir="8100000" dist="38100">
+              <a:srgbClr val="000000">
+                <a:alpha val="30199"/>
+              </a:srgbClr>
+            </a:outerShdw>
+          </a:effectLst>
+        </p:spPr>
+        <p:txBody>
+          <a:bodyPr anchorCtr="0" anchor="ctr" bIns="91425" lIns="91425" spcFirstLastPara="1" rIns="91425" wrap="square" tIns="91425">
+            <a:noAutofit/>
+          </a:bodyPr>
+          <a:lstStyle/>
+          <a:p>
+            <a:pPr indent="0" lvl="0" marL="0" rtl="0" algn="l">
+              <a:spcBef>
+                <a:spcPts val="0"/>
+              </a:spcBef>
+              <a:spcAft>
+                <a:spcPts val="0"/>
+              </a:spcAft>
+              <a:buNone/>
+            </a:pPr>
+            <a:r>
+              <a:t/>
+            </a:r>
+            <a:endParaRPr/>
+          </a:p>
+        </p:txBody>
+      </p:sp>
+      <p:sp>
+        <p:nvSpPr>
+          <p:cNvPr id="22" name="Google Shape;22;g39683255e89_0_128"/>
+          <p:cNvSpPr/>
+          <p:nvPr/>
+        </p:nvSpPr>
+        <p:spPr>
+          <a:xfrm>
+            <a:off x="463550" y="1013765"/>
+            <a:ext cx="502800" cy="502800"/>
+          </a:xfrm>
+          <a:prstGeom prst="rect">
+            <a:avLst/>
+          </a:prstGeom>
+          <a:noFill/>
+          <a:ln>
+            <a:noFill/>
+          </a:ln>
+        </p:spPr>
+        <p:txBody>
+          <a:bodyPr anchorCtr="0" anchor="ctr" bIns="0" lIns="0" spcFirstLastPara="1" rIns="0" wrap="square" tIns="0">
+            <a:noAutofit/>
+          </a:bodyPr>
+          <a:lstStyle/>
+          <a:p>
+            <a:pPr indent="0" lvl="0" marL="0" marR="0" rtl="0" algn="ctr">
+              <a:spcBef>
+                <a:spcPts val="0"/>
+              </a:spcBef>
+              <a:spcAft>
+                <a:spcPts val="0"/>
+              </a:spcAft>
+              <a:buClr>
+                <a:srgbClr val="FFFFFF"/>
+              </a:buClr>
+              <a:buSzPts val="1300"/>
+              <a:buFont typeface="Calibri"/>
+              <a:buNone/>
+            </a:pPr>
+            <a:r>
+              <a:rPr b="1" i="0" lang="en-US" sz="1300" u="none" cap="none" strike="noStrike">
+                <a:solidFill>
+                  <a:srgbClr val="FFFFFF"/>
+                </a:solidFill>
+                <a:latin typeface="Calibri"/>
+                <a:ea typeface="Calibri"/>
+                <a:cs typeface="Calibri"/>
+                <a:sym typeface="Calibri"/>
+              </a:rPr>
+              <a:t>01</a:t>
+            </a:r>
+            <a:endParaRPr b="0" i="0" sz="1300" u="none" cap="none" strike="noStrike">
+              <a:solidFill>
+                <a:schemeClr val="dk1"/>
+              </a:solidFill>
+              <a:latin typeface="Calibri"/>
+              <a:ea typeface="Calibri"/>
+              <a:cs typeface="Calibri"/>
+              <a:sym typeface="Calibri"/>
+            </a:endParaRPr>
+          </a:p>
+        </p:txBody>
+      </p:sp>
+      <p:sp>
+        <p:nvSpPr>
+          <p:cNvPr id="23" name="Google Shape;23;g39683255e89_0_128"/>
+          <p:cNvSpPr/>
+          <p:nvPr/>
+        </p:nvSpPr>
+        <p:spPr>
+          <a:xfrm>
+            <a:off x="1057910" y="1013765"/>
+            <a:ext cx="3657600" cy="274200"/>
+          </a:xfrm>
+          <a:prstGeom prst="rect">
+            <a:avLst/>
+          </a:prstGeom>
+          <a:noFill/>
+          <a:ln>
+            <a:noFill/>
+          </a:ln>
+        </p:spPr>
+        <p:txBody>
+          <a:bodyPr anchorCtr="0" anchor="ctr" bIns="0" lIns="0" spcFirstLastPara="1" rIns="0" wrap="square" tIns="0">
+            <a:noAutofit/>
+          </a:bodyPr>
+          <a:lstStyle/>
+          <a:p>
+            <a:pPr indent="0" lvl="0" marL="0" marR="0" rtl="0" algn="l">
+              <a:spcBef>
+                <a:spcPts val="0"/>
+              </a:spcBef>
+              <a:spcAft>
+                <a:spcPts val="0"/>
+              </a:spcAft>
+              <a:buClr>
+                <a:srgbClr val="FFFFFF"/>
+              </a:buClr>
+              <a:buSzPts val="1300"/>
+              <a:buFont typeface="Calibri"/>
+              <a:buNone/>
+            </a:pPr>
+            <a:r>
+              <a:rPr b="1" i="0" lang="en-US" sz="1300" u="none" cap="none" strike="noStrike">
+                <a:solidFill>
+                  <a:srgbClr val="FFFFFF"/>
+                </a:solidFill>
+                <a:latin typeface="Calibri"/>
+                <a:ea typeface="Calibri"/>
+                <a:cs typeface="Calibri"/>
+                <a:sym typeface="Calibri"/>
+              </a:rPr>
+              <a:t>Descripción del reto</a:t>
+            </a:r>
+            <a:endParaRPr b="0" i="0" sz="1300" u="none" cap="none" strike="noStrike">
+              <a:solidFill>
+                <a:schemeClr val="dk1"/>
+              </a:solidFill>
+              <a:latin typeface="Calibri"/>
+              <a:ea typeface="Calibri"/>
+              <a:cs typeface="Calibri"/>
+              <a:sym typeface="Calibri"/>
+            </a:endParaRPr>
+          </a:p>
+        </p:txBody>
+      </p:sp>
+      <p:sp>
+        <p:nvSpPr>
+          <p:cNvPr id="24" name="Google Shape;24;g39683255e89_0_128"/>
+          <p:cNvSpPr/>
+          <p:nvPr/>
+        </p:nvSpPr>
+        <p:spPr>
+          <a:xfrm>
+            <a:off x="1057910" y="1269797"/>
+            <a:ext cx="3657600" cy="228600"/>
+          </a:xfrm>
+          <a:prstGeom prst="rect">
+            <a:avLst/>
+          </a:prstGeom>
+          <a:noFill/>
+          <a:ln>
+            <a:noFill/>
+          </a:ln>
+        </p:spPr>
+        <p:txBody>
+          <a:bodyPr anchorCtr="0" anchor="ctr" bIns="0" lIns="0" spcFirstLastPara="1" rIns="0" wrap="square" tIns="0">
+            <a:noAutofit/>
+          </a:bodyPr>
+          <a:lstStyle/>
+          <a:p>
+            <a:pPr indent="0" lvl="0" marL="0" marR="0" rtl="0" algn="l">
+              <a:spcBef>
+                <a:spcPts val="0"/>
+              </a:spcBef>
+              <a:spcAft>
+                <a:spcPts val="0"/>
+              </a:spcAft>
+              <a:buClr>
+                <a:srgbClr val="7BAFC8"/>
+              </a:buClr>
+              <a:buSzPts val="1000"/>
+              <a:buFont typeface="Calibri"/>
+              <a:buNone/>
+            </a:pPr>
+            <a:r>
+              <a:rPr b="0" i="0" lang="en-US" sz="1000" u="none" cap="none" strike="noStrike">
+                <a:solidFill>
+                  <a:srgbClr val="7BAFC8"/>
+                </a:solidFill>
+                <a:latin typeface="Calibri"/>
+                <a:ea typeface="Calibri"/>
+                <a:cs typeface="Calibri"/>
+                <a:sym typeface="Calibri"/>
+              </a:rPr>
+              <a:t>Objetivos y requisitos</a:t>
+            </a:r>
+            <a:endParaRPr b="0" i="0" sz="1000" u="none" cap="none" strike="noStrike">
+              <a:solidFill>
+                <a:schemeClr val="dk1"/>
+              </a:solidFill>
+              <a:latin typeface="Calibri"/>
+              <a:ea typeface="Calibri"/>
+              <a:cs typeface="Calibri"/>
+              <a:sym typeface="Calibri"/>
+            </a:endParaRPr>
+          </a:p>
+        </p:txBody>
+      </p:sp>
+      <p:sp>
+        <p:nvSpPr>
+          <p:cNvPr id="25" name="Google Shape;25;g39683255e89_0_128"/>
+          <p:cNvSpPr/>
+          <p:nvPr/>
+        </p:nvSpPr>
+        <p:spPr>
+          <a:xfrm>
+            <a:off x="464700" y="1699390"/>
+            <a:ext cx="502800" cy="502800"/>
+          </a:xfrm>
+          <a:prstGeom prst="rect">
+            <a:avLst/>
+          </a:prstGeom>
+          <a:solidFill>
+            <a:srgbClr val="0A7EA4"/>
+          </a:solidFill>
+          <a:ln cap="flat" cmpd="sng" w="9525">
+            <a:solidFill>
+              <a:srgbClr val="0A7EA4"/>
+            </a:solidFill>
+            <a:prstDash val="solid"/>
+            <a:round/>
+            <a:headEnd len="sm" w="sm" type="none"/>
+            <a:tailEnd len="sm" w="sm" type="none"/>
+          </a:ln>
+          <a:effectLst>
+            <a:outerShdw blurRad="101600" rotWithShape="0" algn="bl" dir="8100000" dist="38100">
+              <a:srgbClr val="000000">
+                <a:alpha val="30199"/>
+              </a:srgbClr>
+            </a:outerShdw>
+          </a:effectLst>
+        </p:spPr>
+        <p:txBody>
+          <a:bodyPr anchorCtr="0" anchor="ctr" bIns="91425" lIns="91425" spcFirstLastPara="1" rIns="91425" wrap="square" tIns="91425">
+            <a:noAutofit/>
+          </a:bodyPr>
+          <a:lstStyle/>
+          <a:p>
+            <a:pPr indent="0" lvl="0" marL="0" rtl="0" algn="l">
+              <a:spcBef>
+                <a:spcPts val="0"/>
+              </a:spcBef>
+              <a:spcAft>
+                <a:spcPts val="0"/>
+              </a:spcAft>
+              <a:buNone/>
+            </a:pPr>
+            <a:r>
+              <a:t/>
+            </a:r>
+            <a:endParaRPr/>
+          </a:p>
+        </p:txBody>
+      </p:sp>
+      <p:sp>
+        <p:nvSpPr>
+          <p:cNvPr id="26" name="Google Shape;26;g39683255e89_0_128"/>
+          <p:cNvSpPr/>
+          <p:nvPr/>
+        </p:nvSpPr>
+        <p:spPr>
+          <a:xfrm>
+            <a:off x="464700" y="1699390"/>
+            <a:ext cx="502800" cy="502800"/>
+          </a:xfrm>
+          <a:prstGeom prst="rect">
+            <a:avLst/>
+          </a:prstGeom>
+          <a:noFill/>
+          <a:ln>
+            <a:noFill/>
+          </a:ln>
+        </p:spPr>
+        <p:txBody>
+          <a:bodyPr anchorCtr="0" anchor="ctr" bIns="0" lIns="0" spcFirstLastPara="1" rIns="0" wrap="square" tIns="0">
+            <a:noAutofit/>
+          </a:bodyPr>
+          <a:lstStyle/>
+          <a:p>
+            <a:pPr indent="0" lvl="0" marL="0" marR="0" rtl="0" algn="ctr">
+              <a:spcBef>
+                <a:spcPts val="0"/>
+              </a:spcBef>
+              <a:spcAft>
+                <a:spcPts val="0"/>
+              </a:spcAft>
+              <a:buClr>
+                <a:srgbClr val="FFFFFF"/>
+              </a:buClr>
+              <a:buSzPts val="1300"/>
+              <a:buFont typeface="Calibri"/>
+              <a:buNone/>
+            </a:pPr>
+            <a:r>
+              <a:rPr b="1" i="0" lang="en-US" sz="1300" u="none" cap="none" strike="noStrike">
+                <a:solidFill>
+                  <a:srgbClr val="FFFFFF"/>
+                </a:solidFill>
+                <a:latin typeface="Calibri"/>
+                <a:ea typeface="Calibri"/>
+                <a:cs typeface="Calibri"/>
+                <a:sym typeface="Calibri"/>
+              </a:rPr>
+              <a:t>02</a:t>
+            </a:r>
+            <a:endParaRPr b="0" i="0" sz="1300" u="none" cap="none" strike="noStrike">
+              <a:solidFill>
+                <a:schemeClr val="dk1"/>
+              </a:solidFill>
+              <a:latin typeface="Calibri"/>
+              <a:ea typeface="Calibri"/>
+              <a:cs typeface="Calibri"/>
+              <a:sym typeface="Calibri"/>
+            </a:endParaRPr>
+          </a:p>
+        </p:txBody>
+      </p:sp>
+      <p:sp>
+        <p:nvSpPr>
+          <p:cNvPr id="27" name="Google Shape;27;g39683255e89_0_128"/>
+          <p:cNvSpPr/>
+          <p:nvPr/>
+        </p:nvSpPr>
+        <p:spPr>
+          <a:xfrm>
+            <a:off x="1059060" y="1699390"/>
+            <a:ext cx="3657600" cy="274200"/>
+          </a:xfrm>
+          <a:prstGeom prst="rect">
+            <a:avLst/>
+          </a:prstGeom>
+          <a:noFill/>
+          <a:ln>
+            <a:noFill/>
+          </a:ln>
+        </p:spPr>
+        <p:txBody>
+          <a:bodyPr anchorCtr="0" anchor="ctr" bIns="0" lIns="0" spcFirstLastPara="1" rIns="0" wrap="square" tIns="0">
+            <a:noAutofit/>
+          </a:bodyPr>
+          <a:lstStyle/>
+          <a:p>
+            <a:pPr indent="0" lvl="0" marL="0" marR="0" rtl="0" algn="l">
+              <a:spcBef>
+                <a:spcPts val="0"/>
+              </a:spcBef>
+              <a:spcAft>
+                <a:spcPts val="0"/>
+              </a:spcAft>
+              <a:buClr>
+                <a:srgbClr val="FFFFFF"/>
+              </a:buClr>
+              <a:buSzPts val="1300"/>
+              <a:buFont typeface="Calibri"/>
+              <a:buNone/>
+            </a:pPr>
+            <a:r>
+              <a:rPr b="1" i="0" lang="en-US" sz="1300" u="none" cap="none" strike="noStrike">
+                <a:solidFill>
+                  <a:srgbClr val="FFFFFF"/>
+                </a:solidFill>
+                <a:latin typeface="Calibri"/>
+                <a:ea typeface="Calibri"/>
+                <a:cs typeface="Calibri"/>
+                <a:sym typeface="Calibri"/>
+              </a:rPr>
+              <a:t>Arquitectura del sistema</a:t>
+            </a:r>
+            <a:endParaRPr b="0" i="0" sz="1300" u="none" cap="none" strike="noStrike">
+              <a:solidFill>
+                <a:schemeClr val="dk1"/>
+              </a:solidFill>
+              <a:latin typeface="Calibri"/>
+              <a:ea typeface="Calibri"/>
+              <a:cs typeface="Calibri"/>
+              <a:sym typeface="Calibri"/>
+            </a:endParaRPr>
+          </a:p>
+        </p:txBody>
+      </p:sp>
+      <p:sp>
+        <p:nvSpPr>
+          <p:cNvPr id="28" name="Google Shape;28;g39683255e89_0_128"/>
+          <p:cNvSpPr/>
+          <p:nvPr/>
+        </p:nvSpPr>
+        <p:spPr>
+          <a:xfrm>
+            <a:off x="1059060" y="1955422"/>
+            <a:ext cx="3657600" cy="228600"/>
+          </a:xfrm>
+          <a:prstGeom prst="rect">
+            <a:avLst/>
+          </a:prstGeom>
+          <a:noFill/>
+          <a:ln>
+            <a:noFill/>
+          </a:ln>
+        </p:spPr>
+        <p:txBody>
+          <a:bodyPr anchorCtr="0" anchor="ctr" bIns="0" lIns="0" spcFirstLastPara="1" rIns="0" wrap="square" tIns="0">
+            <a:noAutofit/>
+          </a:bodyPr>
+          <a:lstStyle/>
+          <a:p>
+            <a:pPr indent="0" lvl="0" marL="0" marR="0" rtl="0" algn="l">
+              <a:spcBef>
+                <a:spcPts val="0"/>
+              </a:spcBef>
+              <a:spcAft>
+                <a:spcPts val="0"/>
+              </a:spcAft>
+              <a:buClr>
+                <a:srgbClr val="7BAFC8"/>
+              </a:buClr>
+              <a:buSzPts val="1000"/>
+              <a:buFont typeface="Calibri"/>
+              <a:buNone/>
+            </a:pPr>
+            <a:r>
+              <a:rPr b="0" i="0" lang="en-US" sz="1000" u="none" cap="none" strike="noStrike">
+                <a:solidFill>
+                  <a:srgbClr val="7BAFC8"/>
+                </a:solidFill>
+                <a:latin typeface="Calibri"/>
+                <a:ea typeface="Calibri"/>
+                <a:cs typeface="Calibri"/>
+                <a:sym typeface="Calibri"/>
+              </a:rPr>
+              <a:t>10 turbinas + concentrador + panel</a:t>
+            </a:r>
+            <a:endParaRPr b="0" i="0" sz="1000" u="none" cap="none" strike="noStrike">
+              <a:solidFill>
+                <a:schemeClr val="dk1"/>
+              </a:solidFill>
+              <a:latin typeface="Calibri"/>
+              <a:ea typeface="Calibri"/>
+              <a:cs typeface="Calibri"/>
+              <a:sym typeface="Calibri"/>
+            </a:endParaRPr>
+          </a:p>
+        </p:txBody>
+      </p:sp>
+      <p:sp>
+        <p:nvSpPr>
+          <p:cNvPr id="29" name="Google Shape;29;g39683255e89_0_128"/>
+          <p:cNvSpPr/>
+          <p:nvPr/>
+        </p:nvSpPr>
+        <p:spPr>
+          <a:xfrm>
+            <a:off x="467000" y="2403365"/>
+            <a:ext cx="502800" cy="502800"/>
+          </a:xfrm>
+          <a:prstGeom prst="rect">
+            <a:avLst/>
+          </a:prstGeom>
+          <a:solidFill>
+            <a:srgbClr val="0A7EA4"/>
+          </a:solidFill>
+          <a:ln cap="flat" cmpd="sng" w="9525">
+            <a:solidFill>
+              <a:srgbClr val="0A7EA4"/>
+            </a:solidFill>
+            <a:prstDash val="solid"/>
+            <a:round/>
+            <a:headEnd len="sm" w="sm" type="none"/>
+            <a:tailEnd len="sm" w="sm" type="none"/>
+          </a:ln>
+          <a:effectLst>
+            <a:outerShdw blurRad="101600" rotWithShape="0" algn="bl" dir="8100000" dist="38100">
+              <a:srgbClr val="000000">
+                <a:alpha val="30199"/>
+              </a:srgbClr>
+            </a:outerShdw>
+          </a:effectLst>
+        </p:spPr>
+        <p:txBody>
+          <a:bodyPr anchorCtr="0" anchor="ctr" bIns="91425" lIns="91425" spcFirstLastPara="1" rIns="91425" wrap="square" tIns="91425">
+            <a:noAutofit/>
+          </a:bodyPr>
+          <a:lstStyle/>
+          <a:p>
+            <a:pPr indent="0" lvl="0" marL="0" rtl="0" algn="l">
+              <a:spcBef>
+                <a:spcPts val="0"/>
+              </a:spcBef>
+              <a:spcAft>
+                <a:spcPts val="0"/>
+              </a:spcAft>
+              <a:buNone/>
+            </a:pPr>
+            <a:r>
+              <a:t/>
+            </a:r>
+            <a:endParaRPr/>
+          </a:p>
+        </p:txBody>
+      </p:sp>
+      <p:sp>
+        <p:nvSpPr>
+          <p:cNvPr id="30" name="Google Shape;30;g39683255e89_0_128"/>
+          <p:cNvSpPr/>
+          <p:nvPr/>
+        </p:nvSpPr>
+        <p:spPr>
+          <a:xfrm>
+            <a:off x="467000" y="2403365"/>
+            <a:ext cx="502800" cy="502800"/>
+          </a:xfrm>
+          <a:prstGeom prst="rect">
+            <a:avLst/>
+          </a:prstGeom>
+          <a:noFill/>
+          <a:ln>
+            <a:noFill/>
+          </a:ln>
+        </p:spPr>
+        <p:txBody>
+          <a:bodyPr anchorCtr="0" anchor="ctr" bIns="0" lIns="0" spcFirstLastPara="1" rIns="0" wrap="square" tIns="0">
+            <a:noAutofit/>
+          </a:bodyPr>
+          <a:lstStyle/>
+          <a:p>
+            <a:pPr indent="0" lvl="0" marL="0" marR="0" rtl="0" algn="ctr">
+              <a:spcBef>
+                <a:spcPts val="0"/>
+              </a:spcBef>
+              <a:spcAft>
+                <a:spcPts val="0"/>
+              </a:spcAft>
+              <a:buClr>
+                <a:srgbClr val="FFFFFF"/>
+              </a:buClr>
+              <a:buSzPts val="1300"/>
+              <a:buFont typeface="Calibri"/>
+              <a:buNone/>
+            </a:pPr>
+            <a:r>
+              <a:rPr b="1" i="0" lang="en-US" sz="1300" u="none" cap="none" strike="noStrike">
+                <a:solidFill>
+                  <a:srgbClr val="FFFFFF"/>
+                </a:solidFill>
+                <a:latin typeface="Calibri"/>
+                <a:ea typeface="Calibri"/>
+                <a:cs typeface="Calibri"/>
+                <a:sym typeface="Calibri"/>
+              </a:rPr>
+              <a:t>03</a:t>
+            </a:r>
+            <a:endParaRPr b="0" i="0" sz="1300" u="none" cap="none" strike="noStrike">
+              <a:solidFill>
+                <a:schemeClr val="dk1"/>
+              </a:solidFill>
+              <a:latin typeface="Calibri"/>
+              <a:ea typeface="Calibri"/>
+              <a:cs typeface="Calibri"/>
+              <a:sym typeface="Calibri"/>
+            </a:endParaRPr>
+          </a:p>
+        </p:txBody>
+      </p:sp>
+      <p:sp>
+        <p:nvSpPr>
+          <p:cNvPr id="31" name="Google Shape;31;g39683255e89_0_128"/>
+          <p:cNvSpPr/>
+          <p:nvPr/>
+        </p:nvSpPr>
+        <p:spPr>
+          <a:xfrm>
+            <a:off x="1061360" y="2403365"/>
+            <a:ext cx="3657600" cy="274200"/>
+          </a:xfrm>
+          <a:prstGeom prst="rect">
+            <a:avLst/>
+          </a:prstGeom>
+          <a:noFill/>
+          <a:ln>
+            <a:noFill/>
+          </a:ln>
+        </p:spPr>
+        <p:txBody>
+          <a:bodyPr anchorCtr="0" anchor="ctr" bIns="0" lIns="0" spcFirstLastPara="1" rIns="0" wrap="square" tIns="0">
+            <a:noAutofit/>
+          </a:bodyPr>
+          <a:lstStyle/>
+          <a:p>
+            <a:pPr indent="0" lvl="0" marL="0" marR="0" rtl="0" algn="l">
+              <a:spcBef>
+                <a:spcPts val="0"/>
+              </a:spcBef>
+              <a:spcAft>
+                <a:spcPts val="0"/>
+              </a:spcAft>
+              <a:buClr>
+                <a:srgbClr val="FFFFFF"/>
+              </a:buClr>
+              <a:buSzPts val="1300"/>
+              <a:buFont typeface="Calibri"/>
+              <a:buNone/>
+            </a:pPr>
+            <a:r>
+              <a:rPr b="1" i="0" lang="en-US" sz="1300" u="none" cap="none" strike="noStrike">
+                <a:solidFill>
+                  <a:srgbClr val="FFFFFF"/>
+                </a:solidFill>
+                <a:latin typeface="Calibri"/>
+                <a:ea typeface="Calibri"/>
+                <a:cs typeface="Calibri"/>
+                <a:sym typeface="Calibri"/>
+              </a:rPr>
+              <a:t>Modelo de datos</a:t>
+            </a:r>
+            <a:endParaRPr b="0" i="0" sz="1300" u="none" cap="none" strike="noStrike">
+              <a:solidFill>
+                <a:schemeClr val="dk1"/>
+              </a:solidFill>
+              <a:latin typeface="Calibri"/>
+              <a:ea typeface="Calibri"/>
+              <a:cs typeface="Calibri"/>
+              <a:sym typeface="Calibri"/>
+            </a:endParaRPr>
+          </a:p>
+        </p:txBody>
+      </p:sp>
+      <p:sp>
+        <p:nvSpPr>
+          <p:cNvPr id="32" name="Google Shape;32;g39683255e89_0_128"/>
+          <p:cNvSpPr/>
+          <p:nvPr/>
+        </p:nvSpPr>
+        <p:spPr>
+          <a:xfrm>
+            <a:off x="1061360" y="2659397"/>
+            <a:ext cx="3657600" cy="228600"/>
+          </a:xfrm>
+          <a:prstGeom prst="rect">
+            <a:avLst/>
+          </a:prstGeom>
+          <a:noFill/>
+          <a:ln>
+            <a:noFill/>
+          </a:ln>
+        </p:spPr>
+        <p:txBody>
+          <a:bodyPr anchorCtr="0" anchor="ctr" bIns="0" lIns="0" spcFirstLastPara="1" rIns="0" wrap="square" tIns="0">
+            <a:noAutofit/>
+          </a:bodyPr>
+          <a:lstStyle/>
+          <a:p>
+            <a:pPr indent="0" lvl="0" marL="0" marR="0" rtl="0" algn="l">
+              <a:spcBef>
+                <a:spcPts val="0"/>
+              </a:spcBef>
+              <a:spcAft>
+                <a:spcPts val="0"/>
+              </a:spcAft>
+              <a:buClr>
+                <a:srgbClr val="7BAFC8"/>
+              </a:buClr>
+              <a:buSzPts val="1000"/>
+              <a:buFont typeface="Calibri"/>
+              <a:buNone/>
+            </a:pPr>
+            <a:r>
+              <a:rPr b="0" i="0" lang="en-US" sz="1000" u="none" cap="none" strike="noStrike">
+                <a:solidFill>
+                  <a:srgbClr val="7BAFC8"/>
+                </a:solidFill>
+                <a:latin typeface="Calibri"/>
+                <a:ea typeface="Calibri"/>
+                <a:cs typeface="Calibri"/>
+                <a:sym typeface="Calibri"/>
+              </a:rPr>
+              <a:t>6 dimensiones de calidad</a:t>
+            </a:r>
+            <a:endParaRPr b="0" i="0" sz="1000" u="none" cap="none" strike="noStrike">
+              <a:solidFill>
+                <a:schemeClr val="dk1"/>
+              </a:solidFill>
+              <a:latin typeface="Calibri"/>
+              <a:ea typeface="Calibri"/>
+              <a:cs typeface="Calibri"/>
+              <a:sym typeface="Calibri"/>
+            </a:endParaRPr>
+          </a:p>
+        </p:txBody>
+      </p:sp>
+      <p:sp>
+        <p:nvSpPr>
+          <p:cNvPr id="33" name="Google Shape;33;g39683255e89_0_128"/>
+          <p:cNvSpPr/>
+          <p:nvPr/>
+        </p:nvSpPr>
+        <p:spPr>
+          <a:xfrm>
+            <a:off x="471600" y="3107340"/>
+            <a:ext cx="502800" cy="502800"/>
+          </a:xfrm>
+          <a:prstGeom prst="rect">
+            <a:avLst/>
+          </a:prstGeom>
+          <a:solidFill>
+            <a:srgbClr val="0A7EA4"/>
+          </a:solidFill>
+          <a:ln cap="flat" cmpd="sng" w="9525">
+            <a:solidFill>
+              <a:srgbClr val="0A7EA4"/>
+            </a:solidFill>
+            <a:prstDash val="solid"/>
+            <a:round/>
+            <a:headEnd len="sm" w="sm" type="none"/>
+            <a:tailEnd len="sm" w="sm" type="none"/>
+          </a:ln>
+          <a:effectLst>
+            <a:outerShdw blurRad="101600" rotWithShape="0" algn="bl" dir="8100000" dist="38100">
+              <a:srgbClr val="000000">
+                <a:alpha val="30199"/>
+              </a:srgbClr>
+            </a:outerShdw>
+          </a:effectLst>
+        </p:spPr>
+        <p:txBody>
+          <a:bodyPr anchorCtr="0" anchor="ctr" bIns="91425" lIns="91425" spcFirstLastPara="1" rIns="91425" wrap="square" tIns="91425">
+            <a:noAutofit/>
+          </a:bodyPr>
+          <a:lstStyle/>
+          <a:p>
+            <a:pPr indent="0" lvl="0" marL="0" rtl="0" algn="l">
+              <a:spcBef>
+                <a:spcPts val="0"/>
+              </a:spcBef>
+              <a:spcAft>
+                <a:spcPts val="0"/>
+              </a:spcAft>
+              <a:buNone/>
+            </a:pPr>
+            <a:r>
+              <a:t/>
+            </a:r>
+            <a:endParaRPr/>
+          </a:p>
+        </p:txBody>
+      </p:sp>
+      <p:sp>
+        <p:nvSpPr>
+          <p:cNvPr id="34" name="Google Shape;34;g39683255e89_0_128"/>
+          <p:cNvSpPr/>
+          <p:nvPr/>
+        </p:nvSpPr>
+        <p:spPr>
+          <a:xfrm>
+            <a:off x="471600" y="3107340"/>
+            <a:ext cx="502800" cy="502800"/>
+          </a:xfrm>
+          <a:prstGeom prst="rect">
+            <a:avLst/>
+          </a:prstGeom>
+          <a:noFill/>
+          <a:ln>
+            <a:noFill/>
+          </a:ln>
+        </p:spPr>
+        <p:txBody>
+          <a:bodyPr anchorCtr="0" anchor="ctr" bIns="0" lIns="0" spcFirstLastPara="1" rIns="0" wrap="square" tIns="0">
+            <a:noAutofit/>
+          </a:bodyPr>
+          <a:lstStyle/>
+          <a:p>
+            <a:pPr indent="0" lvl="0" marL="0" marR="0" rtl="0" algn="ctr">
+              <a:spcBef>
+                <a:spcPts val="0"/>
+              </a:spcBef>
+              <a:spcAft>
+                <a:spcPts val="0"/>
+              </a:spcAft>
+              <a:buClr>
+                <a:srgbClr val="FFFFFF"/>
+              </a:buClr>
+              <a:buSzPts val="1300"/>
+              <a:buFont typeface="Calibri"/>
+              <a:buNone/>
+            </a:pPr>
+            <a:r>
+              <a:rPr b="1" i="0" lang="en-US" sz="1300" u="none" cap="none" strike="noStrike">
+                <a:solidFill>
+                  <a:srgbClr val="FFFFFF"/>
+                </a:solidFill>
+                <a:latin typeface="Calibri"/>
+                <a:ea typeface="Calibri"/>
+                <a:cs typeface="Calibri"/>
+                <a:sym typeface="Calibri"/>
+              </a:rPr>
+              <a:t>04</a:t>
+            </a:r>
+            <a:endParaRPr b="0" i="0" sz="1300" u="none" cap="none" strike="noStrike">
+              <a:solidFill>
+                <a:schemeClr val="dk1"/>
+              </a:solidFill>
+              <a:latin typeface="Calibri"/>
+              <a:ea typeface="Calibri"/>
+              <a:cs typeface="Calibri"/>
+              <a:sym typeface="Calibri"/>
+            </a:endParaRPr>
+          </a:p>
+        </p:txBody>
+      </p:sp>
+      <p:sp>
+        <p:nvSpPr>
+          <p:cNvPr id="35" name="Google Shape;35;g39683255e89_0_128"/>
+          <p:cNvSpPr/>
+          <p:nvPr/>
+        </p:nvSpPr>
+        <p:spPr>
+          <a:xfrm>
+            <a:off x="1065960" y="3107340"/>
+            <a:ext cx="3657600" cy="274200"/>
+          </a:xfrm>
+          <a:prstGeom prst="rect">
+            <a:avLst/>
+          </a:prstGeom>
+          <a:noFill/>
+          <a:ln>
+            <a:noFill/>
+          </a:ln>
+        </p:spPr>
+        <p:txBody>
+          <a:bodyPr anchorCtr="0" anchor="ctr" bIns="0" lIns="0" spcFirstLastPara="1" rIns="0" wrap="square" tIns="0">
+            <a:noAutofit/>
+          </a:bodyPr>
+          <a:lstStyle/>
+          <a:p>
+            <a:pPr indent="0" lvl="0" marL="0" marR="0" rtl="0" algn="l">
+              <a:spcBef>
+                <a:spcPts val="0"/>
+              </a:spcBef>
+              <a:spcAft>
+                <a:spcPts val="0"/>
+              </a:spcAft>
+              <a:buClr>
+                <a:srgbClr val="FFFFFF"/>
+              </a:buClr>
+              <a:buSzPts val="1300"/>
+              <a:buFont typeface="Calibri"/>
+              <a:buNone/>
+            </a:pPr>
+            <a:r>
+              <a:rPr b="1" i="0" lang="en-US" sz="1300" u="none" cap="none" strike="noStrike">
+                <a:solidFill>
+                  <a:srgbClr val="FFFFFF"/>
+                </a:solidFill>
+                <a:latin typeface="Calibri"/>
+                <a:ea typeface="Calibri"/>
+                <a:cs typeface="Calibri"/>
+                <a:sym typeface="Calibri"/>
+              </a:rPr>
+              <a:t>Concentrador FastAPI</a:t>
+            </a:r>
+            <a:endParaRPr b="0" i="0" sz="1300" u="none" cap="none" strike="noStrike">
+              <a:solidFill>
+                <a:schemeClr val="dk1"/>
+              </a:solidFill>
+              <a:latin typeface="Calibri"/>
+              <a:ea typeface="Calibri"/>
+              <a:cs typeface="Calibri"/>
+              <a:sym typeface="Calibri"/>
+            </a:endParaRPr>
+          </a:p>
+        </p:txBody>
+      </p:sp>
+      <p:sp>
+        <p:nvSpPr>
+          <p:cNvPr id="36" name="Google Shape;36;g39683255e89_0_128"/>
+          <p:cNvSpPr/>
+          <p:nvPr/>
+        </p:nvSpPr>
+        <p:spPr>
+          <a:xfrm>
+            <a:off x="1065960" y="3363372"/>
+            <a:ext cx="3657600" cy="228600"/>
+          </a:xfrm>
+          <a:prstGeom prst="rect">
+            <a:avLst/>
+          </a:prstGeom>
+          <a:noFill/>
+          <a:ln>
+            <a:noFill/>
+          </a:ln>
+        </p:spPr>
+        <p:txBody>
+          <a:bodyPr anchorCtr="0" anchor="ctr" bIns="0" lIns="0" spcFirstLastPara="1" rIns="0" wrap="square" tIns="0">
+            <a:noAutofit/>
+          </a:bodyPr>
+          <a:lstStyle/>
+          <a:p>
+            <a:pPr indent="0" lvl="0" marL="0" marR="0" rtl="0" algn="l">
+              <a:spcBef>
+                <a:spcPts val="0"/>
+              </a:spcBef>
+              <a:spcAft>
+                <a:spcPts val="0"/>
+              </a:spcAft>
+              <a:buClr>
+                <a:srgbClr val="7BAFC8"/>
+              </a:buClr>
+              <a:buSzPts val="1000"/>
+              <a:buFont typeface="Calibri"/>
+              <a:buNone/>
+            </a:pPr>
+            <a:r>
+              <a:rPr b="0" i="0" lang="en-US" sz="1000" u="none" cap="none" strike="noStrike">
+                <a:solidFill>
+                  <a:srgbClr val="7BAFC8"/>
+                </a:solidFill>
+                <a:latin typeface="Calibri"/>
+                <a:ea typeface="Calibri"/>
+                <a:cs typeface="Calibri"/>
+                <a:sym typeface="Calibri"/>
+              </a:rPr>
+              <a:t>Validación, persistencia y agregaciones</a:t>
+            </a:r>
+            <a:endParaRPr b="0" i="0" sz="1000" u="none" cap="none" strike="noStrike">
+              <a:solidFill>
+                <a:schemeClr val="dk1"/>
+              </a:solidFill>
+              <a:latin typeface="Calibri"/>
+              <a:ea typeface="Calibri"/>
+              <a:cs typeface="Calibri"/>
+              <a:sym typeface="Calibri"/>
+            </a:endParaRPr>
+          </a:p>
+        </p:txBody>
+      </p:sp>
+      <p:sp>
+        <p:nvSpPr>
+          <p:cNvPr id="37" name="Google Shape;37;g39683255e89_0_128"/>
+          <p:cNvSpPr/>
+          <p:nvPr/>
+        </p:nvSpPr>
+        <p:spPr>
+          <a:xfrm>
+            <a:off x="471590" y="3811315"/>
+            <a:ext cx="502800" cy="502800"/>
+          </a:xfrm>
+          <a:prstGeom prst="rect">
+            <a:avLst/>
+          </a:prstGeom>
+          <a:solidFill>
+            <a:srgbClr val="0A7EA4"/>
+          </a:solidFill>
+          <a:ln cap="flat" cmpd="sng" w="9525">
+            <a:solidFill>
+              <a:srgbClr val="0A7EA4"/>
+            </a:solidFill>
+            <a:prstDash val="solid"/>
+            <a:round/>
+            <a:headEnd len="sm" w="sm" type="none"/>
+            <a:tailEnd len="sm" w="sm" type="none"/>
+          </a:ln>
+          <a:effectLst>
+            <a:outerShdw blurRad="101600" rotWithShape="0" algn="bl" dir="8100000" dist="38100">
+              <a:srgbClr val="000000">
+                <a:alpha val="30199"/>
+              </a:srgbClr>
+            </a:outerShdw>
+          </a:effectLst>
+        </p:spPr>
+        <p:txBody>
+          <a:bodyPr anchorCtr="0" anchor="ctr" bIns="91425" lIns="91425" spcFirstLastPara="1" rIns="91425" wrap="square" tIns="91425">
+            <a:noAutofit/>
+          </a:bodyPr>
+          <a:lstStyle/>
+          <a:p>
+            <a:pPr indent="0" lvl="0" marL="0" rtl="0" algn="l">
+              <a:spcBef>
+                <a:spcPts val="0"/>
+              </a:spcBef>
+              <a:spcAft>
+                <a:spcPts val="0"/>
+              </a:spcAft>
+              <a:buNone/>
+            </a:pPr>
+            <a:r>
+              <a:t/>
+            </a:r>
+            <a:endParaRPr/>
+          </a:p>
+        </p:txBody>
+      </p:sp>
+      <p:sp>
+        <p:nvSpPr>
+          <p:cNvPr id="38" name="Google Shape;38;g39683255e89_0_128"/>
+          <p:cNvSpPr/>
+          <p:nvPr/>
+        </p:nvSpPr>
+        <p:spPr>
+          <a:xfrm>
+            <a:off x="471590" y="3811315"/>
+            <a:ext cx="502800" cy="502800"/>
+          </a:xfrm>
+          <a:prstGeom prst="rect">
+            <a:avLst/>
+          </a:prstGeom>
+          <a:noFill/>
+          <a:ln>
+            <a:noFill/>
+          </a:ln>
+        </p:spPr>
+        <p:txBody>
+          <a:bodyPr anchorCtr="0" anchor="ctr" bIns="0" lIns="0" spcFirstLastPara="1" rIns="0" wrap="square" tIns="0">
+            <a:noAutofit/>
+          </a:bodyPr>
+          <a:lstStyle/>
+          <a:p>
+            <a:pPr indent="0" lvl="0" marL="0" marR="0" rtl="0" algn="ctr">
+              <a:spcBef>
+                <a:spcPts val="0"/>
+              </a:spcBef>
+              <a:spcAft>
+                <a:spcPts val="0"/>
+              </a:spcAft>
+              <a:buClr>
+                <a:srgbClr val="FFFFFF"/>
+              </a:buClr>
+              <a:buSzPts val="1300"/>
+              <a:buFont typeface="Calibri"/>
+              <a:buNone/>
+            </a:pPr>
+            <a:r>
+              <a:rPr b="1" i="0" lang="en-US" sz="1300" u="none" cap="none" strike="noStrike">
+                <a:solidFill>
+                  <a:srgbClr val="FFFFFF"/>
+                </a:solidFill>
+                <a:latin typeface="Calibri"/>
+                <a:ea typeface="Calibri"/>
+                <a:cs typeface="Calibri"/>
+                <a:sym typeface="Calibri"/>
+              </a:rPr>
+              <a:t>05</a:t>
+            </a:r>
+            <a:endParaRPr b="0" i="0" sz="1300" u="none" cap="none" strike="noStrike">
+              <a:solidFill>
+                <a:schemeClr val="dk1"/>
+              </a:solidFill>
+              <a:latin typeface="Calibri"/>
+              <a:ea typeface="Calibri"/>
+              <a:cs typeface="Calibri"/>
+              <a:sym typeface="Calibri"/>
+            </a:endParaRPr>
+          </a:p>
+        </p:txBody>
+      </p:sp>
+      <p:sp>
+        <p:nvSpPr>
+          <p:cNvPr id="39" name="Google Shape;39;g39683255e89_0_128"/>
+          <p:cNvSpPr/>
+          <p:nvPr/>
+        </p:nvSpPr>
+        <p:spPr>
+          <a:xfrm>
+            <a:off x="1065950" y="3811315"/>
+            <a:ext cx="3657600" cy="274200"/>
+          </a:xfrm>
+          <a:prstGeom prst="rect">
+            <a:avLst/>
+          </a:prstGeom>
+          <a:noFill/>
+          <a:ln>
+            <a:noFill/>
+          </a:ln>
+        </p:spPr>
+        <p:txBody>
+          <a:bodyPr anchorCtr="0" anchor="ctr" bIns="0" lIns="0" spcFirstLastPara="1" rIns="0" wrap="square" tIns="0">
+            <a:noAutofit/>
+          </a:bodyPr>
+          <a:lstStyle/>
+          <a:p>
+            <a:pPr indent="0" lvl="0" marL="0" marR="0" rtl="0" algn="l">
+              <a:spcBef>
+                <a:spcPts val="0"/>
+              </a:spcBef>
+              <a:spcAft>
+                <a:spcPts val="0"/>
+              </a:spcAft>
+              <a:buClr>
+                <a:srgbClr val="FFFFFF"/>
+              </a:buClr>
+              <a:buSzPts val="1300"/>
+              <a:buFont typeface="Calibri"/>
+              <a:buNone/>
+            </a:pPr>
+            <a:r>
+              <a:rPr b="1" i="0" lang="en-US" sz="1300" u="none" cap="none" strike="noStrike">
+                <a:solidFill>
+                  <a:srgbClr val="FFFFFF"/>
+                </a:solidFill>
+                <a:latin typeface="Calibri"/>
+                <a:ea typeface="Calibri"/>
+                <a:cs typeface="Calibri"/>
+                <a:sym typeface="Calibri"/>
+              </a:rPr>
+              <a:t>Generadores individuales</a:t>
+            </a:r>
+            <a:endParaRPr b="0" i="0" sz="1300" u="none" cap="none" strike="noStrike">
+              <a:solidFill>
+                <a:schemeClr val="dk1"/>
+              </a:solidFill>
+              <a:latin typeface="Calibri"/>
+              <a:ea typeface="Calibri"/>
+              <a:cs typeface="Calibri"/>
+              <a:sym typeface="Calibri"/>
+            </a:endParaRPr>
+          </a:p>
+        </p:txBody>
+      </p:sp>
+      <p:sp>
+        <p:nvSpPr>
+          <p:cNvPr id="40" name="Google Shape;40;g39683255e89_0_128"/>
+          <p:cNvSpPr/>
+          <p:nvPr/>
+        </p:nvSpPr>
+        <p:spPr>
+          <a:xfrm>
+            <a:off x="1065950" y="4067347"/>
+            <a:ext cx="3657600" cy="228600"/>
+          </a:xfrm>
+          <a:prstGeom prst="rect">
+            <a:avLst/>
+          </a:prstGeom>
+          <a:noFill/>
+          <a:ln>
+            <a:noFill/>
+          </a:ln>
+        </p:spPr>
+        <p:txBody>
+          <a:bodyPr anchorCtr="0" anchor="ctr" bIns="0" lIns="0" spcFirstLastPara="1" rIns="0" wrap="square" tIns="0">
+            <a:noAutofit/>
+          </a:bodyPr>
+          <a:lstStyle/>
+          <a:p>
+            <a:pPr indent="0" lvl="0" marL="0" marR="0" rtl="0" algn="l">
+              <a:spcBef>
+                <a:spcPts val="0"/>
+              </a:spcBef>
+              <a:spcAft>
+                <a:spcPts val="0"/>
+              </a:spcAft>
+              <a:buClr>
+                <a:srgbClr val="7BAFC8"/>
+              </a:buClr>
+              <a:buSzPts val="1000"/>
+              <a:buFont typeface="Calibri"/>
+              <a:buNone/>
+            </a:pPr>
+            <a:r>
+              <a:rPr b="0" i="0" lang="en-US" sz="1000" u="none" cap="none" strike="noStrike">
+                <a:solidFill>
+                  <a:srgbClr val="7BAFC8"/>
+                </a:solidFill>
+                <a:latin typeface="Calibri"/>
+                <a:ea typeface="Calibri"/>
+                <a:cs typeface="Calibri"/>
+                <a:sym typeface="Calibri"/>
+              </a:rPr>
+              <a:t>Datos sintéticos y curva de potencia</a:t>
+            </a:r>
+            <a:endParaRPr b="0" i="0" sz="1000" u="none" cap="none" strike="noStrike">
+              <a:solidFill>
+                <a:schemeClr val="dk1"/>
+              </a:solidFill>
+              <a:latin typeface="Calibri"/>
+              <a:ea typeface="Calibri"/>
+              <a:cs typeface="Calibri"/>
+              <a:sym typeface="Calibri"/>
+            </a:endParaRPr>
+          </a:p>
+        </p:txBody>
+      </p:sp>
+      <p:sp>
+        <p:nvSpPr>
+          <p:cNvPr id="41" name="Google Shape;41;g39683255e89_0_128"/>
+          <p:cNvSpPr/>
+          <p:nvPr/>
+        </p:nvSpPr>
+        <p:spPr>
+          <a:xfrm>
+            <a:off x="4428490" y="1013765"/>
+            <a:ext cx="502800" cy="502800"/>
+          </a:xfrm>
+          <a:prstGeom prst="rect">
+            <a:avLst/>
+          </a:prstGeom>
+          <a:solidFill>
+            <a:srgbClr val="0A7EA4"/>
+          </a:solidFill>
+          <a:ln cap="flat" cmpd="sng" w="9525">
+            <a:solidFill>
+              <a:srgbClr val="0A7EA4"/>
+            </a:solidFill>
+            <a:prstDash val="solid"/>
+            <a:round/>
+            <a:headEnd len="sm" w="sm" type="none"/>
+            <a:tailEnd len="sm" w="sm" type="none"/>
+          </a:ln>
+          <a:effectLst>
+            <a:outerShdw blurRad="101600" rotWithShape="0" algn="bl" dir="8100000" dist="38100">
+              <a:srgbClr val="000000">
+                <a:alpha val="30199"/>
+              </a:srgbClr>
+            </a:outerShdw>
+          </a:effectLst>
+        </p:spPr>
+        <p:txBody>
+          <a:bodyPr anchorCtr="0" anchor="ctr" bIns="91425" lIns="91425" spcFirstLastPara="1" rIns="91425" wrap="square" tIns="91425">
+            <a:noAutofit/>
+          </a:bodyPr>
+          <a:lstStyle/>
+          <a:p>
+            <a:pPr indent="0" lvl="0" marL="0" rtl="0" algn="l">
+              <a:spcBef>
+                <a:spcPts val="0"/>
+              </a:spcBef>
+              <a:spcAft>
+                <a:spcPts val="0"/>
+              </a:spcAft>
+              <a:buNone/>
+            </a:pPr>
+            <a:r>
+              <a:t/>
+            </a:r>
+            <a:endParaRPr/>
+          </a:p>
+        </p:txBody>
+      </p:sp>
+      <p:sp>
+        <p:nvSpPr>
+          <p:cNvPr id="42" name="Google Shape;42;g39683255e89_0_128"/>
+          <p:cNvSpPr/>
+          <p:nvPr/>
+        </p:nvSpPr>
+        <p:spPr>
+          <a:xfrm>
+            <a:off x="4428490" y="1013765"/>
+            <a:ext cx="502800" cy="502800"/>
+          </a:xfrm>
+          <a:prstGeom prst="rect">
+            <a:avLst/>
+          </a:prstGeom>
+          <a:noFill/>
+          <a:ln>
+            <a:noFill/>
+          </a:ln>
+        </p:spPr>
+        <p:txBody>
+          <a:bodyPr anchorCtr="0" anchor="ctr" bIns="0" lIns="0" spcFirstLastPara="1" rIns="0" wrap="square" tIns="0">
+            <a:noAutofit/>
+          </a:bodyPr>
+          <a:lstStyle/>
+          <a:p>
+            <a:pPr indent="0" lvl="0" marL="0" marR="0" rtl="0" algn="ctr">
+              <a:spcBef>
+                <a:spcPts val="0"/>
+              </a:spcBef>
+              <a:spcAft>
+                <a:spcPts val="0"/>
+              </a:spcAft>
+              <a:buClr>
+                <a:srgbClr val="FFFFFF"/>
+              </a:buClr>
+              <a:buSzPts val="1300"/>
+              <a:buFont typeface="Calibri"/>
+              <a:buNone/>
+            </a:pPr>
+            <a:r>
+              <a:rPr b="1" i="0" lang="en-US" sz="1300" u="none" cap="none" strike="noStrike">
+                <a:solidFill>
+                  <a:srgbClr val="FFFFFF"/>
+                </a:solidFill>
+                <a:latin typeface="Calibri"/>
+                <a:ea typeface="Calibri"/>
+                <a:cs typeface="Calibri"/>
+                <a:sym typeface="Calibri"/>
+              </a:rPr>
+              <a:t>06</a:t>
+            </a:r>
+            <a:endParaRPr b="0" i="0" sz="1300" u="none" cap="none" strike="noStrike">
+              <a:solidFill>
+                <a:schemeClr val="dk1"/>
+              </a:solidFill>
+              <a:latin typeface="Calibri"/>
+              <a:ea typeface="Calibri"/>
+              <a:cs typeface="Calibri"/>
+              <a:sym typeface="Calibri"/>
+            </a:endParaRPr>
+          </a:p>
+        </p:txBody>
+      </p:sp>
+      <p:sp>
+        <p:nvSpPr>
+          <p:cNvPr id="43" name="Google Shape;43;g39683255e89_0_128"/>
+          <p:cNvSpPr/>
+          <p:nvPr/>
+        </p:nvSpPr>
+        <p:spPr>
+          <a:xfrm>
+            <a:off x="5022850" y="1013765"/>
+            <a:ext cx="3657600" cy="274200"/>
+          </a:xfrm>
+          <a:prstGeom prst="rect">
+            <a:avLst/>
+          </a:prstGeom>
+          <a:noFill/>
+          <a:ln>
+            <a:noFill/>
+          </a:ln>
+        </p:spPr>
+        <p:txBody>
+          <a:bodyPr anchorCtr="0" anchor="ctr" bIns="0" lIns="0" spcFirstLastPara="1" rIns="0" wrap="square" tIns="0">
+            <a:noAutofit/>
+          </a:bodyPr>
+          <a:lstStyle/>
+          <a:p>
+            <a:pPr indent="0" lvl="0" marL="0" marR="0" rtl="0" algn="l">
+              <a:spcBef>
+                <a:spcPts val="0"/>
+              </a:spcBef>
+              <a:spcAft>
+                <a:spcPts val="0"/>
+              </a:spcAft>
+              <a:buClr>
+                <a:srgbClr val="FFFFFF"/>
+              </a:buClr>
+              <a:buSzPts val="1300"/>
+              <a:buFont typeface="Calibri"/>
+              <a:buNone/>
+            </a:pPr>
+            <a:r>
+              <a:rPr b="1" i="0" lang="en-US" sz="1300" u="none" cap="none" strike="noStrike">
+                <a:solidFill>
+                  <a:srgbClr val="FFFFFF"/>
+                </a:solidFill>
+                <a:latin typeface="Calibri"/>
+                <a:ea typeface="Calibri"/>
+                <a:cs typeface="Calibri"/>
+                <a:sym typeface="Calibri"/>
+              </a:rPr>
+              <a:t>Panel web en tiempo real</a:t>
+            </a:r>
+            <a:endParaRPr b="0" i="0" sz="1300" u="none" cap="none" strike="noStrike">
+              <a:solidFill>
+                <a:schemeClr val="dk1"/>
+              </a:solidFill>
+              <a:latin typeface="Calibri"/>
+              <a:ea typeface="Calibri"/>
+              <a:cs typeface="Calibri"/>
+              <a:sym typeface="Calibri"/>
+            </a:endParaRPr>
+          </a:p>
+        </p:txBody>
+      </p:sp>
+      <p:sp>
+        <p:nvSpPr>
+          <p:cNvPr id="44" name="Google Shape;44;g39683255e89_0_128"/>
+          <p:cNvSpPr/>
+          <p:nvPr/>
+        </p:nvSpPr>
+        <p:spPr>
+          <a:xfrm>
+            <a:off x="5022850" y="1269797"/>
+            <a:ext cx="3657600" cy="228600"/>
+          </a:xfrm>
+          <a:prstGeom prst="rect">
+            <a:avLst/>
+          </a:prstGeom>
+          <a:noFill/>
+          <a:ln>
+            <a:noFill/>
+          </a:ln>
+        </p:spPr>
+        <p:txBody>
+          <a:bodyPr anchorCtr="0" anchor="ctr" bIns="0" lIns="0" spcFirstLastPara="1" rIns="0" wrap="square" tIns="0">
+            <a:noAutofit/>
+          </a:bodyPr>
+          <a:lstStyle/>
+          <a:p>
+            <a:pPr indent="0" lvl="0" marL="0" marR="0" rtl="0" algn="l">
+              <a:spcBef>
+                <a:spcPts val="0"/>
+              </a:spcBef>
+              <a:spcAft>
+                <a:spcPts val="0"/>
+              </a:spcAft>
+              <a:buClr>
+                <a:srgbClr val="7BAFC8"/>
+              </a:buClr>
+              <a:buSzPts val="1000"/>
+              <a:buFont typeface="Calibri"/>
+              <a:buNone/>
+            </a:pPr>
+            <a:r>
+              <a:rPr b="0" i="0" lang="en-US" sz="1000" u="none" cap="none" strike="noStrike">
+                <a:solidFill>
+                  <a:srgbClr val="7BAFC8"/>
+                </a:solidFill>
+                <a:latin typeface="Calibri"/>
+                <a:ea typeface="Calibri"/>
+                <a:cs typeface="Calibri"/>
+                <a:sym typeface="Calibri"/>
+              </a:rPr>
+              <a:t>Nginx + HTML/JS</a:t>
+            </a:r>
+            <a:endParaRPr b="0" i="0" sz="1000" u="none" cap="none" strike="noStrike">
+              <a:solidFill>
+                <a:schemeClr val="dk1"/>
+              </a:solidFill>
+              <a:latin typeface="Calibri"/>
+              <a:ea typeface="Calibri"/>
+              <a:cs typeface="Calibri"/>
+              <a:sym typeface="Calibri"/>
+            </a:endParaRPr>
+          </a:p>
+        </p:txBody>
+      </p:sp>
+      <p:sp>
+        <p:nvSpPr>
+          <p:cNvPr id="45" name="Google Shape;45;g39683255e89_0_128"/>
+          <p:cNvSpPr/>
+          <p:nvPr/>
+        </p:nvSpPr>
+        <p:spPr>
+          <a:xfrm>
+            <a:off x="4428490" y="1708565"/>
+            <a:ext cx="502800" cy="502800"/>
+          </a:xfrm>
+          <a:prstGeom prst="rect">
+            <a:avLst/>
+          </a:prstGeom>
+          <a:solidFill>
+            <a:srgbClr val="0A7EA4"/>
+          </a:solidFill>
+          <a:ln cap="flat" cmpd="sng" w="9525">
+            <a:solidFill>
+              <a:srgbClr val="0A7EA4"/>
+            </a:solidFill>
+            <a:prstDash val="solid"/>
+            <a:round/>
+            <a:headEnd len="sm" w="sm" type="none"/>
+            <a:tailEnd len="sm" w="sm" type="none"/>
+          </a:ln>
+          <a:effectLst>
+            <a:outerShdw blurRad="101600" rotWithShape="0" algn="bl" dir="8100000" dist="38100">
+              <a:srgbClr val="000000">
+                <a:alpha val="30199"/>
+              </a:srgbClr>
+            </a:outerShdw>
+          </a:effectLst>
+        </p:spPr>
+        <p:txBody>
+          <a:bodyPr anchorCtr="0" anchor="ctr" bIns="91425" lIns="91425" spcFirstLastPara="1" rIns="91425" wrap="square" tIns="91425">
+            <a:noAutofit/>
+          </a:bodyPr>
+          <a:lstStyle/>
+          <a:p>
+            <a:pPr indent="0" lvl="0" marL="0" rtl="0" algn="l">
+              <a:spcBef>
+                <a:spcPts val="0"/>
+              </a:spcBef>
+              <a:spcAft>
+                <a:spcPts val="0"/>
+              </a:spcAft>
+              <a:buNone/>
+            </a:pPr>
+            <a:r>
+              <a:t/>
+            </a:r>
+            <a:endParaRPr/>
+          </a:p>
+        </p:txBody>
+      </p:sp>
+      <p:sp>
+        <p:nvSpPr>
+          <p:cNvPr id="46" name="Google Shape;46;g39683255e89_0_128"/>
+          <p:cNvSpPr/>
+          <p:nvPr/>
+        </p:nvSpPr>
+        <p:spPr>
+          <a:xfrm>
+            <a:off x="4428490" y="1708565"/>
+            <a:ext cx="502800" cy="502800"/>
+          </a:xfrm>
+          <a:prstGeom prst="rect">
+            <a:avLst/>
+          </a:prstGeom>
+          <a:noFill/>
+          <a:ln>
+            <a:noFill/>
+          </a:ln>
+        </p:spPr>
+        <p:txBody>
+          <a:bodyPr anchorCtr="0" anchor="ctr" bIns="0" lIns="0" spcFirstLastPara="1" rIns="0" wrap="square" tIns="0">
+            <a:noAutofit/>
+          </a:bodyPr>
+          <a:lstStyle/>
+          <a:p>
+            <a:pPr indent="0" lvl="0" marL="0" marR="0" rtl="0" algn="ctr">
+              <a:spcBef>
+                <a:spcPts val="0"/>
+              </a:spcBef>
+              <a:spcAft>
+                <a:spcPts val="0"/>
+              </a:spcAft>
+              <a:buClr>
+                <a:srgbClr val="FFFFFF"/>
+              </a:buClr>
+              <a:buSzPts val="1300"/>
+              <a:buFont typeface="Calibri"/>
+              <a:buNone/>
+            </a:pPr>
+            <a:r>
+              <a:rPr b="1" i="0" lang="en-US" sz="1300" u="none" cap="none" strike="noStrike">
+                <a:solidFill>
+                  <a:srgbClr val="FFFFFF"/>
+                </a:solidFill>
+                <a:latin typeface="Calibri"/>
+                <a:ea typeface="Calibri"/>
+                <a:cs typeface="Calibri"/>
+                <a:sym typeface="Calibri"/>
+              </a:rPr>
+              <a:t>07</a:t>
+            </a:r>
+            <a:endParaRPr b="0" i="0" sz="1300" u="none" cap="none" strike="noStrike">
+              <a:solidFill>
+                <a:schemeClr val="dk1"/>
+              </a:solidFill>
+              <a:latin typeface="Calibri"/>
+              <a:ea typeface="Calibri"/>
+              <a:cs typeface="Calibri"/>
+              <a:sym typeface="Calibri"/>
+            </a:endParaRPr>
+          </a:p>
+        </p:txBody>
+      </p:sp>
+      <p:sp>
+        <p:nvSpPr>
+          <p:cNvPr id="47" name="Google Shape;47;g39683255e89_0_128"/>
+          <p:cNvSpPr/>
+          <p:nvPr/>
+        </p:nvSpPr>
+        <p:spPr>
+          <a:xfrm>
+            <a:off x="5022850" y="1708565"/>
+            <a:ext cx="3657600" cy="274200"/>
+          </a:xfrm>
+          <a:prstGeom prst="rect">
+            <a:avLst/>
+          </a:prstGeom>
+          <a:noFill/>
+          <a:ln>
+            <a:noFill/>
+          </a:ln>
+        </p:spPr>
+        <p:txBody>
+          <a:bodyPr anchorCtr="0" anchor="ctr" bIns="0" lIns="0" spcFirstLastPara="1" rIns="0" wrap="square" tIns="0">
+            <a:noAutofit/>
+          </a:bodyPr>
+          <a:lstStyle/>
+          <a:p>
+            <a:pPr indent="0" lvl="0" marL="0" marR="0" rtl="0" algn="l">
+              <a:spcBef>
+                <a:spcPts val="0"/>
+              </a:spcBef>
+              <a:spcAft>
+                <a:spcPts val="0"/>
+              </a:spcAft>
+              <a:buClr>
+                <a:srgbClr val="FFFFFF"/>
+              </a:buClr>
+              <a:buSzPts val="1300"/>
+              <a:buFont typeface="Calibri"/>
+              <a:buNone/>
+            </a:pPr>
+            <a:r>
+              <a:rPr b="1" i="0" lang="en-US" sz="1300" u="none" cap="none" strike="noStrike">
+                <a:solidFill>
+                  <a:srgbClr val="FFFFFF"/>
+                </a:solidFill>
+                <a:latin typeface="Calibri"/>
+                <a:ea typeface="Calibri"/>
+                <a:cs typeface="Calibri"/>
+                <a:sym typeface="Calibri"/>
+              </a:rPr>
+              <a:t>Seguridad y persistencia</a:t>
+            </a:r>
+            <a:endParaRPr b="0" i="0" sz="1300" u="none" cap="none" strike="noStrike">
+              <a:solidFill>
+                <a:schemeClr val="dk1"/>
+              </a:solidFill>
+              <a:latin typeface="Calibri"/>
+              <a:ea typeface="Calibri"/>
+              <a:cs typeface="Calibri"/>
+              <a:sym typeface="Calibri"/>
+            </a:endParaRPr>
+          </a:p>
+        </p:txBody>
+      </p:sp>
+      <p:sp>
+        <p:nvSpPr>
+          <p:cNvPr id="48" name="Google Shape;48;g39683255e89_0_128"/>
+          <p:cNvSpPr/>
+          <p:nvPr/>
+        </p:nvSpPr>
+        <p:spPr>
+          <a:xfrm>
+            <a:off x="5022850" y="1964597"/>
+            <a:ext cx="3657600" cy="228600"/>
+          </a:xfrm>
+          <a:prstGeom prst="rect">
+            <a:avLst/>
+          </a:prstGeom>
+          <a:noFill/>
+          <a:ln>
+            <a:noFill/>
+          </a:ln>
+        </p:spPr>
+        <p:txBody>
+          <a:bodyPr anchorCtr="0" anchor="ctr" bIns="0" lIns="0" spcFirstLastPara="1" rIns="0" wrap="square" tIns="0">
+            <a:noAutofit/>
+          </a:bodyPr>
+          <a:lstStyle/>
+          <a:p>
+            <a:pPr indent="0" lvl="0" marL="0" marR="0" rtl="0" algn="l">
+              <a:spcBef>
+                <a:spcPts val="0"/>
+              </a:spcBef>
+              <a:spcAft>
+                <a:spcPts val="0"/>
+              </a:spcAft>
+              <a:buClr>
+                <a:srgbClr val="7BAFC8"/>
+              </a:buClr>
+              <a:buSzPts val="1000"/>
+              <a:buFont typeface="Calibri"/>
+              <a:buNone/>
+            </a:pPr>
+            <a:r>
+              <a:rPr b="0" i="0" lang="en-US" sz="1000" u="none" cap="none" strike="noStrike">
+                <a:solidFill>
+                  <a:srgbClr val="7BAFC8"/>
+                </a:solidFill>
+                <a:latin typeface="Calibri"/>
+                <a:ea typeface="Calibri"/>
+                <a:cs typeface="Calibri"/>
+                <a:sym typeface="Calibri"/>
+              </a:rPr>
+              <a:t>API Key + PostgreSQL</a:t>
+            </a:r>
+            <a:endParaRPr b="0" i="0" sz="1000" u="none" cap="none" strike="noStrike">
+              <a:solidFill>
+                <a:schemeClr val="dk1"/>
+              </a:solidFill>
+              <a:latin typeface="Calibri"/>
+              <a:ea typeface="Calibri"/>
+              <a:cs typeface="Calibri"/>
+              <a:sym typeface="Calibri"/>
+            </a:endParaRPr>
+          </a:p>
+        </p:txBody>
+      </p:sp>
+      <p:sp>
+        <p:nvSpPr>
+          <p:cNvPr id="49" name="Google Shape;49;g39683255e89_0_128"/>
+          <p:cNvSpPr/>
+          <p:nvPr/>
+        </p:nvSpPr>
+        <p:spPr>
+          <a:xfrm>
+            <a:off x="4428490" y="2389953"/>
+            <a:ext cx="502800" cy="502800"/>
+          </a:xfrm>
+          <a:prstGeom prst="rect">
+            <a:avLst/>
+          </a:prstGeom>
+          <a:solidFill>
+            <a:srgbClr val="0A7EA4"/>
+          </a:solidFill>
+          <a:ln cap="flat" cmpd="sng" w="9525">
+            <a:solidFill>
+              <a:srgbClr val="0A7EA4"/>
+            </a:solidFill>
+            <a:prstDash val="solid"/>
+            <a:round/>
+            <a:headEnd len="sm" w="sm" type="none"/>
+            <a:tailEnd len="sm" w="sm" type="none"/>
+          </a:ln>
+          <a:effectLst>
+            <a:outerShdw blurRad="101600" rotWithShape="0" algn="bl" dir="8100000" dist="38100">
+              <a:srgbClr val="000000">
+                <a:alpha val="30199"/>
+              </a:srgbClr>
+            </a:outerShdw>
+          </a:effectLst>
+        </p:spPr>
+        <p:txBody>
+          <a:bodyPr anchorCtr="0" anchor="ctr" bIns="91425" lIns="91425" spcFirstLastPara="1" rIns="91425" wrap="square" tIns="91425">
+            <a:noAutofit/>
+          </a:bodyPr>
+          <a:lstStyle/>
+          <a:p>
+            <a:pPr indent="0" lvl="0" marL="0" rtl="0" algn="l">
+              <a:spcBef>
+                <a:spcPts val="0"/>
+              </a:spcBef>
+              <a:spcAft>
+                <a:spcPts val="0"/>
+              </a:spcAft>
+              <a:buNone/>
+            </a:pPr>
+            <a:r>
+              <a:t/>
+            </a:r>
+            <a:endParaRPr/>
+          </a:p>
+        </p:txBody>
+      </p:sp>
+      <p:sp>
+        <p:nvSpPr>
+          <p:cNvPr id="50" name="Google Shape;50;g39683255e89_0_128"/>
+          <p:cNvSpPr/>
+          <p:nvPr/>
+        </p:nvSpPr>
+        <p:spPr>
+          <a:xfrm>
+            <a:off x="4428490" y="2389953"/>
+            <a:ext cx="502800" cy="502800"/>
+          </a:xfrm>
+          <a:prstGeom prst="rect">
+            <a:avLst/>
+          </a:prstGeom>
+          <a:noFill/>
+          <a:ln>
+            <a:noFill/>
+          </a:ln>
+        </p:spPr>
+        <p:txBody>
+          <a:bodyPr anchorCtr="0" anchor="ctr" bIns="0" lIns="0" spcFirstLastPara="1" rIns="0" wrap="square" tIns="0">
+            <a:noAutofit/>
+          </a:bodyPr>
+          <a:lstStyle/>
+          <a:p>
+            <a:pPr indent="0" lvl="0" marL="0" marR="0" rtl="0" algn="ctr">
+              <a:spcBef>
+                <a:spcPts val="0"/>
+              </a:spcBef>
+              <a:spcAft>
+                <a:spcPts val="0"/>
+              </a:spcAft>
+              <a:buClr>
+                <a:srgbClr val="FFFFFF"/>
+              </a:buClr>
+              <a:buSzPts val="1300"/>
+              <a:buFont typeface="Calibri"/>
+              <a:buNone/>
+            </a:pPr>
+            <a:r>
+              <a:rPr b="1" i="0" lang="en-US" sz="1300" u="none" cap="none" strike="noStrike">
+                <a:solidFill>
+                  <a:srgbClr val="FFFFFF"/>
+                </a:solidFill>
+                <a:latin typeface="Calibri"/>
+                <a:ea typeface="Calibri"/>
+                <a:cs typeface="Calibri"/>
+                <a:sym typeface="Calibri"/>
+              </a:rPr>
+              <a:t>08</a:t>
+            </a:r>
+            <a:endParaRPr b="0" i="0" sz="1300" u="none" cap="none" strike="noStrike">
+              <a:solidFill>
+                <a:schemeClr val="dk1"/>
+              </a:solidFill>
+              <a:latin typeface="Calibri"/>
+              <a:ea typeface="Calibri"/>
+              <a:cs typeface="Calibri"/>
+              <a:sym typeface="Calibri"/>
+            </a:endParaRPr>
+          </a:p>
+        </p:txBody>
+      </p:sp>
+      <p:sp>
+        <p:nvSpPr>
+          <p:cNvPr id="51" name="Google Shape;51;g39683255e89_0_128"/>
+          <p:cNvSpPr/>
+          <p:nvPr/>
+        </p:nvSpPr>
+        <p:spPr>
+          <a:xfrm>
+            <a:off x="5022850" y="2389953"/>
+            <a:ext cx="3657600" cy="274200"/>
+          </a:xfrm>
+          <a:prstGeom prst="rect">
+            <a:avLst/>
+          </a:prstGeom>
+          <a:noFill/>
+          <a:ln>
+            <a:noFill/>
+          </a:ln>
+        </p:spPr>
+        <p:txBody>
+          <a:bodyPr anchorCtr="0" anchor="ctr" bIns="0" lIns="0" spcFirstLastPara="1" rIns="0" wrap="square" tIns="0">
+            <a:noAutofit/>
+          </a:bodyPr>
+          <a:lstStyle/>
+          <a:p>
+            <a:pPr indent="0" lvl="0" marL="0" marR="0" rtl="0" algn="l">
+              <a:spcBef>
+                <a:spcPts val="0"/>
+              </a:spcBef>
+              <a:spcAft>
+                <a:spcPts val="0"/>
+              </a:spcAft>
+              <a:buClr>
+                <a:srgbClr val="FFFFFF"/>
+              </a:buClr>
+              <a:buSzPts val="1300"/>
+              <a:buFont typeface="Calibri"/>
+              <a:buNone/>
+            </a:pPr>
+            <a:r>
+              <a:rPr b="1" lang="en-US" sz="1300">
+                <a:solidFill>
+                  <a:srgbClr val="FFFFFF"/>
+                </a:solidFill>
+                <a:latin typeface="Calibri"/>
+                <a:ea typeface="Calibri"/>
+                <a:cs typeface="Calibri"/>
+                <a:sym typeface="Calibri"/>
+              </a:rPr>
+              <a:t>Posibles Vías de Mejora</a:t>
+            </a:r>
+            <a:endParaRPr b="0" i="0" sz="1300" u="none" cap="none" strike="noStrike">
+              <a:solidFill>
+                <a:schemeClr val="dk1"/>
+              </a:solidFill>
+              <a:latin typeface="Calibri"/>
+              <a:ea typeface="Calibri"/>
+              <a:cs typeface="Calibri"/>
+              <a:sym typeface="Calibri"/>
+            </a:endParaRPr>
+          </a:p>
+        </p:txBody>
+      </p:sp>
+      <p:sp>
+        <p:nvSpPr>
+          <p:cNvPr id="52" name="Google Shape;52;g39683255e89_0_128"/>
+          <p:cNvSpPr/>
+          <p:nvPr/>
+        </p:nvSpPr>
+        <p:spPr>
+          <a:xfrm>
+            <a:off x="5022850" y="2645985"/>
+            <a:ext cx="3657600" cy="228600"/>
+          </a:xfrm>
+          <a:prstGeom prst="rect">
+            <a:avLst/>
+          </a:prstGeom>
+          <a:noFill/>
+          <a:ln>
+            <a:noFill/>
+          </a:ln>
+        </p:spPr>
+        <p:txBody>
+          <a:bodyPr anchorCtr="0" anchor="ctr" bIns="0" lIns="0" spcFirstLastPara="1" rIns="0" wrap="square" tIns="0">
+            <a:noAutofit/>
+          </a:bodyPr>
+          <a:lstStyle/>
+          <a:p>
+            <a:pPr indent="0" lvl="0" marL="0" marR="0" rtl="0" algn="l">
+              <a:spcBef>
+                <a:spcPts val="0"/>
+              </a:spcBef>
+              <a:spcAft>
+                <a:spcPts val="0"/>
+              </a:spcAft>
+              <a:buClr>
+                <a:srgbClr val="7BAFC8"/>
+              </a:buClr>
+              <a:buSzPts val="1000"/>
+              <a:buFont typeface="Calibri"/>
+              <a:buNone/>
+            </a:pPr>
+            <a:r>
+              <a:rPr lang="en-US" sz="1000">
+                <a:solidFill>
+                  <a:srgbClr val="7BAFC8"/>
+                </a:solidFill>
+                <a:latin typeface="Calibri"/>
+                <a:ea typeface="Calibri"/>
+                <a:cs typeface="Calibri"/>
+                <a:sym typeface="Calibri"/>
+              </a:rPr>
+              <a:t>Posibles mejoras</a:t>
+            </a:r>
+            <a:endParaRPr b="0" i="0" sz="1000" u="none" cap="none" strike="noStrike">
+              <a:solidFill>
+                <a:schemeClr val="dk1"/>
+              </a:solidFill>
+              <a:latin typeface="Calibri"/>
+              <a:ea typeface="Calibri"/>
+              <a:cs typeface="Calibri"/>
+              <a:sym typeface="Calibri"/>
+            </a:endParaRPr>
+          </a:p>
+        </p:txBody>
+      </p:sp>
+      <p:sp>
+        <p:nvSpPr>
+          <p:cNvPr id="53" name="Google Shape;53;g39683255e89_0_128"/>
+          <p:cNvSpPr/>
+          <p:nvPr/>
+        </p:nvSpPr>
+        <p:spPr>
+          <a:xfrm>
+            <a:off x="4428490" y="3071328"/>
+            <a:ext cx="502800" cy="502800"/>
+          </a:xfrm>
+          <a:prstGeom prst="rect">
+            <a:avLst/>
+          </a:prstGeom>
+          <a:solidFill>
+            <a:srgbClr val="0A7EA4"/>
+          </a:solidFill>
+          <a:ln cap="flat" cmpd="sng" w="9525">
+            <a:solidFill>
+              <a:srgbClr val="0A7EA4"/>
+            </a:solidFill>
+            <a:prstDash val="solid"/>
+            <a:round/>
+            <a:headEnd len="sm" w="sm" type="none"/>
+            <a:tailEnd len="sm" w="sm" type="none"/>
+          </a:ln>
+          <a:effectLst>
+            <a:outerShdw blurRad="101600" rotWithShape="0" algn="bl" dir="8100000" dist="38100">
+              <a:srgbClr val="000000">
+                <a:alpha val="30199"/>
+              </a:srgbClr>
+            </a:outerShdw>
+          </a:effectLst>
+        </p:spPr>
+        <p:txBody>
+          <a:bodyPr anchorCtr="0" anchor="ctr" bIns="91425" lIns="91425" spcFirstLastPara="1" rIns="91425" wrap="square" tIns="91425">
+            <a:noAutofit/>
+          </a:bodyPr>
+          <a:lstStyle/>
+          <a:p>
+            <a:pPr indent="0" lvl="0" marL="0" rtl="0" algn="l">
+              <a:spcBef>
+                <a:spcPts val="0"/>
+              </a:spcBef>
+              <a:spcAft>
+                <a:spcPts val="0"/>
+              </a:spcAft>
+              <a:buNone/>
+            </a:pPr>
+            <a:r>
+              <a:t/>
+            </a:r>
+            <a:endParaRPr/>
+          </a:p>
+        </p:txBody>
+      </p:sp>
+      <p:sp>
+        <p:nvSpPr>
+          <p:cNvPr id="54" name="Google Shape;54;g39683255e89_0_128"/>
+          <p:cNvSpPr/>
+          <p:nvPr/>
+        </p:nvSpPr>
+        <p:spPr>
+          <a:xfrm>
+            <a:off x="4428490" y="3071328"/>
+            <a:ext cx="502800" cy="502800"/>
+          </a:xfrm>
+          <a:prstGeom prst="rect">
+            <a:avLst/>
+          </a:prstGeom>
+          <a:noFill/>
+          <a:ln>
+            <a:noFill/>
+          </a:ln>
+        </p:spPr>
+        <p:txBody>
+          <a:bodyPr anchorCtr="0" anchor="ctr" bIns="0" lIns="0" spcFirstLastPara="1" rIns="0" wrap="square" tIns="0">
+            <a:noAutofit/>
+          </a:bodyPr>
+          <a:lstStyle/>
+          <a:p>
+            <a:pPr indent="0" lvl="0" marL="0" marR="0" rtl="0" algn="ctr">
+              <a:spcBef>
+                <a:spcPts val="0"/>
+              </a:spcBef>
+              <a:spcAft>
+                <a:spcPts val="0"/>
+              </a:spcAft>
+              <a:buClr>
+                <a:srgbClr val="FFFFFF"/>
+              </a:buClr>
+              <a:buSzPts val="1300"/>
+              <a:buFont typeface="Calibri"/>
+              <a:buNone/>
+            </a:pPr>
+            <a:r>
+              <a:rPr b="1" i="0" lang="en-US" sz="1300" u="none" cap="none" strike="noStrike">
+                <a:solidFill>
+                  <a:srgbClr val="FFFFFF"/>
+                </a:solidFill>
+                <a:latin typeface="Calibri"/>
+                <a:ea typeface="Calibri"/>
+                <a:cs typeface="Calibri"/>
+                <a:sym typeface="Calibri"/>
+              </a:rPr>
+              <a:t>0</a:t>
+            </a:r>
+            <a:r>
+              <a:rPr b="1" lang="en-US" sz="1300">
+                <a:solidFill>
+                  <a:srgbClr val="FFFFFF"/>
+                </a:solidFill>
+                <a:latin typeface="Calibri"/>
+                <a:ea typeface="Calibri"/>
+                <a:cs typeface="Calibri"/>
+                <a:sym typeface="Calibri"/>
+              </a:rPr>
+              <a:t>9</a:t>
+            </a:r>
+            <a:endParaRPr b="0" i="0" sz="1300" u="none" cap="none" strike="noStrike">
+              <a:solidFill>
+                <a:schemeClr val="dk1"/>
+              </a:solidFill>
+              <a:latin typeface="Calibri"/>
+              <a:ea typeface="Calibri"/>
+              <a:cs typeface="Calibri"/>
+              <a:sym typeface="Calibri"/>
+            </a:endParaRPr>
+          </a:p>
+        </p:txBody>
+      </p:sp>
+      <p:sp>
+        <p:nvSpPr>
+          <p:cNvPr id="55" name="Google Shape;55;g39683255e89_0_128"/>
+          <p:cNvSpPr/>
+          <p:nvPr/>
+        </p:nvSpPr>
+        <p:spPr>
+          <a:xfrm>
+            <a:off x="5022850" y="3071328"/>
+            <a:ext cx="3657600" cy="274200"/>
+          </a:xfrm>
+          <a:prstGeom prst="rect">
+            <a:avLst/>
+          </a:prstGeom>
+          <a:noFill/>
+          <a:ln>
+            <a:noFill/>
+          </a:ln>
+        </p:spPr>
+        <p:txBody>
+          <a:bodyPr anchorCtr="0" anchor="ctr" bIns="0" lIns="0" spcFirstLastPara="1" rIns="0" wrap="square" tIns="0">
+            <a:noAutofit/>
+          </a:bodyPr>
+          <a:lstStyle/>
+          <a:p>
+            <a:pPr indent="0" lvl="0" marL="0" marR="0" rtl="0" algn="l">
+              <a:spcBef>
+                <a:spcPts val="0"/>
+              </a:spcBef>
+              <a:spcAft>
+                <a:spcPts val="0"/>
+              </a:spcAft>
+              <a:buClr>
+                <a:srgbClr val="FFFFFF"/>
+              </a:buClr>
+              <a:buSzPts val="1300"/>
+              <a:buFont typeface="Calibri"/>
+              <a:buNone/>
+            </a:pPr>
+            <a:r>
+              <a:rPr b="1" lang="en-US" sz="1300">
+                <a:solidFill>
+                  <a:srgbClr val="FFFFFF"/>
+                </a:solidFill>
+                <a:latin typeface="Calibri"/>
+                <a:ea typeface="Calibri"/>
+                <a:cs typeface="Calibri"/>
+                <a:sym typeface="Calibri"/>
+              </a:rPr>
+              <a:t>Problemas y Retos</a:t>
+            </a:r>
+            <a:endParaRPr b="0" i="0" sz="1300" u="none" cap="none" strike="noStrike">
+              <a:solidFill>
+                <a:schemeClr val="dk1"/>
+              </a:solidFill>
+              <a:latin typeface="Calibri"/>
+              <a:ea typeface="Calibri"/>
+              <a:cs typeface="Calibri"/>
+              <a:sym typeface="Calibri"/>
+            </a:endParaRPr>
+          </a:p>
+        </p:txBody>
+      </p:sp>
+      <p:sp>
+        <p:nvSpPr>
+          <p:cNvPr id="56" name="Google Shape;56;g39683255e89_0_128"/>
+          <p:cNvSpPr/>
+          <p:nvPr/>
+        </p:nvSpPr>
+        <p:spPr>
+          <a:xfrm>
+            <a:off x="5022850" y="3327360"/>
+            <a:ext cx="3657600" cy="228600"/>
+          </a:xfrm>
+          <a:prstGeom prst="rect">
+            <a:avLst/>
+          </a:prstGeom>
+          <a:noFill/>
+          <a:ln>
+            <a:noFill/>
+          </a:ln>
+        </p:spPr>
+        <p:txBody>
+          <a:bodyPr anchorCtr="0" anchor="ctr" bIns="0" lIns="0" spcFirstLastPara="1" rIns="0" wrap="square" tIns="0">
+            <a:noAutofit/>
+          </a:bodyPr>
+          <a:lstStyle/>
+          <a:p>
+            <a:pPr indent="0" lvl="0" marL="0" marR="0" rtl="0" algn="l">
+              <a:spcBef>
+                <a:spcPts val="0"/>
+              </a:spcBef>
+              <a:spcAft>
+                <a:spcPts val="0"/>
+              </a:spcAft>
+              <a:buClr>
+                <a:srgbClr val="7BAFC8"/>
+              </a:buClr>
+              <a:buSzPts val="1000"/>
+              <a:buFont typeface="Calibri"/>
+              <a:buNone/>
+            </a:pPr>
+            <a:r>
+              <a:rPr lang="en-US" sz="1000">
+                <a:solidFill>
+                  <a:srgbClr val="7BAFC8"/>
+                </a:solidFill>
+                <a:latin typeface="Calibri"/>
+                <a:ea typeface="Calibri"/>
+                <a:cs typeface="Calibri"/>
+                <a:sym typeface="Calibri"/>
+              </a:rPr>
+              <a:t>Problemas y Retos </a:t>
+            </a:r>
+            <a:r>
+              <a:rPr lang="en-US" sz="1000">
+                <a:solidFill>
+                  <a:srgbClr val="7BAFC8"/>
+                </a:solidFill>
+                <a:latin typeface="Calibri"/>
+                <a:ea typeface="Calibri"/>
+                <a:cs typeface="Calibri"/>
+                <a:sym typeface="Calibri"/>
+              </a:rPr>
+              <a:t>encontrados</a:t>
+            </a:r>
+            <a:r>
+              <a:rPr lang="en-US" sz="1000">
+                <a:solidFill>
+                  <a:srgbClr val="7BAFC8"/>
+                </a:solidFill>
+                <a:latin typeface="Calibri"/>
+                <a:ea typeface="Calibri"/>
+                <a:cs typeface="Calibri"/>
+                <a:sym typeface="Calibri"/>
+              </a:rPr>
+              <a:t> durante la realización.</a:t>
+            </a:r>
+            <a:endParaRPr b="0" i="0" sz="1000" u="none" cap="none" strike="noStrike">
+              <a:solidFill>
+                <a:schemeClr val="dk1"/>
+              </a:solidFill>
+              <a:latin typeface="Calibri"/>
+              <a:ea typeface="Calibri"/>
+              <a:cs typeface="Calibri"/>
+              <a:sym typeface="Calibri"/>
+            </a:endParaRPr>
+          </a:p>
+        </p:txBody>
+      </p:sp>
+      <p:sp>
+        <p:nvSpPr>
+          <p:cNvPr id="57" name="Google Shape;57;g39683255e89_0_128"/>
+          <p:cNvSpPr/>
+          <p:nvPr/>
+        </p:nvSpPr>
+        <p:spPr>
+          <a:xfrm>
+            <a:off x="4428490" y="3725303"/>
+            <a:ext cx="502800" cy="502800"/>
+          </a:xfrm>
+          <a:prstGeom prst="rect">
+            <a:avLst/>
+          </a:prstGeom>
+          <a:solidFill>
+            <a:srgbClr val="0A7EA4"/>
+          </a:solidFill>
+          <a:ln cap="flat" cmpd="sng" w="9525">
+            <a:solidFill>
+              <a:srgbClr val="0A7EA4"/>
+            </a:solidFill>
+            <a:prstDash val="solid"/>
+            <a:round/>
+            <a:headEnd len="sm" w="sm" type="none"/>
+            <a:tailEnd len="sm" w="sm" type="none"/>
+          </a:ln>
+          <a:effectLst>
+            <a:outerShdw blurRad="101600" rotWithShape="0" algn="bl" dir="8100000" dist="38100">
+              <a:srgbClr val="000000">
+                <a:alpha val="30199"/>
+              </a:srgbClr>
+            </a:outerShdw>
+          </a:effectLst>
+        </p:spPr>
+        <p:txBody>
+          <a:bodyPr anchorCtr="0" anchor="ctr" bIns="91425" lIns="91425" spcFirstLastPara="1" rIns="91425" wrap="square" tIns="91425">
+            <a:noAutofit/>
+          </a:bodyPr>
+          <a:lstStyle/>
+          <a:p>
+            <a:pPr indent="0" lvl="0" marL="0" rtl="0" algn="l">
+              <a:spcBef>
+                <a:spcPts val="0"/>
+              </a:spcBef>
+              <a:spcAft>
+                <a:spcPts val="0"/>
+              </a:spcAft>
+              <a:buNone/>
+            </a:pPr>
+            <a:r>
+              <a:t/>
+            </a:r>
+            <a:endParaRPr/>
+          </a:p>
+        </p:txBody>
+      </p:sp>
+      <p:sp>
+        <p:nvSpPr>
+          <p:cNvPr id="58" name="Google Shape;58;g39683255e89_0_128"/>
+          <p:cNvSpPr/>
+          <p:nvPr/>
+        </p:nvSpPr>
+        <p:spPr>
+          <a:xfrm>
+            <a:off x="4428490" y="3725303"/>
+            <a:ext cx="502800" cy="502800"/>
+          </a:xfrm>
+          <a:prstGeom prst="rect">
+            <a:avLst/>
+          </a:prstGeom>
+          <a:noFill/>
+          <a:ln>
+            <a:noFill/>
+          </a:ln>
+        </p:spPr>
+        <p:txBody>
+          <a:bodyPr anchorCtr="0" anchor="ctr" bIns="0" lIns="0" spcFirstLastPara="1" rIns="0" wrap="square" tIns="0">
+            <a:noAutofit/>
+          </a:bodyPr>
+          <a:lstStyle/>
+          <a:p>
+            <a:pPr indent="0" lvl="0" marL="0" marR="0" rtl="0" algn="ctr">
+              <a:spcBef>
+                <a:spcPts val="0"/>
+              </a:spcBef>
+              <a:spcAft>
+                <a:spcPts val="0"/>
+              </a:spcAft>
+              <a:buClr>
+                <a:srgbClr val="FFFFFF"/>
+              </a:buClr>
+              <a:buSzPts val="1300"/>
+              <a:buFont typeface="Calibri"/>
+              <a:buNone/>
+            </a:pPr>
+            <a:r>
+              <a:rPr b="1" lang="en-US" sz="1300">
+                <a:solidFill>
+                  <a:srgbClr val="FFFFFF"/>
+                </a:solidFill>
+                <a:latin typeface="Calibri"/>
+                <a:ea typeface="Calibri"/>
+                <a:cs typeface="Calibri"/>
+                <a:sym typeface="Calibri"/>
+              </a:rPr>
+              <a:t>10</a:t>
+            </a:r>
+            <a:endParaRPr b="0" i="0" sz="1300" u="none" cap="none" strike="noStrike">
+              <a:solidFill>
+                <a:schemeClr val="dk1"/>
+              </a:solidFill>
+              <a:latin typeface="Calibri"/>
+              <a:ea typeface="Calibri"/>
+              <a:cs typeface="Calibri"/>
+              <a:sym typeface="Calibri"/>
+            </a:endParaRPr>
+          </a:p>
+        </p:txBody>
+      </p:sp>
+      <p:sp>
+        <p:nvSpPr>
+          <p:cNvPr id="59" name="Google Shape;59;g39683255e89_0_128"/>
+          <p:cNvSpPr/>
+          <p:nvPr/>
+        </p:nvSpPr>
+        <p:spPr>
+          <a:xfrm>
+            <a:off x="5022850" y="3725303"/>
+            <a:ext cx="3657600" cy="274200"/>
+          </a:xfrm>
+          <a:prstGeom prst="rect">
+            <a:avLst/>
+          </a:prstGeom>
+          <a:noFill/>
+          <a:ln>
+            <a:noFill/>
+          </a:ln>
+        </p:spPr>
+        <p:txBody>
+          <a:bodyPr anchorCtr="0" anchor="ctr" bIns="0" lIns="0" spcFirstLastPara="1" rIns="0" wrap="square" tIns="0">
+            <a:noAutofit/>
+          </a:bodyPr>
+          <a:lstStyle/>
+          <a:p>
+            <a:pPr indent="0" lvl="0" marL="0" marR="0" rtl="0" algn="l">
+              <a:spcBef>
+                <a:spcPts val="0"/>
+              </a:spcBef>
+              <a:spcAft>
+                <a:spcPts val="0"/>
+              </a:spcAft>
+              <a:buClr>
+                <a:srgbClr val="FFFFFF"/>
+              </a:buClr>
+              <a:buSzPts val="1300"/>
+              <a:buFont typeface="Calibri"/>
+              <a:buNone/>
+            </a:pPr>
+            <a:r>
+              <a:rPr b="1" lang="en-US" sz="1300">
+                <a:solidFill>
+                  <a:srgbClr val="FFFFFF"/>
+                </a:solidFill>
+                <a:latin typeface="Calibri"/>
+                <a:ea typeface="Calibri"/>
+                <a:cs typeface="Calibri"/>
+                <a:sym typeface="Calibri"/>
+              </a:rPr>
+              <a:t>Alternativas</a:t>
+            </a:r>
+            <a:endParaRPr b="0" i="0" sz="1300" u="none" cap="none" strike="noStrike">
+              <a:solidFill>
+                <a:schemeClr val="dk1"/>
+              </a:solidFill>
+              <a:latin typeface="Calibri"/>
+              <a:ea typeface="Calibri"/>
+              <a:cs typeface="Calibri"/>
+              <a:sym typeface="Calibri"/>
+            </a:endParaRPr>
+          </a:p>
+        </p:txBody>
+      </p:sp>
+      <p:sp>
+        <p:nvSpPr>
+          <p:cNvPr id="60" name="Google Shape;60;g39683255e89_0_128"/>
+          <p:cNvSpPr/>
+          <p:nvPr/>
+        </p:nvSpPr>
+        <p:spPr>
+          <a:xfrm>
+            <a:off x="5022850" y="3981335"/>
+            <a:ext cx="3657600" cy="228600"/>
+          </a:xfrm>
+          <a:prstGeom prst="rect">
+            <a:avLst/>
+          </a:prstGeom>
+          <a:noFill/>
+          <a:ln>
+            <a:noFill/>
+          </a:ln>
+        </p:spPr>
+        <p:txBody>
+          <a:bodyPr anchorCtr="0" anchor="ctr" bIns="0" lIns="0" spcFirstLastPara="1" rIns="0" wrap="square" tIns="0">
+            <a:noAutofit/>
+          </a:bodyPr>
+          <a:lstStyle/>
+          <a:p>
+            <a:pPr indent="0" lvl="0" marL="0" marR="0" rtl="0" algn="l">
+              <a:spcBef>
+                <a:spcPts val="0"/>
+              </a:spcBef>
+              <a:spcAft>
+                <a:spcPts val="0"/>
+              </a:spcAft>
+              <a:buClr>
+                <a:srgbClr val="7BAFC8"/>
+              </a:buClr>
+              <a:buSzPts val="1000"/>
+              <a:buFont typeface="Calibri"/>
+              <a:buNone/>
+            </a:pPr>
+            <a:r>
+              <a:rPr lang="en-US" sz="1000">
+                <a:solidFill>
+                  <a:srgbClr val="7BAFC8"/>
+                </a:solidFill>
+                <a:latin typeface="Calibri"/>
+                <a:ea typeface="Calibri"/>
+                <a:cs typeface="Calibri"/>
+                <a:sym typeface="Calibri"/>
+              </a:rPr>
+              <a:t>Posibles alternativas del proyecto</a:t>
+            </a:r>
+            <a:endParaRPr b="0" i="0" sz="1000" u="none" cap="none" strike="noStrike">
+              <a:solidFill>
+                <a:schemeClr val="dk1"/>
+              </a:solidFill>
+              <a:latin typeface="Calibri"/>
+              <a:ea typeface="Calibri"/>
+              <a:cs typeface="Calibri"/>
+              <a:sym typeface="Calibri"/>
+            </a:endParaRPr>
+          </a:p>
+        </p:txBody>
+      </p:sp>
+      <p:sp>
+        <p:nvSpPr>
+          <p:cNvPr id="61" name="Google Shape;61;g39683255e89_0_128"/>
+          <p:cNvSpPr/>
+          <p:nvPr/>
+        </p:nvSpPr>
+        <p:spPr>
+          <a:xfrm>
+            <a:off x="4428490" y="4434078"/>
+            <a:ext cx="502800" cy="502800"/>
+          </a:xfrm>
+          <a:prstGeom prst="rect">
+            <a:avLst/>
+          </a:prstGeom>
+          <a:solidFill>
+            <a:srgbClr val="0A7EA4"/>
+          </a:solidFill>
+          <a:ln cap="flat" cmpd="sng" w="9525">
+            <a:solidFill>
+              <a:srgbClr val="0A7EA4"/>
+            </a:solidFill>
+            <a:prstDash val="solid"/>
+            <a:round/>
+            <a:headEnd len="sm" w="sm" type="none"/>
+            <a:tailEnd len="sm" w="sm" type="none"/>
+          </a:ln>
+          <a:effectLst>
+            <a:outerShdw blurRad="101600" rotWithShape="0" algn="bl" dir="8100000" dist="38100">
+              <a:srgbClr val="000000">
+                <a:alpha val="30199"/>
+              </a:srgbClr>
+            </a:outerShdw>
+          </a:effectLst>
+        </p:spPr>
+        <p:txBody>
+          <a:bodyPr anchorCtr="0" anchor="ctr" bIns="91425" lIns="91425" spcFirstLastPara="1" rIns="91425" wrap="square" tIns="91425">
+            <a:noAutofit/>
+          </a:bodyPr>
+          <a:lstStyle/>
+          <a:p>
+            <a:pPr indent="0" lvl="0" marL="0" rtl="0" algn="l">
+              <a:spcBef>
+                <a:spcPts val="0"/>
+              </a:spcBef>
+              <a:spcAft>
+                <a:spcPts val="0"/>
+              </a:spcAft>
+              <a:buNone/>
+            </a:pPr>
+            <a:r>
+              <a:t/>
+            </a:r>
+            <a:endParaRPr/>
+          </a:p>
+        </p:txBody>
+      </p:sp>
+      <p:sp>
+        <p:nvSpPr>
+          <p:cNvPr id="62" name="Google Shape;62;g39683255e89_0_128"/>
+          <p:cNvSpPr/>
+          <p:nvPr/>
+        </p:nvSpPr>
+        <p:spPr>
+          <a:xfrm>
+            <a:off x="4428490" y="4434078"/>
+            <a:ext cx="502800" cy="502800"/>
+          </a:xfrm>
+          <a:prstGeom prst="rect">
+            <a:avLst/>
+          </a:prstGeom>
+          <a:noFill/>
+          <a:ln>
+            <a:noFill/>
+          </a:ln>
+        </p:spPr>
+        <p:txBody>
+          <a:bodyPr anchorCtr="0" anchor="ctr" bIns="0" lIns="0" spcFirstLastPara="1" rIns="0" wrap="square" tIns="0">
+            <a:noAutofit/>
+          </a:bodyPr>
+          <a:lstStyle/>
+          <a:p>
+            <a:pPr indent="0" lvl="0" marL="0" marR="0" rtl="0" algn="ctr">
+              <a:spcBef>
+                <a:spcPts val="0"/>
+              </a:spcBef>
+              <a:spcAft>
+                <a:spcPts val="0"/>
+              </a:spcAft>
+              <a:buClr>
+                <a:srgbClr val="FFFFFF"/>
+              </a:buClr>
+              <a:buSzPts val="1300"/>
+              <a:buFont typeface="Calibri"/>
+              <a:buNone/>
+            </a:pPr>
+            <a:r>
+              <a:rPr b="1" lang="en-US" sz="1300">
+                <a:solidFill>
+                  <a:srgbClr val="FFFFFF"/>
+                </a:solidFill>
+                <a:latin typeface="Calibri"/>
+                <a:ea typeface="Calibri"/>
+                <a:cs typeface="Calibri"/>
+                <a:sym typeface="Calibri"/>
+              </a:rPr>
+              <a:t>11</a:t>
+            </a:r>
+            <a:endParaRPr b="0" i="0" sz="1300" u="none" cap="none" strike="noStrike">
+              <a:solidFill>
+                <a:schemeClr val="dk1"/>
+              </a:solidFill>
+              <a:latin typeface="Calibri"/>
+              <a:ea typeface="Calibri"/>
+              <a:cs typeface="Calibri"/>
+              <a:sym typeface="Calibri"/>
+            </a:endParaRPr>
+          </a:p>
+        </p:txBody>
+      </p:sp>
+      <p:sp>
+        <p:nvSpPr>
+          <p:cNvPr id="63" name="Google Shape;63;g39683255e89_0_128"/>
+          <p:cNvSpPr/>
+          <p:nvPr/>
+        </p:nvSpPr>
+        <p:spPr>
+          <a:xfrm>
+            <a:off x="5022850" y="4434078"/>
+            <a:ext cx="3657600" cy="274200"/>
+          </a:xfrm>
+          <a:prstGeom prst="rect">
+            <a:avLst/>
+          </a:prstGeom>
+          <a:noFill/>
+          <a:ln>
+            <a:noFill/>
+          </a:ln>
+        </p:spPr>
+        <p:txBody>
+          <a:bodyPr anchorCtr="0" anchor="ctr" bIns="0" lIns="0" spcFirstLastPara="1" rIns="0" wrap="square" tIns="0">
+            <a:noAutofit/>
+          </a:bodyPr>
+          <a:lstStyle/>
+          <a:p>
+            <a:pPr indent="0" lvl="0" marL="0" marR="0" rtl="0" algn="l">
+              <a:spcBef>
+                <a:spcPts val="0"/>
+              </a:spcBef>
+              <a:spcAft>
+                <a:spcPts val="0"/>
+              </a:spcAft>
+              <a:buClr>
+                <a:srgbClr val="FFFFFF"/>
+              </a:buClr>
+              <a:buSzPts val="1300"/>
+              <a:buFont typeface="Calibri"/>
+              <a:buNone/>
+            </a:pPr>
+            <a:r>
+              <a:rPr b="1" i="0" lang="en-US" sz="1300" u="none" cap="none" strike="noStrike">
+                <a:solidFill>
+                  <a:srgbClr val="FFFFFF"/>
+                </a:solidFill>
+                <a:latin typeface="Calibri"/>
+                <a:ea typeface="Calibri"/>
+                <a:cs typeface="Calibri"/>
+                <a:sym typeface="Calibri"/>
+              </a:rPr>
+              <a:t>Demo en vivo</a:t>
+            </a:r>
+            <a:endParaRPr b="0" i="0" sz="1300" u="none" cap="none" strike="noStrike">
+              <a:solidFill>
+                <a:schemeClr val="dk1"/>
+              </a:solidFill>
+              <a:latin typeface="Calibri"/>
+              <a:ea typeface="Calibri"/>
+              <a:cs typeface="Calibri"/>
+              <a:sym typeface="Calibri"/>
+            </a:endParaRPr>
+          </a:p>
+        </p:txBody>
+      </p:sp>
+      <p:sp>
+        <p:nvSpPr>
+          <p:cNvPr id="64" name="Google Shape;64;g39683255e89_0_128"/>
+          <p:cNvSpPr/>
+          <p:nvPr/>
+        </p:nvSpPr>
+        <p:spPr>
+          <a:xfrm>
+            <a:off x="5022850" y="4690110"/>
+            <a:ext cx="3657600" cy="228600"/>
+          </a:xfrm>
+          <a:prstGeom prst="rect">
+            <a:avLst/>
+          </a:prstGeom>
+          <a:noFill/>
+          <a:ln>
+            <a:noFill/>
+          </a:ln>
+        </p:spPr>
+        <p:txBody>
+          <a:bodyPr anchorCtr="0" anchor="ctr" bIns="0" lIns="0" spcFirstLastPara="1" rIns="0" wrap="square" tIns="0">
+            <a:noAutofit/>
+          </a:bodyPr>
+          <a:lstStyle/>
+          <a:p>
+            <a:pPr indent="0" lvl="0" marL="0" marR="0" rtl="0" algn="l">
+              <a:spcBef>
+                <a:spcPts val="0"/>
+              </a:spcBef>
+              <a:spcAft>
+                <a:spcPts val="0"/>
+              </a:spcAft>
+              <a:buClr>
+                <a:srgbClr val="7BAFC8"/>
+              </a:buClr>
+              <a:buSzPts val="1000"/>
+              <a:buFont typeface="Calibri"/>
+              <a:buNone/>
+            </a:pPr>
+            <a:r>
+              <a:rPr b="0" i="0" lang="en-US" sz="1000" u="none" cap="none" strike="noStrike">
+                <a:solidFill>
+                  <a:srgbClr val="7BAFC8"/>
+                </a:solidFill>
+                <a:latin typeface="Calibri"/>
+                <a:ea typeface="Calibri"/>
+                <a:cs typeface="Calibri"/>
+                <a:sym typeface="Calibri"/>
+              </a:rPr>
+              <a:t>docker compose up --build</a:t>
+            </a:r>
+            <a:endParaRPr b="0" i="0" sz="1000" u="none" cap="none" strike="noStrike">
+              <a:solidFill>
+                <a:schemeClr val="dk1"/>
+              </a:solidFill>
+              <a:latin typeface="Calibri"/>
+              <a:ea typeface="Calibri"/>
+              <a:cs typeface="Calibri"/>
+              <a:sym typeface="Calibri"/>
+            </a:endParaRPr>
+          </a:p>
+        </p:txBody>
+      </p:sp>
     </p:spTree>
   </p:cSld>
   <p:clrMapOvr>
@@ -9661,7 +12541,7 @@
     </p:bg>
     <p:spTree>
       <p:nvGrpSpPr>
-        <p:cNvPr id="23" name="Shape 23"/>
+        <p:cNvPr id="69" name="Shape 69"/>
         <p:cNvGrpSpPr/>
         <p:nvPr/>
       </p:nvGrpSpPr>
@@ -9675,7 +12555,7 @@
       </p:grpSpPr>
       <p:sp>
         <p:nvSpPr>
-          <p:cNvPr id="24" name="Google Shape;24;p3"/>
+          <p:cNvPr id="70" name="Google Shape;70;p3"/>
           <p:cNvSpPr/>
           <p:nvPr/>
         </p:nvSpPr>
@@ -9732,7 +12612,7 @@
       </p:sp>
       <p:sp>
         <p:nvSpPr>
-          <p:cNvPr id="25" name="Google Shape;25;p3"/>
+          <p:cNvPr id="71" name="Google Shape;71;p3"/>
           <p:cNvSpPr/>
           <p:nvPr/>
         </p:nvSpPr>
@@ -9795,7 +12675,7 @@
       </p:sp>
       <p:sp>
         <p:nvSpPr>
-          <p:cNvPr id="26" name="Google Shape;26;p3"/>
+          <p:cNvPr id="72" name="Google Shape;72;p3"/>
           <p:cNvSpPr/>
           <p:nvPr/>
         </p:nvSpPr>
@@ -9859,7 +12739,7 @@
       </p:sp>
       <p:pic>
         <p:nvPicPr>
-          <p:cNvPr descr="preencoded.png" id="27" name="Google Shape;27;p3"/>
+          <p:cNvPr descr="preencoded.png" id="73" name="Google Shape;73;p3"/>
           <p:cNvPicPr preferRelativeResize="0"/>
           <p:nvPr/>
         </p:nvPicPr>
@@ -9886,7 +12766,7 @@
       </p:pic>
       <p:sp>
         <p:nvSpPr>
-          <p:cNvPr id="28" name="Google Shape;28;p3"/>
+          <p:cNvPr id="74" name="Google Shape;74;p3"/>
           <p:cNvSpPr/>
           <p:nvPr/>
         </p:nvSpPr>
@@ -9949,7 +12829,7 @@
       </p:sp>
       <p:sp>
         <p:nvSpPr>
-          <p:cNvPr id="29" name="Google Shape;29;p3"/>
+          <p:cNvPr id="75" name="Google Shape;75;p3"/>
           <p:cNvSpPr/>
           <p:nvPr/>
         </p:nvSpPr>
@@ -10012,7 +12892,7 @@
       </p:sp>
       <p:sp>
         <p:nvSpPr>
-          <p:cNvPr id="30" name="Google Shape;30;p3"/>
+          <p:cNvPr id="76" name="Google Shape;76;p3"/>
           <p:cNvSpPr/>
           <p:nvPr/>
         </p:nvSpPr>
@@ -10076,7 +12956,7 @@
       </p:sp>
       <p:pic>
         <p:nvPicPr>
-          <p:cNvPr descr="preencoded.png" id="31" name="Google Shape;31;p3"/>
+          <p:cNvPr descr="preencoded.png" id="77" name="Google Shape;77;p3"/>
           <p:cNvPicPr preferRelativeResize="0"/>
           <p:nvPr/>
         </p:nvPicPr>
@@ -10103,7 +12983,7 @@
       </p:pic>
       <p:sp>
         <p:nvSpPr>
-          <p:cNvPr id="32" name="Google Shape;32;p3"/>
+          <p:cNvPr id="78" name="Google Shape;78;p3"/>
           <p:cNvSpPr/>
           <p:nvPr/>
         </p:nvSpPr>
@@ -10166,7 +13046,7 @@
       </p:sp>
       <p:sp>
         <p:nvSpPr>
-          <p:cNvPr id="33" name="Google Shape;33;p3"/>
+          <p:cNvPr id="79" name="Google Shape;79;p3"/>
           <p:cNvSpPr/>
           <p:nvPr/>
         </p:nvSpPr>
@@ -10229,7 +13109,7 @@
       </p:sp>
       <p:sp>
         <p:nvSpPr>
-          <p:cNvPr id="34" name="Google Shape;34;p3"/>
+          <p:cNvPr id="80" name="Google Shape;80;p3"/>
           <p:cNvSpPr/>
           <p:nvPr/>
         </p:nvSpPr>
@@ -10293,7 +13173,7 @@
       </p:sp>
       <p:pic>
         <p:nvPicPr>
-          <p:cNvPr descr="preencoded.png" id="35" name="Google Shape;35;p3"/>
+          <p:cNvPr descr="preencoded.png" id="81" name="Google Shape;81;p3"/>
           <p:cNvPicPr preferRelativeResize="0"/>
           <p:nvPr/>
         </p:nvPicPr>
@@ -10320,7 +13200,7 @@
       </p:pic>
       <p:sp>
         <p:nvSpPr>
-          <p:cNvPr id="36" name="Google Shape;36;p3"/>
+          <p:cNvPr id="82" name="Google Shape;82;p3"/>
           <p:cNvSpPr/>
           <p:nvPr/>
         </p:nvSpPr>
@@ -10383,7 +13263,7 @@
       </p:sp>
       <p:sp>
         <p:nvSpPr>
-          <p:cNvPr id="37" name="Google Shape;37;p3"/>
+          <p:cNvPr id="83" name="Google Shape;83;p3"/>
           <p:cNvSpPr/>
           <p:nvPr/>
         </p:nvSpPr>
@@ -10446,7 +13326,7 @@
       </p:sp>
       <p:sp>
         <p:nvSpPr>
-          <p:cNvPr id="38" name="Google Shape;38;p3"/>
+          <p:cNvPr id="84" name="Google Shape;84;p3"/>
           <p:cNvSpPr/>
           <p:nvPr/>
         </p:nvSpPr>
@@ -10505,7 +13385,7 @@
       </p:sp>
       <p:sp>
         <p:nvSpPr>
-          <p:cNvPr id="39" name="Google Shape;39;p3"/>
+          <p:cNvPr id="85" name="Google Shape;85;p3"/>
           <p:cNvSpPr/>
           <p:nvPr/>
         </p:nvSpPr>
@@ -10586,7 +13466,7 @@
     </p:bg>
     <p:spTree>
       <p:nvGrpSpPr>
-        <p:cNvPr id="44" name="Shape 44"/>
+        <p:cNvPr id="90" name="Shape 90"/>
         <p:cNvGrpSpPr/>
         <p:nvPr/>
       </p:nvGrpSpPr>
@@ -10600,7 +13480,7 @@
       </p:grpSpPr>
       <p:sp>
         <p:nvSpPr>
-          <p:cNvPr id="45" name="Google Shape;45;p4"/>
+          <p:cNvPr id="91" name="Google Shape;91;p4"/>
           <p:cNvSpPr/>
           <p:nvPr/>
         </p:nvSpPr>
@@ -10657,7 +13537,7 @@
       </p:sp>
       <p:sp>
         <p:nvSpPr>
-          <p:cNvPr id="46" name="Google Shape;46;p4"/>
+          <p:cNvPr id="92" name="Google Shape;92;p4"/>
           <p:cNvSpPr/>
           <p:nvPr/>
         </p:nvSpPr>
@@ -10720,7 +13600,7 @@
       </p:sp>
       <p:sp>
         <p:nvSpPr>
-          <p:cNvPr id="47" name="Google Shape;47;p4"/>
+          <p:cNvPr id="93" name="Google Shape;93;p4"/>
           <p:cNvSpPr/>
           <p:nvPr/>
         </p:nvSpPr>
@@ -10783,7 +13663,7 @@
       </p:sp>
       <p:sp>
         <p:nvSpPr>
-          <p:cNvPr id="48" name="Google Shape;48;p4"/>
+          <p:cNvPr id="94" name="Google Shape;94;p4"/>
           <p:cNvSpPr/>
           <p:nvPr/>
         </p:nvSpPr>
@@ -10840,7 +13720,7 @@
       </p:sp>
       <p:sp>
         <p:nvSpPr>
-          <p:cNvPr id="49" name="Google Shape;49;p4"/>
+          <p:cNvPr id="95" name="Google Shape;95;p4"/>
           <p:cNvSpPr/>
           <p:nvPr/>
         </p:nvSpPr>
@@ -10903,7 +13783,7 @@
       </p:sp>
       <p:sp>
         <p:nvSpPr>
-          <p:cNvPr id="50" name="Google Shape;50;p4"/>
+          <p:cNvPr id="96" name="Google Shape;96;p4"/>
           <p:cNvSpPr/>
           <p:nvPr/>
         </p:nvSpPr>
@@ -10960,7 +13840,7 @@
       </p:sp>
       <p:sp>
         <p:nvSpPr>
-          <p:cNvPr id="51" name="Google Shape;51;p4"/>
+          <p:cNvPr id="97" name="Google Shape;97;p4"/>
           <p:cNvSpPr/>
           <p:nvPr/>
         </p:nvSpPr>
@@ -11023,7 +13903,7 @@
       </p:sp>
       <p:sp>
         <p:nvSpPr>
-          <p:cNvPr id="52" name="Google Shape;52;p4"/>
+          <p:cNvPr id="98" name="Google Shape;98;p4"/>
           <p:cNvSpPr/>
           <p:nvPr/>
         </p:nvSpPr>
@@ -11080,7 +13960,7 @@
       </p:sp>
       <p:sp>
         <p:nvSpPr>
-          <p:cNvPr id="53" name="Google Shape;53;p4"/>
+          <p:cNvPr id="99" name="Google Shape;99;p4"/>
           <p:cNvSpPr/>
           <p:nvPr/>
         </p:nvSpPr>
@@ -11143,7 +14023,7 @@
       </p:sp>
       <p:sp>
         <p:nvSpPr>
-          <p:cNvPr id="54" name="Google Shape;54;p4"/>
+          <p:cNvPr id="100" name="Google Shape;100;p4"/>
           <p:cNvSpPr/>
           <p:nvPr/>
         </p:nvSpPr>
@@ -11200,7 +14080,7 @@
       </p:sp>
       <p:sp>
         <p:nvSpPr>
-          <p:cNvPr id="55" name="Google Shape;55;p4"/>
+          <p:cNvPr id="101" name="Google Shape;101;p4"/>
           <p:cNvSpPr/>
           <p:nvPr/>
         </p:nvSpPr>
@@ -11263,7 +14143,7 @@
       </p:sp>
       <p:sp>
         <p:nvSpPr>
-          <p:cNvPr id="56" name="Google Shape;56;p4"/>
+          <p:cNvPr id="102" name="Google Shape;102;p4"/>
           <p:cNvSpPr/>
           <p:nvPr/>
         </p:nvSpPr>
@@ -11320,7 +14200,7 @@
       </p:sp>
       <p:sp>
         <p:nvSpPr>
-          <p:cNvPr id="57" name="Google Shape;57;p4"/>
+          <p:cNvPr id="103" name="Google Shape;103;p4"/>
           <p:cNvSpPr/>
           <p:nvPr/>
         </p:nvSpPr>
@@ -11383,7 +14263,7 @@
       </p:sp>
       <p:sp>
         <p:nvSpPr>
-          <p:cNvPr id="58" name="Google Shape;58;p4"/>
+          <p:cNvPr id="104" name="Google Shape;104;p4"/>
           <p:cNvSpPr/>
           <p:nvPr/>
         </p:nvSpPr>
@@ -11446,7 +14326,7 @@
       </p:sp>
       <p:sp>
         <p:nvSpPr>
-          <p:cNvPr id="59" name="Google Shape;59;p4"/>
+          <p:cNvPr id="105" name="Google Shape;105;p4"/>
           <p:cNvSpPr/>
           <p:nvPr/>
         </p:nvSpPr>
@@ -11503,7 +14383,7 @@
       </p:sp>
       <p:sp>
         <p:nvSpPr>
-          <p:cNvPr id="60" name="Google Shape;60;p4"/>
+          <p:cNvPr id="106" name="Google Shape;106;p4"/>
           <p:cNvSpPr/>
           <p:nvPr/>
         </p:nvSpPr>
@@ -11603,7 +14483,7 @@
       </p:sp>
       <p:sp>
         <p:nvSpPr>
-          <p:cNvPr id="61" name="Google Shape;61;p4"/>
+          <p:cNvPr id="107" name="Google Shape;107;p4"/>
           <p:cNvSpPr/>
           <p:nvPr/>
         </p:nvSpPr>
@@ -11667,7 +14547,7 @@
       </p:sp>
       <p:sp>
         <p:nvSpPr>
-          <p:cNvPr id="62" name="Google Shape;62;p4"/>
+          <p:cNvPr id="108" name="Google Shape;108;p4"/>
           <p:cNvSpPr/>
           <p:nvPr/>
         </p:nvSpPr>
@@ -11724,7 +14604,7 @@
       </p:sp>
       <p:sp>
         <p:nvSpPr>
-          <p:cNvPr id="63" name="Google Shape;63;p4"/>
+          <p:cNvPr id="109" name="Google Shape;109;p4"/>
           <p:cNvSpPr/>
           <p:nvPr/>
         </p:nvSpPr>
@@ -11787,7 +14667,7 @@
       </p:sp>
       <p:sp>
         <p:nvSpPr>
-          <p:cNvPr id="64" name="Google Shape;64;p4"/>
+          <p:cNvPr id="110" name="Google Shape;110;p4"/>
           <p:cNvSpPr/>
           <p:nvPr/>
         </p:nvSpPr>
@@ -11850,7 +14730,7 @@
       </p:sp>
       <p:sp>
         <p:nvSpPr>
-          <p:cNvPr id="65" name="Google Shape;65;p4"/>
+          <p:cNvPr id="111" name="Google Shape;111;p4"/>
           <p:cNvSpPr/>
           <p:nvPr/>
         </p:nvSpPr>
@@ -11913,7 +14793,7 @@
       </p:sp>
       <p:sp>
         <p:nvSpPr>
-          <p:cNvPr id="66" name="Google Shape;66;p4"/>
+          <p:cNvPr id="112" name="Google Shape;112;p4"/>
           <p:cNvSpPr/>
           <p:nvPr/>
         </p:nvSpPr>
@@ -11976,7 +14856,7 @@
       </p:sp>
       <p:sp>
         <p:nvSpPr>
-          <p:cNvPr id="67" name="Google Shape;67;p4"/>
+          <p:cNvPr id="113" name="Google Shape;113;p4"/>
           <p:cNvSpPr/>
           <p:nvPr/>
         </p:nvSpPr>
@@ -12039,7 +14919,7 @@
       </p:sp>
       <p:sp>
         <p:nvSpPr>
-          <p:cNvPr id="68" name="Google Shape;68;p4"/>
+          <p:cNvPr id="114" name="Google Shape;114;p4"/>
           <p:cNvSpPr/>
           <p:nvPr/>
         </p:nvSpPr>
@@ -12102,7 +14982,7 @@
       </p:sp>
       <p:sp>
         <p:nvSpPr>
-          <p:cNvPr id="69" name="Google Shape;69;p4"/>
+          <p:cNvPr id="115" name="Google Shape;115;p4"/>
           <p:cNvSpPr/>
           <p:nvPr/>
         </p:nvSpPr>
@@ -12165,7 +15045,7 @@
       </p:sp>
       <p:sp>
         <p:nvSpPr>
-          <p:cNvPr id="70" name="Google Shape;70;p4"/>
+          <p:cNvPr id="116" name="Google Shape;116;p4"/>
           <p:cNvSpPr/>
           <p:nvPr/>
         </p:nvSpPr>
@@ -12222,7 +15102,7 @@
       </p:sp>
       <p:sp>
         <p:nvSpPr>
-          <p:cNvPr id="71" name="Google Shape;71;p4"/>
+          <p:cNvPr id="117" name="Google Shape;117;p4"/>
           <p:cNvSpPr/>
           <p:nvPr/>
         </p:nvSpPr>
@@ -12286,7 +15166,7 @@
       </p:sp>
       <p:pic>
         <p:nvPicPr>
-          <p:cNvPr descr="preencoded.png" id="72" name="Google Shape;72;p4"/>
+          <p:cNvPr descr="preencoded.png" id="118" name="Google Shape;118;p4"/>
           <p:cNvPicPr preferRelativeResize="0"/>
           <p:nvPr/>
         </p:nvPicPr>
@@ -12313,7 +15193,7 @@
       </p:pic>
       <p:sp>
         <p:nvSpPr>
-          <p:cNvPr id="73" name="Google Shape;73;p4"/>
+          <p:cNvPr id="119" name="Google Shape;119;p4"/>
           <p:cNvSpPr/>
           <p:nvPr/>
         </p:nvSpPr>
@@ -12376,7 +15256,7 @@
       </p:sp>
       <p:sp>
         <p:nvSpPr>
-          <p:cNvPr id="74" name="Google Shape;74;p4"/>
+          <p:cNvPr id="120" name="Google Shape;120;p4"/>
           <p:cNvSpPr/>
           <p:nvPr/>
         </p:nvSpPr>
@@ -12513,7 +15393,7 @@
       </p:sp>
       <p:sp>
         <p:nvSpPr>
-          <p:cNvPr id="75" name="Google Shape;75;p4"/>
+          <p:cNvPr id="121" name="Google Shape;121;p4"/>
           <p:cNvSpPr/>
           <p:nvPr/>
         </p:nvSpPr>
@@ -12570,7 +15450,7 @@
       </p:sp>
       <p:sp>
         <p:nvSpPr>
-          <p:cNvPr id="76" name="Google Shape;76;p4"/>
+          <p:cNvPr id="122" name="Google Shape;122;p4"/>
           <p:cNvSpPr/>
           <p:nvPr/>
         </p:nvSpPr>
@@ -12634,7 +15514,7 @@
       </p:sp>
       <p:sp>
         <p:nvSpPr>
-          <p:cNvPr id="77" name="Google Shape;77;p4"/>
+          <p:cNvPr id="123" name="Google Shape;123;p4"/>
           <p:cNvSpPr/>
           <p:nvPr/>
         </p:nvSpPr>
@@ -12697,7 +15577,7 @@
       </p:sp>
       <p:sp>
         <p:nvSpPr>
-          <p:cNvPr id="78" name="Google Shape;78;p4"/>
+          <p:cNvPr id="124" name="Google Shape;124;p4"/>
           <p:cNvSpPr/>
           <p:nvPr/>
         </p:nvSpPr>
@@ -12797,7 +15677,7 @@
       </p:sp>
       <p:sp>
         <p:nvSpPr>
-          <p:cNvPr id="79" name="Google Shape;79;p4"/>
+          <p:cNvPr id="125" name="Google Shape;125;p4"/>
           <p:cNvSpPr/>
           <p:nvPr/>
         </p:nvSpPr>
@@ -12856,7 +15736,7 @@
       </p:sp>
       <p:sp>
         <p:nvSpPr>
-          <p:cNvPr id="80" name="Google Shape;80;p4"/>
+          <p:cNvPr id="126" name="Google Shape;126;p4"/>
           <p:cNvSpPr/>
           <p:nvPr/>
         </p:nvSpPr>
@@ -12937,7 +15817,7 @@
     </p:bg>
     <p:spTree>
       <p:nvGrpSpPr>
-        <p:cNvPr id="85" name="Shape 85"/>
+        <p:cNvPr id="131" name="Shape 131"/>
         <p:cNvGrpSpPr/>
         <p:nvPr/>
       </p:nvGrpSpPr>
@@ -12951,7 +15831,7 @@
       </p:grpSpPr>
       <p:sp>
         <p:nvSpPr>
-          <p:cNvPr id="86" name="Google Shape;86;p5"/>
+          <p:cNvPr id="132" name="Google Shape;132;p5"/>
           <p:cNvSpPr/>
           <p:nvPr/>
         </p:nvSpPr>
@@ -13008,7 +15888,7 @@
       </p:sp>
       <p:sp>
         <p:nvSpPr>
-          <p:cNvPr id="87" name="Google Shape;87;p5"/>
+          <p:cNvPr id="133" name="Google Shape;133;p5"/>
           <p:cNvSpPr/>
           <p:nvPr/>
         </p:nvSpPr>
@@ -13071,7 +15951,7 @@
       </p:sp>
       <p:sp>
         <p:nvSpPr>
-          <p:cNvPr id="88" name="Google Shape;88;p5"/>
+          <p:cNvPr id="134" name="Google Shape;134;p5"/>
           <p:cNvSpPr/>
           <p:nvPr/>
         </p:nvSpPr>
@@ -13135,7 +16015,7 @@
       </p:sp>
       <p:sp>
         <p:nvSpPr>
-          <p:cNvPr id="89" name="Google Shape;89;p5"/>
+          <p:cNvPr id="135" name="Google Shape;135;p5"/>
           <p:cNvSpPr/>
           <p:nvPr/>
         </p:nvSpPr>
@@ -13200,7 +16080,7 @@
       </p:sp>
       <p:sp>
         <p:nvSpPr>
-          <p:cNvPr id="90" name="Google Shape;90;p5"/>
+          <p:cNvPr id="136" name="Google Shape;136;p5"/>
           <p:cNvSpPr/>
           <p:nvPr/>
         </p:nvSpPr>
@@ -13257,7 +16137,7 @@
       </p:sp>
       <p:sp>
         <p:nvSpPr>
-          <p:cNvPr id="91" name="Google Shape;91;p5"/>
+          <p:cNvPr id="137" name="Google Shape;137;p5"/>
           <p:cNvSpPr/>
           <p:nvPr/>
         </p:nvSpPr>
@@ -13320,7 +16200,7 @@
       </p:sp>
       <p:sp>
         <p:nvSpPr>
-          <p:cNvPr id="92" name="Google Shape;92;p5"/>
+          <p:cNvPr id="138" name="Google Shape;138;p5"/>
           <p:cNvSpPr/>
           <p:nvPr/>
         </p:nvSpPr>
@@ -13383,7 +16263,7 @@
       </p:sp>
       <p:sp>
         <p:nvSpPr>
-          <p:cNvPr id="93" name="Google Shape;93;p5"/>
+          <p:cNvPr id="139" name="Google Shape;139;p5"/>
           <p:cNvSpPr/>
           <p:nvPr/>
         </p:nvSpPr>
@@ -13446,7 +16326,7 @@
       </p:sp>
       <p:sp>
         <p:nvSpPr>
-          <p:cNvPr id="94" name="Google Shape;94;p5"/>
+          <p:cNvPr id="140" name="Google Shape;140;p5"/>
           <p:cNvSpPr/>
           <p:nvPr/>
         </p:nvSpPr>
@@ -13509,7 +16389,7 @@
       </p:sp>
       <p:sp>
         <p:nvSpPr>
-          <p:cNvPr id="95" name="Google Shape;95;p5"/>
+          <p:cNvPr id="141" name="Google Shape;141;p5"/>
           <p:cNvSpPr/>
           <p:nvPr/>
         </p:nvSpPr>
@@ -13572,7 +16452,7 @@
       </p:sp>
       <p:sp>
         <p:nvSpPr>
-          <p:cNvPr id="96" name="Google Shape;96;p5"/>
+          <p:cNvPr id="142" name="Google Shape;142;p5"/>
           <p:cNvSpPr/>
           <p:nvPr/>
         </p:nvSpPr>
@@ -13635,7 +16515,7 @@
       </p:sp>
       <p:sp>
         <p:nvSpPr>
-          <p:cNvPr id="97" name="Google Shape;97;p5"/>
+          <p:cNvPr id="143" name="Google Shape;143;p5"/>
           <p:cNvSpPr/>
           <p:nvPr/>
         </p:nvSpPr>
@@ -13698,7 +16578,7 @@
       </p:sp>
       <p:sp>
         <p:nvSpPr>
-          <p:cNvPr id="98" name="Google Shape;98;p5"/>
+          <p:cNvPr id="144" name="Google Shape;144;p5"/>
           <p:cNvSpPr/>
           <p:nvPr/>
         </p:nvSpPr>
@@ -13761,7 +16641,7 @@
       </p:sp>
       <p:sp>
         <p:nvSpPr>
-          <p:cNvPr id="99" name="Google Shape;99;p5"/>
+          <p:cNvPr id="145" name="Google Shape;145;p5"/>
           <p:cNvSpPr/>
           <p:nvPr/>
         </p:nvSpPr>
@@ -13824,7 +16704,7 @@
       </p:sp>
       <p:sp>
         <p:nvSpPr>
-          <p:cNvPr id="100" name="Google Shape;100;p5"/>
+          <p:cNvPr id="146" name="Google Shape;146;p5"/>
           <p:cNvSpPr/>
           <p:nvPr/>
         </p:nvSpPr>
@@ -13887,7 +16767,7 @@
       </p:sp>
       <p:sp>
         <p:nvSpPr>
-          <p:cNvPr id="101" name="Google Shape;101;p5"/>
+          <p:cNvPr id="147" name="Google Shape;147;p5"/>
           <p:cNvSpPr/>
           <p:nvPr/>
         </p:nvSpPr>
@@ -13950,7 +16830,7 @@
       </p:sp>
       <p:sp>
         <p:nvSpPr>
-          <p:cNvPr id="102" name="Google Shape;102;p5"/>
+          <p:cNvPr id="148" name="Google Shape;148;p5"/>
           <p:cNvSpPr/>
           <p:nvPr/>
         </p:nvSpPr>
@@ -14013,7 +16893,7 @@
       </p:sp>
       <p:sp>
         <p:nvSpPr>
-          <p:cNvPr id="103" name="Google Shape;103;p5"/>
+          <p:cNvPr id="149" name="Google Shape;149;p5"/>
           <p:cNvSpPr/>
           <p:nvPr/>
         </p:nvSpPr>
@@ -14076,7 +16956,7 @@
       </p:sp>
       <p:sp>
         <p:nvSpPr>
-          <p:cNvPr id="104" name="Google Shape;104;p5"/>
+          <p:cNvPr id="150" name="Google Shape;150;p5"/>
           <p:cNvSpPr/>
           <p:nvPr/>
         </p:nvSpPr>
@@ -14139,7 +17019,7 @@
       </p:sp>
       <p:sp>
         <p:nvSpPr>
-          <p:cNvPr id="105" name="Google Shape;105;p5"/>
+          <p:cNvPr id="151" name="Google Shape;151;p5"/>
           <p:cNvSpPr/>
           <p:nvPr/>
         </p:nvSpPr>
@@ -14202,7 +17082,7 @@
       </p:sp>
       <p:sp>
         <p:nvSpPr>
-          <p:cNvPr id="106" name="Google Shape;106;p5"/>
+          <p:cNvPr id="152" name="Google Shape;152;p5"/>
           <p:cNvSpPr/>
           <p:nvPr/>
         </p:nvSpPr>
@@ -14265,7 +17145,7 @@
       </p:sp>
       <p:sp>
         <p:nvSpPr>
-          <p:cNvPr id="107" name="Google Shape;107;p5"/>
+          <p:cNvPr id="153" name="Google Shape;153;p5"/>
           <p:cNvSpPr/>
           <p:nvPr/>
         </p:nvSpPr>
@@ -14328,7 +17208,7 @@
       </p:sp>
       <p:sp>
         <p:nvSpPr>
-          <p:cNvPr id="108" name="Google Shape;108;p5"/>
+          <p:cNvPr id="154" name="Google Shape;154;p5"/>
           <p:cNvSpPr/>
           <p:nvPr/>
         </p:nvSpPr>
@@ -14391,7 +17271,7 @@
       </p:sp>
       <p:sp>
         <p:nvSpPr>
-          <p:cNvPr id="109" name="Google Shape;109;p5"/>
+          <p:cNvPr id="155" name="Google Shape;155;p5"/>
           <p:cNvSpPr/>
           <p:nvPr/>
         </p:nvSpPr>
@@ -14454,7 +17334,7 @@
       </p:sp>
       <p:sp>
         <p:nvSpPr>
-          <p:cNvPr id="110" name="Google Shape;110;p5"/>
+          <p:cNvPr id="156" name="Google Shape;156;p5"/>
           <p:cNvSpPr/>
           <p:nvPr/>
         </p:nvSpPr>
@@ -14517,7 +17397,7 @@
       </p:sp>
       <p:sp>
         <p:nvSpPr>
-          <p:cNvPr id="111" name="Google Shape;111;p5"/>
+          <p:cNvPr id="157" name="Google Shape;157;p5"/>
           <p:cNvSpPr/>
           <p:nvPr/>
         </p:nvSpPr>
@@ -14580,7 +17460,7 @@
       </p:sp>
       <p:sp>
         <p:nvSpPr>
-          <p:cNvPr id="112" name="Google Shape;112;p5"/>
+          <p:cNvPr id="158" name="Google Shape;158;p5"/>
           <p:cNvSpPr/>
           <p:nvPr/>
         </p:nvSpPr>
@@ -14643,7 +17523,7 @@
       </p:sp>
       <p:sp>
         <p:nvSpPr>
-          <p:cNvPr id="113" name="Google Shape;113;p5"/>
+          <p:cNvPr id="159" name="Google Shape;159;p5"/>
           <p:cNvSpPr/>
           <p:nvPr/>
         </p:nvSpPr>
@@ -14700,7 +17580,7 @@
       </p:sp>
       <p:sp>
         <p:nvSpPr>
-          <p:cNvPr id="114" name="Google Shape;114;p5"/>
+          <p:cNvPr id="160" name="Google Shape;160;p5"/>
           <p:cNvSpPr/>
           <p:nvPr/>
         </p:nvSpPr>
@@ -14763,7 +17643,7 @@
       </p:sp>
       <p:sp>
         <p:nvSpPr>
-          <p:cNvPr id="115" name="Google Shape;115;p5"/>
+          <p:cNvPr id="161" name="Google Shape;161;p5"/>
           <p:cNvSpPr/>
           <p:nvPr/>
         </p:nvSpPr>
@@ -14820,7 +17700,7 @@
       </p:sp>
       <p:sp>
         <p:nvSpPr>
-          <p:cNvPr id="116" name="Google Shape;116;p5"/>
+          <p:cNvPr id="162" name="Google Shape;162;p5"/>
           <p:cNvSpPr/>
           <p:nvPr/>
         </p:nvSpPr>
@@ -14883,7 +17763,7 @@
       </p:sp>
       <p:sp>
         <p:nvSpPr>
-          <p:cNvPr id="117" name="Google Shape;117;p5"/>
+          <p:cNvPr id="163" name="Google Shape;163;p5"/>
           <p:cNvSpPr/>
           <p:nvPr/>
         </p:nvSpPr>
@@ -14946,7 +17826,7 @@
       </p:sp>
       <p:sp>
         <p:nvSpPr>
-          <p:cNvPr id="118" name="Google Shape;118;p5"/>
+          <p:cNvPr id="164" name="Google Shape;164;p5"/>
           <p:cNvSpPr/>
           <p:nvPr/>
         </p:nvSpPr>
@@ -15003,7 +17883,7 @@
       </p:sp>
       <p:sp>
         <p:nvSpPr>
-          <p:cNvPr id="119" name="Google Shape;119;p5"/>
+          <p:cNvPr id="165" name="Google Shape;165;p5"/>
           <p:cNvSpPr/>
           <p:nvPr/>
         </p:nvSpPr>
@@ -15066,7 +17946,7 @@
       </p:sp>
       <p:sp>
         <p:nvSpPr>
-          <p:cNvPr id="120" name="Google Shape;120;p5"/>
+          <p:cNvPr id="166" name="Google Shape;166;p5"/>
           <p:cNvSpPr/>
           <p:nvPr/>
         </p:nvSpPr>
@@ -15129,7 +18009,7 @@
       </p:sp>
       <p:sp>
         <p:nvSpPr>
-          <p:cNvPr id="121" name="Google Shape;121;p5"/>
+          <p:cNvPr id="167" name="Google Shape;167;p5"/>
           <p:cNvSpPr/>
           <p:nvPr/>
         </p:nvSpPr>
@@ -15186,7 +18066,7 @@
       </p:sp>
       <p:sp>
         <p:nvSpPr>
-          <p:cNvPr id="122" name="Google Shape;122;p5"/>
+          <p:cNvPr id="168" name="Google Shape;168;p5"/>
           <p:cNvSpPr/>
           <p:nvPr/>
         </p:nvSpPr>
@@ -15249,7 +18129,7 @@
       </p:sp>
       <p:sp>
         <p:nvSpPr>
-          <p:cNvPr id="123" name="Google Shape;123;p5"/>
+          <p:cNvPr id="169" name="Google Shape;169;p5"/>
           <p:cNvSpPr/>
           <p:nvPr/>
         </p:nvSpPr>
@@ -15324,7 +18204,7 @@
       </p:sp>
       <p:sp>
         <p:nvSpPr>
-          <p:cNvPr id="124" name="Google Shape;124;p5"/>
+          <p:cNvPr id="170" name="Google Shape;170;p5"/>
           <p:cNvSpPr/>
           <p:nvPr/>
         </p:nvSpPr>
@@ -15381,7 +18261,7 @@
       </p:sp>
       <p:sp>
         <p:nvSpPr>
-          <p:cNvPr id="125" name="Google Shape;125;p5"/>
+          <p:cNvPr id="171" name="Google Shape;171;p5"/>
           <p:cNvSpPr/>
           <p:nvPr/>
         </p:nvSpPr>
@@ -15444,7 +18324,7 @@
       </p:sp>
       <p:sp>
         <p:nvSpPr>
-          <p:cNvPr id="126" name="Google Shape;126;p5"/>
+          <p:cNvPr id="172" name="Google Shape;172;p5"/>
           <p:cNvSpPr/>
           <p:nvPr/>
         </p:nvSpPr>
@@ -15507,7 +18387,7 @@
       </p:sp>
       <p:sp>
         <p:nvSpPr>
-          <p:cNvPr id="127" name="Google Shape;127;p5"/>
+          <p:cNvPr id="173" name="Google Shape;173;p5"/>
           <p:cNvSpPr/>
           <p:nvPr/>
         </p:nvSpPr>
@@ -15564,7 +18444,7 @@
       </p:sp>
       <p:sp>
         <p:nvSpPr>
-          <p:cNvPr id="128" name="Google Shape;128;p5"/>
+          <p:cNvPr id="174" name="Google Shape;174;p5"/>
           <p:cNvSpPr/>
           <p:nvPr/>
         </p:nvSpPr>
@@ -15627,7 +18507,7 @@
       </p:sp>
       <p:sp>
         <p:nvSpPr>
-          <p:cNvPr id="129" name="Google Shape;129;p5"/>
+          <p:cNvPr id="175" name="Google Shape;175;p5"/>
           <p:cNvSpPr/>
           <p:nvPr/>
         </p:nvSpPr>
@@ -15714,7 +18594,7 @@
       </p:sp>
       <p:sp>
         <p:nvSpPr>
-          <p:cNvPr id="130" name="Google Shape;130;p5"/>
+          <p:cNvPr id="176" name="Google Shape;176;p5"/>
           <p:cNvSpPr/>
           <p:nvPr/>
         </p:nvSpPr>
@@ -15771,7 +18651,7 @@
       </p:sp>
       <p:sp>
         <p:nvSpPr>
-          <p:cNvPr id="131" name="Google Shape;131;p5"/>
+          <p:cNvPr id="177" name="Google Shape;177;p5"/>
           <p:cNvSpPr/>
           <p:nvPr/>
         </p:nvSpPr>
@@ -15834,7 +18714,7 @@
       </p:sp>
       <p:sp>
         <p:nvSpPr>
-          <p:cNvPr id="132" name="Google Shape;132;p5"/>
+          <p:cNvPr id="178" name="Google Shape;178;p5"/>
           <p:cNvSpPr/>
           <p:nvPr/>
         </p:nvSpPr>
@@ -15897,7 +18777,7 @@
       </p:sp>
       <p:sp>
         <p:nvSpPr>
-          <p:cNvPr id="133" name="Google Shape;133;p5"/>
+          <p:cNvPr id="179" name="Google Shape;179;p5"/>
           <p:cNvSpPr/>
           <p:nvPr/>
         </p:nvSpPr>
@@ -15954,7 +18834,7 @@
       </p:sp>
       <p:sp>
         <p:nvSpPr>
-          <p:cNvPr id="134" name="Google Shape;134;p5"/>
+          <p:cNvPr id="180" name="Google Shape;180;p5"/>
           <p:cNvSpPr/>
           <p:nvPr/>
         </p:nvSpPr>
@@ -16072,7 +18952,7 @@
     </p:bg>
     <p:spTree>
       <p:nvGrpSpPr>
-        <p:cNvPr id="139" name="Shape 139"/>
+        <p:cNvPr id="185" name="Shape 185"/>
         <p:cNvGrpSpPr/>
         <p:nvPr/>
       </p:nvGrpSpPr>
@@ -16086,7 +18966,7 @@
       </p:grpSpPr>
       <p:sp>
         <p:nvSpPr>
-          <p:cNvPr id="140" name="Google Shape;140;p6"/>
+          <p:cNvPr id="186" name="Google Shape;186;p6"/>
           <p:cNvSpPr/>
           <p:nvPr/>
         </p:nvSpPr>
@@ -16143,7 +19023,7 @@
       </p:sp>
       <p:sp>
         <p:nvSpPr>
-          <p:cNvPr id="141" name="Google Shape;141;p6"/>
+          <p:cNvPr id="187" name="Google Shape;187;p6"/>
           <p:cNvSpPr/>
           <p:nvPr/>
         </p:nvSpPr>
@@ -16206,7 +19086,7 @@
       </p:sp>
       <p:sp>
         <p:nvSpPr>
-          <p:cNvPr id="142" name="Google Shape;142;p6"/>
+          <p:cNvPr id="188" name="Google Shape;188;p6"/>
           <p:cNvSpPr/>
           <p:nvPr/>
         </p:nvSpPr>
@@ -16263,7 +19143,7 @@
       </p:sp>
       <p:sp>
         <p:nvSpPr>
-          <p:cNvPr id="143" name="Google Shape;143;p6"/>
+          <p:cNvPr id="189" name="Google Shape;189;p6"/>
           <p:cNvSpPr/>
           <p:nvPr/>
         </p:nvSpPr>
@@ -16320,7 +19200,7 @@
       </p:sp>
       <p:sp>
         <p:nvSpPr>
-          <p:cNvPr id="144" name="Google Shape;144;p6"/>
+          <p:cNvPr id="190" name="Google Shape;190;p6"/>
           <p:cNvSpPr/>
           <p:nvPr/>
         </p:nvSpPr>
@@ -16383,7 +19263,7 @@
       </p:sp>
       <p:sp>
         <p:nvSpPr>
-          <p:cNvPr id="145" name="Google Shape;145;p6"/>
+          <p:cNvPr id="191" name="Google Shape;191;p6"/>
           <p:cNvSpPr/>
           <p:nvPr/>
         </p:nvSpPr>
@@ -16483,7 +19363,7 @@
       </p:sp>
       <p:sp>
         <p:nvSpPr>
-          <p:cNvPr id="146" name="Google Shape;146;p6"/>
+          <p:cNvPr id="192" name="Google Shape;192;p6"/>
           <p:cNvSpPr/>
           <p:nvPr/>
         </p:nvSpPr>
@@ -16540,7 +19420,7 @@
       </p:sp>
       <p:sp>
         <p:nvSpPr>
-          <p:cNvPr id="147" name="Google Shape;147;p6"/>
+          <p:cNvPr id="193" name="Google Shape;193;p6"/>
           <p:cNvSpPr/>
           <p:nvPr/>
         </p:nvSpPr>
@@ -16597,7 +19477,7 @@
       </p:sp>
       <p:sp>
         <p:nvSpPr>
-          <p:cNvPr id="148" name="Google Shape;148;p6"/>
+          <p:cNvPr id="194" name="Google Shape;194;p6"/>
           <p:cNvSpPr/>
           <p:nvPr/>
         </p:nvSpPr>
@@ -16654,7 +19534,7 @@
       </p:sp>
       <p:sp>
         <p:nvSpPr>
-          <p:cNvPr id="149" name="Google Shape;149;p6"/>
+          <p:cNvPr id="195" name="Google Shape;195;p6"/>
           <p:cNvSpPr/>
           <p:nvPr/>
         </p:nvSpPr>
@@ -16717,7 +19597,7 @@
       </p:sp>
       <p:sp>
         <p:nvSpPr>
-          <p:cNvPr id="150" name="Google Shape;150;p6"/>
+          <p:cNvPr id="196" name="Google Shape;196;p6"/>
           <p:cNvSpPr/>
           <p:nvPr/>
         </p:nvSpPr>
@@ -16817,7 +19697,7 @@
       </p:sp>
       <p:sp>
         <p:nvSpPr>
-          <p:cNvPr id="151" name="Google Shape;151;p6"/>
+          <p:cNvPr id="197" name="Google Shape;197;p6"/>
           <p:cNvSpPr/>
           <p:nvPr/>
         </p:nvSpPr>
@@ -16874,7 +19754,7 @@
       </p:sp>
       <p:sp>
         <p:nvSpPr>
-          <p:cNvPr id="152" name="Google Shape;152;p6"/>
+          <p:cNvPr id="198" name="Google Shape;198;p6"/>
           <p:cNvSpPr/>
           <p:nvPr/>
         </p:nvSpPr>
@@ -16931,7 +19811,7 @@
       </p:sp>
       <p:sp>
         <p:nvSpPr>
-          <p:cNvPr id="153" name="Google Shape;153;p6"/>
+          <p:cNvPr id="199" name="Google Shape;199;p6"/>
           <p:cNvSpPr/>
           <p:nvPr/>
         </p:nvSpPr>
@@ -16988,7 +19868,7 @@
       </p:sp>
       <p:sp>
         <p:nvSpPr>
-          <p:cNvPr id="154" name="Google Shape;154;p6"/>
+          <p:cNvPr id="200" name="Google Shape;200;p6"/>
           <p:cNvSpPr/>
           <p:nvPr/>
         </p:nvSpPr>
@@ -17051,7 +19931,7 @@
       </p:sp>
       <p:sp>
         <p:nvSpPr>
-          <p:cNvPr id="155" name="Google Shape;155;p6"/>
+          <p:cNvPr id="201" name="Google Shape;201;p6"/>
           <p:cNvSpPr/>
           <p:nvPr/>
         </p:nvSpPr>
@@ -17151,7 +20031,7 @@
       </p:sp>
       <p:sp>
         <p:nvSpPr>
-          <p:cNvPr id="156" name="Google Shape;156;p6"/>
+          <p:cNvPr id="202" name="Google Shape;202;p6"/>
           <p:cNvSpPr/>
           <p:nvPr/>
         </p:nvSpPr>
@@ -17208,7 +20088,7 @@
       </p:sp>
       <p:sp>
         <p:nvSpPr>
-          <p:cNvPr id="157" name="Google Shape;157;p6"/>
+          <p:cNvPr id="203" name="Google Shape;203;p6"/>
           <p:cNvSpPr/>
           <p:nvPr/>
         </p:nvSpPr>
@@ -17265,7 +20145,7 @@
       </p:sp>
       <p:sp>
         <p:nvSpPr>
-          <p:cNvPr id="158" name="Google Shape;158;p6"/>
+          <p:cNvPr id="204" name="Google Shape;204;p6"/>
           <p:cNvSpPr/>
           <p:nvPr/>
         </p:nvSpPr>
@@ -17322,7 +20202,7 @@
       </p:sp>
       <p:sp>
         <p:nvSpPr>
-          <p:cNvPr id="159" name="Google Shape;159;p6"/>
+          <p:cNvPr id="205" name="Google Shape;205;p6"/>
           <p:cNvSpPr/>
           <p:nvPr/>
         </p:nvSpPr>
@@ -17385,7 +20265,7 @@
       </p:sp>
       <p:sp>
         <p:nvSpPr>
-          <p:cNvPr id="160" name="Google Shape;160;p6"/>
+          <p:cNvPr id="206" name="Google Shape;206;p6"/>
           <p:cNvSpPr/>
           <p:nvPr/>
         </p:nvSpPr>
@@ -17485,7 +20365,7 @@
       </p:sp>
       <p:sp>
         <p:nvSpPr>
-          <p:cNvPr id="161" name="Google Shape;161;p6"/>
+          <p:cNvPr id="207" name="Google Shape;207;p6"/>
           <p:cNvSpPr/>
           <p:nvPr/>
         </p:nvSpPr>
@@ -17542,7 +20422,7 @@
       </p:sp>
       <p:sp>
         <p:nvSpPr>
-          <p:cNvPr id="162" name="Google Shape;162;p6"/>
+          <p:cNvPr id="208" name="Google Shape;208;p6"/>
           <p:cNvSpPr/>
           <p:nvPr/>
         </p:nvSpPr>
@@ -17599,7 +20479,7 @@
       </p:sp>
       <p:sp>
         <p:nvSpPr>
-          <p:cNvPr id="163" name="Google Shape;163;p6"/>
+          <p:cNvPr id="209" name="Google Shape;209;p6"/>
           <p:cNvSpPr/>
           <p:nvPr/>
         </p:nvSpPr>
@@ -17656,7 +20536,7 @@
       </p:sp>
       <p:sp>
         <p:nvSpPr>
-          <p:cNvPr id="164" name="Google Shape;164;p6"/>
+          <p:cNvPr id="210" name="Google Shape;210;p6"/>
           <p:cNvSpPr/>
           <p:nvPr/>
         </p:nvSpPr>
@@ -17719,7 +20599,7 @@
       </p:sp>
       <p:sp>
         <p:nvSpPr>
-          <p:cNvPr id="165" name="Google Shape;165;p6"/>
+          <p:cNvPr id="211" name="Google Shape;211;p6"/>
           <p:cNvSpPr/>
           <p:nvPr/>
         </p:nvSpPr>
@@ -17782,7 +20662,7 @@
       </p:sp>
       <p:sp>
         <p:nvSpPr>
-          <p:cNvPr id="166" name="Google Shape;166;p6"/>
+          <p:cNvPr id="212" name="Google Shape;212;p6"/>
           <p:cNvSpPr/>
           <p:nvPr/>
         </p:nvSpPr>
@@ -17845,7 +20725,7 @@
       </p:sp>
       <p:sp>
         <p:nvSpPr>
-          <p:cNvPr id="167" name="Google Shape;167;p6"/>
+          <p:cNvPr id="213" name="Google Shape;213;p6"/>
           <p:cNvSpPr/>
           <p:nvPr/>
         </p:nvSpPr>
@@ -17902,7 +20782,7 @@
       </p:sp>
       <p:sp>
         <p:nvSpPr>
-          <p:cNvPr id="168" name="Google Shape;168;p6"/>
+          <p:cNvPr id="214" name="Google Shape;214;p6"/>
           <p:cNvSpPr/>
           <p:nvPr/>
         </p:nvSpPr>
@@ -17965,7 +20845,7 @@
       </p:sp>
       <p:sp>
         <p:nvSpPr>
-          <p:cNvPr id="169" name="Google Shape;169;p6"/>
+          <p:cNvPr id="215" name="Google Shape;215;p6"/>
           <p:cNvSpPr/>
           <p:nvPr/>
         </p:nvSpPr>
@@ -18028,7 +20908,7 @@
       </p:sp>
       <p:sp>
         <p:nvSpPr>
-          <p:cNvPr id="170" name="Google Shape;170;p6"/>
+          <p:cNvPr id="216" name="Google Shape;216;p6"/>
           <p:cNvSpPr/>
           <p:nvPr/>
         </p:nvSpPr>
@@ -18091,7 +20971,7 @@
       </p:sp>
       <p:sp>
         <p:nvSpPr>
-          <p:cNvPr id="171" name="Google Shape;171;p6"/>
+          <p:cNvPr id="217" name="Google Shape;217;p6"/>
           <p:cNvSpPr/>
           <p:nvPr/>
         </p:nvSpPr>
@@ -18148,7 +21028,7 @@
       </p:sp>
       <p:sp>
         <p:nvSpPr>
-          <p:cNvPr id="172" name="Google Shape;172;p6"/>
+          <p:cNvPr id="218" name="Google Shape;218;p6"/>
           <p:cNvSpPr/>
           <p:nvPr/>
         </p:nvSpPr>
@@ -18211,7 +21091,7 @@
       </p:sp>
       <p:sp>
         <p:nvSpPr>
-          <p:cNvPr id="173" name="Google Shape;173;p6"/>
+          <p:cNvPr id="219" name="Google Shape;219;p6"/>
           <p:cNvSpPr/>
           <p:nvPr/>
         </p:nvSpPr>
@@ -18274,7 +21154,7 @@
       </p:sp>
       <p:sp>
         <p:nvSpPr>
-          <p:cNvPr id="174" name="Google Shape;174;p6"/>
+          <p:cNvPr id="220" name="Google Shape;220;p6"/>
           <p:cNvSpPr/>
           <p:nvPr/>
         </p:nvSpPr>
@@ -18337,7 +21217,7 @@
       </p:sp>
       <p:sp>
         <p:nvSpPr>
-          <p:cNvPr id="175" name="Google Shape;175;p6"/>
+          <p:cNvPr id="221" name="Google Shape;221;p6"/>
           <p:cNvSpPr/>
           <p:nvPr/>
         </p:nvSpPr>
@@ -18394,7 +21274,7 @@
       </p:sp>
       <p:sp>
         <p:nvSpPr>
-          <p:cNvPr id="176" name="Google Shape;176;p6"/>
+          <p:cNvPr id="222" name="Google Shape;222;p6"/>
           <p:cNvSpPr/>
           <p:nvPr/>
         </p:nvSpPr>
@@ -18457,7 +21337,7 @@
       </p:sp>
       <p:sp>
         <p:nvSpPr>
-          <p:cNvPr id="177" name="Google Shape;177;p6"/>
+          <p:cNvPr id="223" name="Google Shape;223;p6"/>
           <p:cNvSpPr/>
           <p:nvPr/>
         </p:nvSpPr>
@@ -18520,7 +21400,7 @@
       </p:sp>
       <p:sp>
         <p:nvSpPr>
-          <p:cNvPr id="178" name="Google Shape;178;p6"/>
+          <p:cNvPr id="224" name="Google Shape;224;p6"/>
           <p:cNvSpPr/>
           <p:nvPr/>
         </p:nvSpPr>
@@ -18583,7 +21463,7 @@
       </p:sp>
       <p:sp>
         <p:nvSpPr>
-          <p:cNvPr id="179" name="Google Shape;179;p6"/>
+          <p:cNvPr id="225" name="Google Shape;225;p6"/>
           <p:cNvSpPr/>
           <p:nvPr/>
         </p:nvSpPr>
@@ -18640,7 +21520,7 @@
       </p:sp>
       <p:sp>
         <p:nvSpPr>
-          <p:cNvPr id="180" name="Google Shape;180;p6"/>
+          <p:cNvPr id="226" name="Google Shape;226;p6"/>
           <p:cNvSpPr/>
           <p:nvPr/>
         </p:nvSpPr>
@@ -18703,7 +21583,7 @@
       </p:sp>
       <p:sp>
         <p:nvSpPr>
-          <p:cNvPr id="181" name="Google Shape;181;p6"/>
+          <p:cNvPr id="227" name="Google Shape;227;p6"/>
           <p:cNvSpPr/>
           <p:nvPr/>
         </p:nvSpPr>
@@ -18766,7 +21646,7 @@
       </p:sp>
       <p:sp>
         <p:nvSpPr>
-          <p:cNvPr id="182" name="Google Shape;182;p6"/>
+          <p:cNvPr id="228" name="Google Shape;228;p6"/>
           <p:cNvSpPr/>
           <p:nvPr/>
         </p:nvSpPr>
@@ -18829,7 +21709,7 @@
       </p:sp>
       <p:sp>
         <p:nvSpPr>
-          <p:cNvPr id="183" name="Google Shape;183;p6"/>
+          <p:cNvPr id="229" name="Google Shape;229;p6"/>
           <p:cNvSpPr/>
           <p:nvPr/>
         </p:nvSpPr>
@@ -18886,7 +21766,7 @@
       </p:sp>
       <p:sp>
         <p:nvSpPr>
-          <p:cNvPr id="184" name="Google Shape;184;p6"/>
+          <p:cNvPr id="230" name="Google Shape;230;p6"/>
           <p:cNvSpPr/>
           <p:nvPr/>
         </p:nvSpPr>
@@ -18949,7 +21829,7 @@
       </p:sp>
       <p:sp>
         <p:nvSpPr>
-          <p:cNvPr id="185" name="Google Shape;185;p6"/>
+          <p:cNvPr id="231" name="Google Shape;231;p6"/>
           <p:cNvSpPr/>
           <p:nvPr/>
         </p:nvSpPr>
@@ -19012,7 +21892,7 @@
       </p:sp>
       <p:sp>
         <p:nvSpPr>
-          <p:cNvPr id="186" name="Google Shape;186;p6"/>
+          <p:cNvPr id="232" name="Google Shape;232;p6"/>
           <p:cNvSpPr/>
           <p:nvPr/>
         </p:nvSpPr>
@@ -19075,7 +21955,7 @@
       </p:sp>
       <p:sp>
         <p:nvSpPr>
-          <p:cNvPr id="187" name="Google Shape;187;p6"/>
+          <p:cNvPr id="233" name="Google Shape;233;p6"/>
           <p:cNvSpPr/>
           <p:nvPr/>
         </p:nvSpPr>
@@ -19132,7 +22012,7 @@
       </p:sp>
       <p:sp>
         <p:nvSpPr>
-          <p:cNvPr id="188" name="Google Shape;188;p6"/>
+          <p:cNvPr id="234" name="Google Shape;234;p6"/>
           <p:cNvSpPr/>
           <p:nvPr/>
         </p:nvSpPr>
@@ -19213,7 +22093,7 @@
     </p:bg>
     <p:spTree>
       <p:nvGrpSpPr>
-        <p:cNvPr id="193" name="Shape 193"/>
+        <p:cNvPr id="239" name="Shape 239"/>
         <p:cNvGrpSpPr/>
         <p:nvPr/>
       </p:nvGrpSpPr>
@@ -19227,7 +22107,7 @@
       </p:grpSpPr>
       <p:sp>
         <p:nvSpPr>
-          <p:cNvPr id="194" name="Google Shape;194;p7"/>
+          <p:cNvPr id="240" name="Google Shape;240;p7"/>
           <p:cNvSpPr/>
           <p:nvPr/>
         </p:nvSpPr>
@@ -19284,7 +22164,7 @@
       </p:sp>
       <p:sp>
         <p:nvSpPr>
-          <p:cNvPr id="195" name="Google Shape;195;p7"/>
+          <p:cNvPr id="241" name="Google Shape;241;p7"/>
           <p:cNvSpPr/>
           <p:nvPr/>
         </p:nvSpPr>
@@ -19347,7 +22227,7 @@
       </p:sp>
       <p:grpSp>
         <p:nvGrpSpPr>
-          <p:cNvPr id="196" name="Google Shape;196;p7"/>
+          <p:cNvPr id="242" name="Google Shape;242;p7"/>
           <p:cNvGrpSpPr/>
           <p:nvPr/>
         </p:nvGrpSpPr>
@@ -19361,7 +22241,7 @@
         </p:grpSpPr>
         <p:graphicFrame>
           <p:nvGraphicFramePr>
-            <p:cNvPr id="197" name="Google Shape;197;p7"/>
+            <p:cNvPr id="243" name="Google Shape;243;p7"/>
             <p:cNvGraphicFramePr/>
             <p:nvPr/>
           </p:nvGraphicFramePr>
@@ -19377,7 +22257,7 @@
         </p:graphicFrame>
         <p:sp>
           <p:nvSpPr>
-            <p:cNvPr id="198" name="Google Shape;198;p7"/>
+            <p:cNvPr id="244" name="Google Shape;244;p7"/>
             <p:cNvSpPr/>
             <p:nvPr/>
           </p:nvSpPr>
@@ -19477,7 +22357,7 @@
         </p:sp>
         <p:sp>
           <p:nvSpPr>
-            <p:cNvPr id="199" name="Google Shape;199;p7"/>
+            <p:cNvPr id="245" name="Google Shape;245;p7"/>
             <p:cNvSpPr/>
             <p:nvPr/>
           </p:nvSpPr>
@@ -19577,7 +22457,7 @@
         </p:sp>
         <p:sp>
           <p:nvSpPr>
-            <p:cNvPr id="200" name="Google Shape;200;p7"/>
+            <p:cNvPr id="246" name="Google Shape;246;p7"/>
             <p:cNvSpPr/>
             <p:nvPr/>
           </p:nvSpPr>
@@ -19678,7 +22558,7 @@
       </p:grpSp>
       <p:sp>
         <p:nvSpPr>
-          <p:cNvPr id="201" name="Google Shape;201;p7"/>
+          <p:cNvPr id="247" name="Google Shape;247;p7"/>
           <p:cNvSpPr/>
           <p:nvPr/>
         </p:nvSpPr>
@@ -19741,7 +22621,7 @@
       </p:sp>
       <p:graphicFrame>
         <p:nvGraphicFramePr>
-          <p:cNvPr id="202" name="Google Shape;202;p7"/>
+          <p:cNvPr id="248" name="Google Shape;248;p7"/>
           <p:cNvGraphicFramePr/>
           <p:nvPr/>
         </p:nvGraphicFramePr>
@@ -19754,7 +22634,7 @@
             <a:tbl>
               <a:tblPr>
                 <a:noFill/>
-                <a:tableStyleId>{6705B823-8925-4A5E-9D9E-75A97187B68C}</a:tableStyleId>
+                <a:tableStyleId>{1D65D8CD-92B0-4D7A-B6FC-24D738DE7A7E}</a:tableStyleId>
               </a:tblPr>
               <a:tblGrid>
                 <a:gridCol w="1280150"/>
@@ -21508,7 +24388,7 @@
       </p:graphicFrame>
       <p:sp>
         <p:nvSpPr>
-          <p:cNvPr id="203" name="Google Shape;203;p7"/>
+          <p:cNvPr id="249" name="Google Shape;249;p7"/>
           <p:cNvSpPr/>
           <p:nvPr/>
         </p:nvSpPr>
@@ -21571,7 +24451,7 @@
       </p:sp>
       <p:sp>
         <p:nvSpPr>
-          <p:cNvPr id="204" name="Google Shape;204;p7"/>
+          <p:cNvPr id="250" name="Google Shape;250;p7"/>
           <p:cNvSpPr/>
           <p:nvPr/>
         </p:nvSpPr>
@@ -21628,7 +24508,7 @@
       </p:sp>
       <p:sp>
         <p:nvSpPr>
-          <p:cNvPr id="205" name="Google Shape;205;p7"/>
+          <p:cNvPr id="251" name="Google Shape;251;p7"/>
           <p:cNvSpPr/>
           <p:nvPr/>
         </p:nvSpPr>
@@ -21691,7 +24571,7 @@
       </p:sp>
       <p:sp>
         <p:nvSpPr>
-          <p:cNvPr id="206" name="Google Shape;206;p7"/>
+          <p:cNvPr id="252" name="Google Shape;252;p7"/>
           <p:cNvSpPr/>
           <p:nvPr/>
         </p:nvSpPr>
@@ -21754,7 +24634,7 @@
       </p:sp>
       <p:sp>
         <p:nvSpPr>
-          <p:cNvPr id="207" name="Google Shape;207;p7"/>
+          <p:cNvPr id="253" name="Google Shape;253;p7"/>
           <p:cNvSpPr/>
           <p:nvPr/>
         </p:nvSpPr>
@@ -21811,7 +24691,7 @@
       </p:sp>
       <p:sp>
         <p:nvSpPr>
-          <p:cNvPr id="208" name="Google Shape;208;p7"/>
+          <p:cNvPr id="254" name="Google Shape;254;p7"/>
           <p:cNvSpPr/>
           <p:nvPr/>
         </p:nvSpPr>
@@ -21874,7 +24754,7 @@
       </p:sp>
       <p:sp>
         <p:nvSpPr>
-          <p:cNvPr id="209" name="Google Shape;209;p7"/>
+          <p:cNvPr id="255" name="Google Shape;255;p7"/>
           <p:cNvSpPr/>
           <p:nvPr/>
         </p:nvSpPr>
@@ -21937,7 +24817,7 @@
       </p:sp>
       <p:sp>
         <p:nvSpPr>
-          <p:cNvPr id="210" name="Google Shape;210;p7"/>
+          <p:cNvPr id="256" name="Google Shape;256;p7"/>
           <p:cNvSpPr/>
           <p:nvPr/>
         </p:nvSpPr>
@@ -21994,7 +24874,7 @@
       </p:sp>
       <p:sp>
         <p:nvSpPr>
-          <p:cNvPr id="211" name="Google Shape;211;p7"/>
+          <p:cNvPr id="257" name="Google Shape;257;p7"/>
           <p:cNvSpPr/>
           <p:nvPr/>
         </p:nvSpPr>
@@ -22057,7 +24937,7 @@
       </p:sp>
       <p:sp>
         <p:nvSpPr>
-          <p:cNvPr id="212" name="Google Shape;212;p7"/>
+          <p:cNvPr id="258" name="Google Shape;258;p7"/>
           <p:cNvSpPr/>
           <p:nvPr/>
         </p:nvSpPr>
@@ -22138,7 +25018,7 @@
     </p:bg>
     <p:spTree>
       <p:nvGrpSpPr>
-        <p:cNvPr id="217" name="Shape 217"/>
+        <p:cNvPr id="263" name="Shape 263"/>
         <p:cNvGrpSpPr/>
         <p:nvPr/>
       </p:nvGrpSpPr>
@@ -22152,7 +25032,7 @@
       </p:grpSpPr>
       <p:sp>
         <p:nvSpPr>
-          <p:cNvPr id="218" name="Google Shape;218;p8"/>
+          <p:cNvPr id="264" name="Google Shape;264;p8"/>
           <p:cNvSpPr/>
           <p:nvPr/>
         </p:nvSpPr>
@@ -22209,7 +25089,7 @@
       </p:sp>
       <p:sp>
         <p:nvSpPr>
-          <p:cNvPr id="219" name="Google Shape;219;p8"/>
+          <p:cNvPr id="265" name="Google Shape;265;p8"/>
           <p:cNvSpPr/>
           <p:nvPr/>
         </p:nvSpPr>
@@ -22272,7 +25152,7 @@
       </p:sp>
       <p:sp>
         <p:nvSpPr>
-          <p:cNvPr id="220" name="Google Shape;220;p8"/>
+          <p:cNvPr id="266" name="Google Shape;266;p8"/>
           <p:cNvSpPr/>
           <p:nvPr/>
         </p:nvSpPr>
@@ -22336,7 +25216,7 @@
       </p:sp>
       <p:sp>
         <p:nvSpPr>
-          <p:cNvPr id="221" name="Google Shape;221;p8"/>
+          <p:cNvPr id="267" name="Google Shape;267;p8"/>
           <p:cNvSpPr/>
           <p:nvPr/>
         </p:nvSpPr>
@@ -22393,7 +25273,7 @@
       </p:sp>
       <p:sp>
         <p:nvSpPr>
-          <p:cNvPr id="222" name="Google Shape;222;p8"/>
+          <p:cNvPr id="268" name="Google Shape;268;p8"/>
           <p:cNvSpPr/>
           <p:nvPr/>
         </p:nvSpPr>
@@ -22456,7 +25336,7 @@
       </p:sp>
       <p:sp>
         <p:nvSpPr>
-          <p:cNvPr id="223" name="Google Shape;223;p8"/>
+          <p:cNvPr id="269" name="Google Shape;269;p8"/>
           <p:cNvSpPr/>
           <p:nvPr/>
         </p:nvSpPr>
@@ -22513,7 +25393,7 @@
       </p:sp>
       <p:sp>
         <p:nvSpPr>
-          <p:cNvPr id="224" name="Google Shape;224;p8"/>
+          <p:cNvPr id="270" name="Google Shape;270;p8"/>
           <p:cNvSpPr/>
           <p:nvPr/>
         </p:nvSpPr>
@@ -22678,7 +25558,7 @@
       </p:sp>
       <p:sp>
         <p:nvSpPr>
-          <p:cNvPr id="225" name="Google Shape;225;p8"/>
+          <p:cNvPr id="271" name="Google Shape;271;p8"/>
           <p:cNvSpPr/>
           <p:nvPr/>
         </p:nvSpPr>
@@ -22753,7 +25633,7 @@
       </p:sp>
       <p:sp>
         <p:nvSpPr>
-          <p:cNvPr id="226" name="Google Shape;226;p8"/>
+          <p:cNvPr id="272" name="Google Shape;272;p8"/>
           <p:cNvSpPr/>
           <p:nvPr/>
         </p:nvSpPr>
@@ -22828,7 +25708,7 @@
       </p:sp>
       <p:sp>
         <p:nvSpPr>
-          <p:cNvPr id="227" name="Google Shape;227;p8"/>
+          <p:cNvPr id="273" name="Google Shape;273;p8"/>
           <p:cNvSpPr/>
           <p:nvPr/>
         </p:nvSpPr>
@@ -22903,7 +25783,7 @@
       </p:sp>
       <p:sp>
         <p:nvSpPr>
-          <p:cNvPr id="228" name="Google Shape;228;p8"/>
+          <p:cNvPr id="274" name="Google Shape;274;p8"/>
           <p:cNvSpPr/>
           <p:nvPr/>
         </p:nvSpPr>
@@ -22978,7 +25858,7 @@
       </p:sp>
       <p:sp>
         <p:nvSpPr>
-          <p:cNvPr id="229" name="Google Shape;229;p8"/>
+          <p:cNvPr id="275" name="Google Shape;275;p8"/>
           <p:cNvSpPr/>
           <p:nvPr/>
         </p:nvSpPr>
@@ -23053,7 +25933,7 @@
       </p:sp>
       <p:sp>
         <p:nvSpPr>
-          <p:cNvPr id="230" name="Google Shape;230;p8"/>
+          <p:cNvPr id="276" name="Google Shape;276;p8"/>
           <p:cNvSpPr/>
           <p:nvPr/>
         </p:nvSpPr>
@@ -23117,7 +25997,7 @@
       </p:sp>
       <p:sp>
         <p:nvSpPr>
-          <p:cNvPr id="231" name="Google Shape;231;p8"/>
+          <p:cNvPr id="277" name="Google Shape;277;p8"/>
           <p:cNvSpPr/>
           <p:nvPr/>
         </p:nvSpPr>
@@ -23174,7 +26054,7 @@
       </p:sp>
       <p:pic>
         <p:nvPicPr>
-          <p:cNvPr descr="preencoded.png" id="232" name="Google Shape;232;p8"/>
+          <p:cNvPr descr="preencoded.png" id="278" name="Google Shape;278;p8"/>
           <p:cNvPicPr preferRelativeResize="0"/>
           <p:nvPr/>
         </p:nvPicPr>
@@ -23201,7 +26081,7 @@
       </p:pic>
       <p:sp>
         <p:nvSpPr>
-          <p:cNvPr id="233" name="Google Shape;233;p8"/>
+          <p:cNvPr id="279" name="Google Shape;279;p8"/>
           <p:cNvSpPr/>
           <p:nvPr/>
         </p:nvSpPr>
@@ -23264,7 +26144,7 @@
       </p:sp>
       <p:sp>
         <p:nvSpPr>
-          <p:cNvPr id="234" name="Google Shape;234;p8"/>
+          <p:cNvPr id="280" name="Google Shape;280;p8"/>
           <p:cNvSpPr/>
           <p:nvPr/>
         </p:nvSpPr>
@@ -23421,7 +26301,7 @@
       </p:sp>
       <p:sp>
         <p:nvSpPr>
-          <p:cNvPr id="235" name="Google Shape;235;p8"/>
+          <p:cNvPr id="281" name="Google Shape;281;p8"/>
           <p:cNvSpPr/>
           <p:nvPr/>
         </p:nvSpPr>
@@ -23485,7 +26365,7 @@
       </p:sp>
       <p:sp>
         <p:nvSpPr>
-          <p:cNvPr id="236" name="Google Shape;236;p8"/>
+          <p:cNvPr id="282" name="Google Shape;282;p8"/>
           <p:cNvSpPr/>
           <p:nvPr/>
         </p:nvSpPr>
@@ -23542,7 +26422,7 @@
       </p:sp>
       <p:pic>
         <p:nvPicPr>
-          <p:cNvPr descr="preencoded.png" id="237" name="Google Shape;237;p8"/>
+          <p:cNvPr descr="preencoded.png" id="283" name="Google Shape;283;p8"/>
           <p:cNvPicPr preferRelativeResize="0"/>
           <p:nvPr/>
         </p:nvPicPr>
@@ -23569,7 +26449,7 @@
       </p:pic>
       <p:sp>
         <p:nvSpPr>
-          <p:cNvPr id="238" name="Google Shape;238;p8"/>
+          <p:cNvPr id="284" name="Google Shape;284;p8"/>
           <p:cNvSpPr/>
           <p:nvPr/>
         </p:nvSpPr>
@@ -23632,7 +26512,7 @@
       </p:sp>
       <p:sp>
         <p:nvSpPr>
-          <p:cNvPr id="239" name="Google Shape;239;p8"/>
+          <p:cNvPr id="285" name="Google Shape;285;p8"/>
           <p:cNvSpPr/>
           <p:nvPr/>
         </p:nvSpPr>
@@ -23695,7 +26575,7 @@
       </p:sp>
       <p:sp>
         <p:nvSpPr>
-          <p:cNvPr id="240" name="Google Shape;240;p8"/>
+          <p:cNvPr id="286" name="Google Shape;286;p8"/>
           <p:cNvSpPr/>
           <p:nvPr/>
         </p:nvSpPr>
@@ -23758,7 +26638,7 @@
       </p:sp>
       <p:sp>
         <p:nvSpPr>
-          <p:cNvPr id="241" name="Google Shape;241;p8"/>
+          <p:cNvPr id="287" name="Google Shape;287;p8"/>
           <p:cNvSpPr/>
           <p:nvPr/>
         </p:nvSpPr>
@@ -23821,7 +26701,7 @@
       </p:sp>
       <p:sp>
         <p:nvSpPr>
-          <p:cNvPr id="242" name="Google Shape;242;p8"/>
+          <p:cNvPr id="288" name="Google Shape;288;p8"/>
           <p:cNvSpPr/>
           <p:nvPr/>
         </p:nvSpPr>
@@ -23884,7 +26764,7 @@
       </p:sp>
       <p:sp>
         <p:nvSpPr>
-          <p:cNvPr id="243" name="Google Shape;243;p8"/>
+          <p:cNvPr id="289" name="Google Shape;289;p8"/>
           <p:cNvSpPr/>
           <p:nvPr/>
         </p:nvSpPr>
@@ -23947,7 +26827,7 @@
       </p:sp>
       <p:sp>
         <p:nvSpPr>
-          <p:cNvPr id="244" name="Google Shape;244;p8"/>
+          <p:cNvPr id="290" name="Google Shape;290;p8"/>
           <p:cNvSpPr/>
           <p:nvPr/>
         </p:nvSpPr>
@@ -24028,7 +26908,7 @@
     </p:bg>
     <p:spTree>
       <p:nvGrpSpPr>
-        <p:cNvPr id="249" name="Shape 249"/>
+        <p:cNvPr id="295" name="Shape 295"/>
         <p:cNvGrpSpPr/>
         <p:nvPr/>
       </p:nvGrpSpPr>
@@ -24042,7 +26922,7 @@
       </p:grpSpPr>
       <p:sp>
         <p:nvSpPr>
-          <p:cNvPr id="250" name="Google Shape;250;p9"/>
+          <p:cNvPr id="296" name="Google Shape;296;p9"/>
           <p:cNvSpPr/>
           <p:nvPr/>
         </p:nvSpPr>
@@ -24099,7 +26979,7 @@
       </p:sp>
       <p:sp>
         <p:nvSpPr>
-          <p:cNvPr id="251" name="Google Shape;251;p9"/>
+          <p:cNvPr id="297" name="Google Shape;297;p9"/>
           <p:cNvSpPr/>
           <p:nvPr/>
         </p:nvSpPr>
@@ -24162,7 +27042,7 @@
       </p:sp>
       <p:sp>
         <p:nvSpPr>
-          <p:cNvPr id="252" name="Google Shape;252;p9"/>
+          <p:cNvPr id="298" name="Google Shape;298;p9"/>
           <p:cNvSpPr/>
           <p:nvPr/>
         </p:nvSpPr>
@@ -24219,7 +27099,7 @@
       </p:sp>
       <p:sp>
         <p:nvSpPr>
-          <p:cNvPr id="253" name="Google Shape;253;p9"/>
+          <p:cNvPr id="299" name="Google Shape;299;p9"/>
           <p:cNvSpPr/>
           <p:nvPr/>
         </p:nvSpPr>
@@ -24276,7 +27156,7 @@
       </p:sp>
       <p:sp>
         <p:nvSpPr>
-          <p:cNvPr id="254" name="Google Shape;254;p9"/>
+          <p:cNvPr id="300" name="Google Shape;300;p9"/>
           <p:cNvSpPr/>
           <p:nvPr/>
         </p:nvSpPr>
@@ -24339,7 +27219,7 @@
       </p:sp>
       <p:sp>
         <p:nvSpPr>
-          <p:cNvPr id="255" name="Google Shape;255;p9"/>
+          <p:cNvPr id="301" name="Google Shape;301;p9"/>
           <p:cNvSpPr/>
           <p:nvPr/>
         </p:nvSpPr>
@@ -24402,7 +27282,7 @@
       </p:sp>
       <p:sp>
         <p:nvSpPr>
-          <p:cNvPr id="256" name="Google Shape;256;p9"/>
+          <p:cNvPr id="302" name="Google Shape;302;p9"/>
           <p:cNvSpPr/>
           <p:nvPr/>
         </p:nvSpPr>
@@ -24459,7 +27339,7 @@
       </p:sp>
       <p:sp>
         <p:nvSpPr>
-          <p:cNvPr id="257" name="Google Shape;257;p9"/>
+          <p:cNvPr id="303" name="Google Shape;303;p9"/>
           <p:cNvSpPr/>
           <p:nvPr/>
         </p:nvSpPr>
@@ -24516,7 +27396,7 @@
       </p:sp>
       <p:sp>
         <p:nvSpPr>
-          <p:cNvPr id="258" name="Google Shape;258;p9"/>
+          <p:cNvPr id="304" name="Google Shape;304;p9"/>
           <p:cNvSpPr/>
           <p:nvPr/>
         </p:nvSpPr>
@@ -24579,7 +27459,7 @@
       </p:sp>
       <p:sp>
         <p:nvSpPr>
-          <p:cNvPr id="259" name="Google Shape;259;p9"/>
+          <p:cNvPr id="305" name="Google Shape;305;p9"/>
           <p:cNvSpPr/>
           <p:nvPr/>
         </p:nvSpPr>
@@ -24642,7 +27522,7 @@
       </p:sp>
       <p:sp>
         <p:nvSpPr>
-          <p:cNvPr id="260" name="Google Shape;260;p9"/>
+          <p:cNvPr id="306" name="Google Shape;306;p9"/>
           <p:cNvSpPr/>
           <p:nvPr/>
         </p:nvSpPr>
@@ -24699,7 +27579,7 @@
       </p:sp>
       <p:sp>
         <p:nvSpPr>
-          <p:cNvPr id="261" name="Google Shape;261;p9"/>
+          <p:cNvPr id="307" name="Google Shape;307;p9"/>
           <p:cNvSpPr/>
           <p:nvPr/>
         </p:nvSpPr>
@@ -24756,7 +27636,7 @@
       </p:sp>
       <p:sp>
         <p:nvSpPr>
-          <p:cNvPr id="262" name="Google Shape;262;p9"/>
+          <p:cNvPr id="308" name="Google Shape;308;p9"/>
           <p:cNvSpPr/>
           <p:nvPr/>
         </p:nvSpPr>
@@ -24819,7 +27699,7 @@
       </p:sp>
       <p:sp>
         <p:nvSpPr>
-          <p:cNvPr id="263" name="Google Shape;263;p9"/>
+          <p:cNvPr id="309" name="Google Shape;309;p9"/>
           <p:cNvSpPr/>
           <p:nvPr/>
         </p:nvSpPr>
@@ -24882,7 +27762,7 @@
       </p:sp>
       <p:sp>
         <p:nvSpPr>
-          <p:cNvPr id="264" name="Google Shape;264;p9"/>
+          <p:cNvPr id="310" name="Google Shape;310;p9"/>
           <p:cNvSpPr/>
           <p:nvPr/>
         </p:nvSpPr>
@@ -24939,7 +27819,7 @@
       </p:sp>
       <p:sp>
         <p:nvSpPr>
-          <p:cNvPr id="265" name="Google Shape;265;p9"/>
+          <p:cNvPr id="311" name="Google Shape;311;p9"/>
           <p:cNvSpPr/>
           <p:nvPr/>
         </p:nvSpPr>
@@ -24996,7 +27876,7 @@
       </p:sp>
       <p:sp>
         <p:nvSpPr>
-          <p:cNvPr id="266" name="Google Shape;266;p9"/>
+          <p:cNvPr id="312" name="Google Shape;312;p9"/>
           <p:cNvSpPr/>
           <p:nvPr/>
         </p:nvSpPr>
@@ -25059,7 +27939,7 @@
       </p:sp>
       <p:sp>
         <p:nvSpPr>
-          <p:cNvPr id="267" name="Google Shape;267;p9"/>
+          <p:cNvPr id="313" name="Google Shape;313;p9"/>
           <p:cNvSpPr/>
           <p:nvPr/>
         </p:nvSpPr>
@@ -25122,7 +28002,7 @@
       </p:sp>
       <p:grpSp>
         <p:nvGrpSpPr>
-          <p:cNvPr id="268" name="Google Shape;268;p9"/>
+          <p:cNvPr id="314" name="Google Shape;314;p9"/>
           <p:cNvGrpSpPr/>
           <p:nvPr/>
         </p:nvGrpSpPr>
@@ -25136,7 +28016,7 @@
         </p:grpSpPr>
         <p:pic>
           <p:nvPicPr>
-            <p:cNvPr id="269" name="Google Shape;269;p9"/>
+            <p:cNvPr id="315" name="Google Shape;315;p9"/>
             <p:cNvPicPr preferRelativeResize="0"/>
             <p:nvPr/>
           </p:nvPicPr>
@@ -25164,7 +28044,7 @@
         </p:pic>
         <p:pic>
           <p:nvPicPr>
-            <p:cNvPr id="270" name="Google Shape;270;p9"/>
+            <p:cNvPr id="316" name="Google Shape;316;p9"/>
             <p:cNvPicPr preferRelativeResize="0"/>
             <p:nvPr/>
           </p:nvPicPr>
@@ -25199,6 +28079,285 @@
 </file>
 
 <file path=ppt/theme/theme1.xml><?xml version="1.0" encoding="utf-8"?>
+<a:theme xmlns:a="http://schemas.openxmlformats.org/drawingml/2006/main" xmlns:r="http://schemas.openxmlformats.org/officeDocument/2006/relationships" name="Office Theme">
+  <a:themeElements>
+    <a:clrScheme name="Office">
+      <a:dk1>
+        <a:srgbClr val="000000"/>
+      </a:dk1>
+      <a:lt1>
+        <a:srgbClr val="FFFFFF"/>
+      </a:lt1>
+      <a:dk2>
+        <a:srgbClr val="44546A"/>
+      </a:dk2>
+      <a:lt2>
+        <a:srgbClr val="E7E6E6"/>
+      </a:lt2>
+      <a:accent1>
+        <a:srgbClr val="4472C4"/>
+      </a:accent1>
+      <a:accent2>
+        <a:srgbClr val="ED7D31"/>
+      </a:accent2>
+      <a:accent3>
+        <a:srgbClr val="A5A5A5"/>
+      </a:accent3>
+      <a:accent4>
+        <a:srgbClr val="FFC000"/>
+      </a:accent4>
+      <a:accent5>
+        <a:srgbClr val="5B9BD5"/>
+      </a:accent5>
+      <a:accent6>
+        <a:srgbClr val="70AD47"/>
+      </a:accent6>
+      <a:hlink>
+        <a:srgbClr val="0563C1"/>
+      </a:hlink>
+      <a:folHlink>
+        <a:srgbClr val="954F72"/>
+      </a:folHlink>
+    </a:clrScheme>
+    <a:fontScheme name="Office">
+      <a:majorFont>
+        <a:latin typeface="Arial"/>
+        <a:ea typeface=""/>
+        <a:cs typeface=""/>
+        <a:font script="Jpan" typeface="ＭＳ Ｐゴシック"/>
+        <a:font script="Hang" typeface="맑은 고딕"/>
+        <a:font script="Hans" typeface="宋体"/>
+        <a:font script="Hant" typeface="新細明體"/>
+        <a:font script="Arab" typeface="Times New Roman"/>
+        <a:font script="Hebr" typeface="Times New Roman"/>
+        <a:font script="Thai" typeface="Angsana New"/>
+        <a:font script="Ethi" typeface="Nyala"/>
+        <a:font script="Beng" typeface="Vrinda"/>
+        <a:font script="Gujr" typeface="Shruti"/>
+        <a:font script="Khmr" typeface="MoolBoran"/>
+        <a:font script="Knda" typeface="Tunga"/>
+        <a:font script="Guru" typeface="Raavi"/>
+        <a:font script="Cans" typeface="Euphemia"/>
+        <a:font script="Cher" typeface="Plantagenet Cherokee"/>
+        <a:font script="Yiii" typeface="Microsoft Yi Baiti"/>
+        <a:font script="Tibt" typeface="Microsoft Himalaya"/>
+        <a:font script="Thaa" typeface="MV Boli"/>
+        <a:font script="Deva" typeface="Mangal"/>
+        <a:font script="Telu" typeface="Gautami"/>
+        <a:font script="Taml" typeface="Latha"/>
+        <a:font script="Syrc" typeface="Estrangelo Edessa"/>
+        <a:font script="Orya" typeface="Kalinga"/>
+        <a:font script="Mlym" typeface="Kartika"/>
+        <a:font script="Laoo" typeface="DokChampa"/>
+        <a:font script="Sinh" typeface="Iskoola Pota"/>
+        <a:font script="Mong" typeface="Mongolian Baiti"/>
+        <a:font script="Viet" typeface="Times New Roman"/>
+        <a:font script="Uigh" typeface="Microsoft Uighur"/>
+        <a:font script="Geor" typeface="Sylfaen"/>
+      </a:majorFont>
+      <a:minorFont>
+        <a:latin typeface="Arial"/>
+        <a:ea typeface=""/>
+        <a:cs typeface=""/>
+        <a:font script="Jpan" typeface="ＭＳ Ｐゴシック"/>
+        <a:font script="Hang" typeface="맑은 고딕"/>
+        <a:font script="Hans" typeface="宋体"/>
+        <a:font script="Hant" typeface="新細明體"/>
+        <a:font script="Arab" typeface="Arial"/>
+        <a:font script="Hebr" typeface="Arial"/>
+        <a:font script="Thai" typeface="Cordia New"/>
+        <a:font script="Ethi" typeface="Nyala"/>
+        <a:font script="Beng" typeface="Vrinda"/>
+        <a:font script="Gujr" typeface="Shruti"/>
+        <a:font script="Khmr" typeface="DaunPenh"/>
+        <a:font script="Knda" typeface="Tunga"/>
+        <a:font script="Guru" typeface="Raavi"/>
+        <a:font script="Cans" typeface="Euphemia"/>
+        <a:font script="Cher" typeface="Plantagenet Cherokee"/>
+        <a:font script="Yiii" typeface="Microsoft Yi Baiti"/>
+        <a:font script="Tibt" typeface="Microsoft Himalaya"/>
+        <a:font script="Thaa" typeface="MV Boli"/>
+        <a:font script="Deva" typeface="Mangal"/>
+        <a:font script="Telu" typeface="Gautami"/>
+        <a:font script="Taml" typeface="Latha"/>
+        <a:font script="Syrc" typeface="Estrangelo Edessa"/>
+        <a:font script="Orya" typeface="Kalinga"/>
+        <a:font script="Mlym" typeface="Kartika"/>
+        <a:font script="Laoo" typeface="DokChampa"/>
+        <a:font script="Sinh" typeface="Iskoola Pota"/>
+        <a:font script="Mong" typeface="Mongolian Baiti"/>
+        <a:font script="Viet" typeface="Arial"/>
+        <a:font script="Uigh" typeface="Microsoft Uighur"/>
+        <a:font script="Geor" typeface="Sylfaen"/>
+      </a:minorFont>
+    </a:fontScheme>
+    <a:fmtScheme name="Office">
+      <a:fillStyleLst>
+        <a:solidFill>
+          <a:schemeClr val="phClr"/>
+        </a:solidFill>
+        <a:gradFill rotWithShape="1">
+          <a:gsLst>
+            <a:gs pos="0">
+              <a:schemeClr val="phClr">
+                <a:tint val="50000"/>
+                <a:satMod val="300000"/>
+              </a:schemeClr>
+            </a:gs>
+            <a:gs pos="35000">
+              <a:schemeClr val="phClr">
+                <a:tint val="37000"/>
+                <a:satMod val="300000"/>
+              </a:schemeClr>
+            </a:gs>
+            <a:gs pos="100000">
+              <a:schemeClr val="phClr">
+                <a:tint val="15000"/>
+                <a:satMod val="350000"/>
+              </a:schemeClr>
+            </a:gs>
+          </a:gsLst>
+          <a:lin ang="16200000" scaled="1"/>
+        </a:gradFill>
+        <a:gradFill rotWithShape="1">
+          <a:gsLst>
+            <a:gs pos="0">
+              <a:schemeClr val="phClr">
+                <a:tint val="100000"/>
+                <a:shade val="100000"/>
+                <a:satMod val="130000"/>
+              </a:schemeClr>
+            </a:gs>
+            <a:gs pos="100000">
+              <a:schemeClr val="phClr">
+                <a:tint val="50000"/>
+                <a:shade val="100000"/>
+                <a:satMod val="350000"/>
+              </a:schemeClr>
+            </a:gs>
+          </a:gsLst>
+          <a:lin ang="16200000" scaled="0"/>
+        </a:gradFill>
+      </a:fillStyleLst>
+      <a:lnStyleLst>
+        <a:ln w="9525" cap="flat" cmpd="sng" algn="ctr">
+          <a:solidFill>
+            <a:schemeClr val="phClr">
+              <a:shade val="95000"/>
+              <a:satMod val="105000"/>
+            </a:schemeClr>
+          </a:solidFill>
+          <a:prstDash val="solid"/>
+        </a:ln>
+        <a:ln w="25400" cap="flat" cmpd="sng" algn="ctr">
+          <a:solidFill>
+            <a:schemeClr val="phClr"/>
+          </a:solidFill>
+          <a:prstDash val="solid"/>
+        </a:ln>
+        <a:ln w="38100" cap="flat" cmpd="sng" algn="ctr">
+          <a:solidFill>
+            <a:schemeClr val="phClr"/>
+          </a:solidFill>
+          <a:prstDash val="solid"/>
+        </a:ln>
+      </a:lnStyleLst>
+      <a:effectStyleLst>
+        <a:effectStyle>
+          <a:effectLst>
+            <a:outerShdw blurRad="40000" dist="20000" dir="5400000" rotWithShape="0">
+              <a:srgbClr val="000000">
+                <a:alpha val="38000"/>
+              </a:srgbClr>
+            </a:outerShdw>
+          </a:effectLst>
+        </a:effectStyle>
+        <a:effectStyle>
+          <a:effectLst>
+            <a:outerShdw blurRad="40000" dist="23000" dir="5400000" rotWithShape="0">
+              <a:srgbClr val="000000">
+                <a:alpha val="35000"/>
+              </a:srgbClr>
+            </a:outerShdw>
+          </a:effectLst>
+        </a:effectStyle>
+        <a:effectStyle>
+          <a:effectLst>
+            <a:outerShdw blurRad="40000" dist="23000" dir="5400000" rotWithShape="0">
+              <a:srgbClr val="000000">
+                <a:alpha val="35000"/>
+              </a:srgbClr>
+            </a:outerShdw>
+          </a:effectLst>
+          <a:scene3d>
+            <a:camera prst="orthographicFront">
+              <a:rot lat="0" lon="0" rev="0"/>
+            </a:camera>
+            <a:lightRig rig="threePt" dir="t">
+              <a:rot lat="0" lon="0" rev="1200000"/>
+            </a:lightRig>
+          </a:scene3d>
+          <a:sp3d>
+            <a:bevelT w="63500" h="25400"/>
+          </a:sp3d>
+        </a:effectStyle>
+      </a:effectStyleLst>
+      <a:bgFillStyleLst>
+        <a:solidFill>
+          <a:schemeClr val="phClr"/>
+        </a:solidFill>
+        <a:gradFill rotWithShape="1">
+          <a:gsLst>
+            <a:gs pos="0">
+              <a:schemeClr val="phClr">
+                <a:tint val="40000"/>
+                <a:satMod val="350000"/>
+              </a:schemeClr>
+            </a:gs>
+            <a:gs pos="40000">
+              <a:schemeClr val="phClr">
+                <a:tint val="45000"/>
+                <a:shade val="99000"/>
+                <a:satMod val="350000"/>
+              </a:schemeClr>
+            </a:gs>
+            <a:gs pos="100000">
+              <a:schemeClr val="phClr">
+                <a:shade val="20000"/>
+                <a:satMod val="255000"/>
+              </a:schemeClr>
+            </a:gs>
+          </a:gsLst>
+          <a:path path="circle">
+            <a:fillToRect l="50000" t="-80000" r="50000" b="180000"/>
+          </a:path>
+        </a:gradFill>
+        <a:gradFill rotWithShape="1">
+          <a:gsLst>
+            <a:gs pos="0">
+              <a:schemeClr val="phClr">
+                <a:tint val="80000"/>
+                <a:satMod val="300000"/>
+              </a:schemeClr>
+            </a:gs>
+            <a:gs pos="100000">
+              <a:schemeClr val="phClr">
+                <a:shade val="30000"/>
+                <a:satMod val="200000"/>
+              </a:schemeClr>
+            </a:gs>
+          </a:gsLst>
+          <a:path path="circle">
+            <a:fillToRect l="50000" t="50000" r="50000" b="50000"/>
+          </a:path>
+        </a:gradFill>
+      </a:bgFillStyleLst>
+    </a:fmtScheme>
+  </a:themeElements>
+</a:theme>
+</file>
+
+<file path=ppt/theme/theme2.xml><?xml version="1.0" encoding="utf-8"?>
 <a:theme xmlns:a="http://schemas.openxmlformats.org/drawingml/2006/main" xmlns:r="http://schemas.openxmlformats.org/officeDocument/2006/relationships" name="Tema de Office">
   <a:themeElements>
     <a:clrScheme name="Office">
@@ -25475,283 +28634,4 @@
     </a:fmtScheme>
   </a:themeElements>
 </a:theme>
-</file>
-
-<file path=ppt/theme/theme2.xml><?xml version="1.0" encoding="utf-8"?>
-<a:theme xmlns:a="http://schemas.openxmlformats.org/drawingml/2006/main" xmlns:r="http://schemas.openxmlformats.org/officeDocument/2006/relationships" name="Office Theme">
-  <a:themeElements>
-    <a:clrScheme name="Office">
-      <a:dk1>
-        <a:srgbClr val="000000"/>
-      </a:dk1>
-      <a:lt1>
-        <a:srgbClr val="FFFFFF"/>
-      </a:lt1>
-      <a:dk2>
-        <a:srgbClr val="44546A"/>
-      </a:dk2>
-      <a:lt2>
-        <a:srgbClr val="E7E6E6"/>
-      </a:lt2>
-      <a:accent1>
-        <a:srgbClr val="4472C4"/>
-      </a:accent1>
-      <a:accent2>
-        <a:srgbClr val="ED7D31"/>
-      </a:accent2>
-      <a:accent3>
-        <a:srgbClr val="A5A5A5"/>
-      </a:accent3>
-      <a:accent4>
-        <a:srgbClr val="FFC000"/>
-      </a:accent4>
-      <a:accent5>
-        <a:srgbClr val="5B9BD5"/>
-      </a:accent5>
-      <a:accent6>
-        <a:srgbClr val="70AD47"/>
-      </a:accent6>
-      <a:hlink>
-        <a:srgbClr val="0563C1"/>
-      </a:hlink>
-      <a:folHlink>
-        <a:srgbClr val="954F72"/>
-      </a:folHlink>
-    </a:clrScheme>
-    <a:fontScheme name="Office">
-      <a:majorFont>
-        <a:latin typeface="Arial"/>
-        <a:ea typeface=""/>
-        <a:cs typeface=""/>
-        <a:font script="Jpan" typeface="ＭＳ Ｐゴシック"/>
-        <a:font script="Hang" typeface="맑은 고딕"/>
-        <a:font script="Hans" typeface="宋体"/>
-        <a:font script="Hant" typeface="新細明體"/>
-        <a:font script="Arab" typeface="Times New Roman"/>
-        <a:font script="Hebr" typeface="Times New Roman"/>
-        <a:font script="Thai" typeface="Angsana New"/>
-        <a:font script="Ethi" typeface="Nyala"/>
-        <a:font script="Beng" typeface="Vrinda"/>
-        <a:font script="Gujr" typeface="Shruti"/>
-        <a:font script="Khmr" typeface="MoolBoran"/>
-        <a:font script="Knda" typeface="Tunga"/>
-        <a:font script="Guru" typeface="Raavi"/>
-        <a:font script="Cans" typeface="Euphemia"/>
-        <a:font script="Cher" typeface="Plantagenet Cherokee"/>
-        <a:font script="Yiii" typeface="Microsoft Yi Baiti"/>
-        <a:font script="Tibt" typeface="Microsoft Himalaya"/>
-        <a:font script="Thaa" typeface="MV Boli"/>
-        <a:font script="Deva" typeface="Mangal"/>
-        <a:font script="Telu" typeface="Gautami"/>
-        <a:font script="Taml" typeface="Latha"/>
-        <a:font script="Syrc" typeface="Estrangelo Edessa"/>
-        <a:font script="Orya" typeface="Kalinga"/>
-        <a:font script="Mlym" typeface="Kartika"/>
-        <a:font script="Laoo" typeface="DokChampa"/>
-        <a:font script="Sinh" typeface="Iskoola Pota"/>
-        <a:font script="Mong" typeface="Mongolian Baiti"/>
-        <a:font script="Viet" typeface="Times New Roman"/>
-        <a:font script="Uigh" typeface="Microsoft Uighur"/>
-        <a:font script="Geor" typeface="Sylfaen"/>
-      </a:majorFont>
-      <a:minorFont>
-        <a:latin typeface="Arial"/>
-        <a:ea typeface=""/>
-        <a:cs typeface=""/>
-        <a:font script="Jpan" typeface="ＭＳ Ｐゴシック"/>
-        <a:font script="Hang" typeface="맑은 고딕"/>
-        <a:font script="Hans" typeface="宋体"/>
-        <a:font script="Hant" typeface="新細明體"/>
-        <a:font script="Arab" typeface="Arial"/>
-        <a:font script="Hebr" typeface="Arial"/>
-        <a:font script="Thai" typeface="Cordia New"/>
-        <a:font script="Ethi" typeface="Nyala"/>
-        <a:font script="Beng" typeface="Vrinda"/>
-        <a:font script="Gujr" typeface="Shruti"/>
-        <a:font script="Khmr" typeface="DaunPenh"/>
-        <a:font script="Knda" typeface="Tunga"/>
-        <a:font script="Guru" typeface="Raavi"/>
-        <a:font script="Cans" typeface="Euphemia"/>
-        <a:font script="Cher" typeface="Plantagenet Cherokee"/>
-        <a:font script="Yiii" typeface="Microsoft Yi Baiti"/>
-        <a:font script="Tibt" typeface="Microsoft Himalaya"/>
-        <a:font script="Thaa" typeface="MV Boli"/>
-        <a:font script="Deva" typeface="Mangal"/>
-        <a:font script="Telu" typeface="Gautami"/>
-        <a:font script="Taml" typeface="Latha"/>
-        <a:font script="Syrc" typeface="Estrangelo Edessa"/>
-        <a:font script="Orya" typeface="Kalinga"/>
-        <a:font script="Mlym" typeface="Kartika"/>
-        <a:font script="Laoo" typeface="DokChampa"/>
-        <a:font script="Sinh" typeface="Iskoola Pota"/>
-        <a:font script="Mong" typeface="Mongolian Baiti"/>
-        <a:font script="Viet" typeface="Arial"/>
-        <a:font script="Uigh" typeface="Microsoft Uighur"/>
-        <a:font script="Geor" typeface="Sylfaen"/>
-      </a:minorFont>
-    </a:fontScheme>
-    <a:fmtScheme name="Office">
-      <a:fillStyleLst>
-        <a:solidFill>
-          <a:schemeClr val="phClr"/>
-        </a:solidFill>
-        <a:gradFill rotWithShape="1">
-          <a:gsLst>
-            <a:gs pos="0">
-              <a:schemeClr val="phClr">
-                <a:tint val="50000"/>
-                <a:satMod val="300000"/>
-              </a:schemeClr>
-            </a:gs>
-            <a:gs pos="35000">
-              <a:schemeClr val="phClr">
-                <a:tint val="37000"/>
-                <a:satMod val="300000"/>
-              </a:schemeClr>
-            </a:gs>
-            <a:gs pos="100000">
-              <a:schemeClr val="phClr">
-                <a:tint val="15000"/>
-                <a:satMod val="350000"/>
-              </a:schemeClr>
-            </a:gs>
-          </a:gsLst>
-          <a:lin ang="16200000" scaled="1"/>
-        </a:gradFill>
-        <a:gradFill rotWithShape="1">
-          <a:gsLst>
-            <a:gs pos="0">
-              <a:schemeClr val="phClr">
-                <a:tint val="100000"/>
-                <a:shade val="100000"/>
-                <a:satMod val="130000"/>
-              </a:schemeClr>
-            </a:gs>
-            <a:gs pos="100000">
-              <a:schemeClr val="phClr">
-                <a:tint val="50000"/>
-                <a:shade val="100000"/>
-                <a:satMod val="350000"/>
-              </a:schemeClr>
-            </a:gs>
-          </a:gsLst>
-          <a:lin ang="16200000" scaled="0"/>
-        </a:gradFill>
-      </a:fillStyleLst>
-      <a:lnStyleLst>
-        <a:ln w="9525" cap="flat" cmpd="sng" algn="ctr">
-          <a:solidFill>
-            <a:schemeClr val="phClr">
-              <a:shade val="95000"/>
-              <a:satMod val="105000"/>
-            </a:schemeClr>
-          </a:solidFill>
-          <a:prstDash val="solid"/>
-        </a:ln>
-        <a:ln w="25400" cap="flat" cmpd="sng" algn="ctr">
-          <a:solidFill>
-            <a:schemeClr val="phClr"/>
-          </a:solidFill>
-          <a:prstDash val="solid"/>
-        </a:ln>
-        <a:ln w="38100" cap="flat" cmpd="sng" algn="ctr">
-          <a:solidFill>
-            <a:schemeClr val="phClr"/>
-          </a:solidFill>
-          <a:prstDash val="solid"/>
-        </a:ln>
-      </a:lnStyleLst>
-      <a:effectStyleLst>
-        <a:effectStyle>
-          <a:effectLst>
-            <a:outerShdw blurRad="40000" dist="20000" dir="5400000" rotWithShape="0">
-              <a:srgbClr val="000000">
-                <a:alpha val="38000"/>
-              </a:srgbClr>
-            </a:outerShdw>
-          </a:effectLst>
-        </a:effectStyle>
-        <a:effectStyle>
-          <a:effectLst>
-            <a:outerShdw blurRad="40000" dist="23000" dir="5400000" rotWithShape="0">
-              <a:srgbClr val="000000">
-                <a:alpha val="35000"/>
-              </a:srgbClr>
-            </a:outerShdw>
-          </a:effectLst>
-        </a:effectStyle>
-        <a:effectStyle>
-          <a:effectLst>
-            <a:outerShdw blurRad="40000" dist="23000" dir="5400000" rotWithShape="0">
-              <a:srgbClr val="000000">
-                <a:alpha val="35000"/>
-              </a:srgbClr>
-            </a:outerShdw>
-          </a:effectLst>
-          <a:scene3d>
-            <a:camera prst="orthographicFront">
-              <a:rot lat="0" lon="0" rev="0"/>
-            </a:camera>
-            <a:lightRig rig="threePt" dir="t">
-              <a:rot lat="0" lon="0" rev="1200000"/>
-            </a:lightRig>
-          </a:scene3d>
-          <a:sp3d>
-            <a:bevelT w="63500" h="25400"/>
-          </a:sp3d>
-        </a:effectStyle>
-      </a:effectStyleLst>
-      <a:bgFillStyleLst>
-        <a:solidFill>
-          <a:schemeClr val="phClr"/>
-        </a:solidFill>
-        <a:gradFill rotWithShape="1">
-          <a:gsLst>
-            <a:gs pos="0">
-              <a:schemeClr val="phClr">
-                <a:tint val="40000"/>
-                <a:satMod val="350000"/>
-              </a:schemeClr>
-            </a:gs>
-            <a:gs pos="40000">
-              <a:schemeClr val="phClr">
-                <a:tint val="45000"/>
-                <a:shade val="99000"/>
-                <a:satMod val="350000"/>
-              </a:schemeClr>
-            </a:gs>
-            <a:gs pos="100000">
-              <a:schemeClr val="phClr">
-                <a:shade val="20000"/>
-                <a:satMod val="255000"/>
-              </a:schemeClr>
-            </a:gs>
-          </a:gsLst>
-          <a:path path="circle">
-            <a:fillToRect l="50000" t="-80000" r="50000" b="180000"/>
-          </a:path>
-        </a:gradFill>
-        <a:gradFill rotWithShape="1">
-          <a:gsLst>
-            <a:gs pos="0">
-              <a:schemeClr val="phClr">
-                <a:tint val="80000"/>
-                <a:satMod val="300000"/>
-              </a:schemeClr>
-            </a:gs>
-            <a:gs pos="100000">
-              <a:schemeClr val="phClr">
-                <a:shade val="30000"/>
-                <a:satMod val="200000"/>
-              </a:schemeClr>
-            </a:gs>
-          </a:gsLst>
-          <a:path path="circle">
-            <a:fillToRect l="50000" t="50000" r="50000" b="50000"/>
-          </a:path>
-        </a:gradFill>
-      </a:bgFillStyleLst>
-    </a:fmtScheme>
-  </a:themeElements>
-</a:theme>
 </file>
--- a/reto3_procesamiento.pptx
+++ b/reto3_procesamiento.pptx
@@ -255,7 +255,7 @@
   </p:defaultTextStyle>
   <p:extLst>
     <p:ext uri="GoogleSlidesCustomDataVersion2">
-      <go:slidesCustomData xmlns:go="http://customooxmlschemas.google.com/" r:id="rId19" roundtripDataSignature="AMtx7mhT5Tbjh2d7qysJho8zOhnmS7o6qw=="/>
+      <go:slidesCustomData xmlns:go="http://customooxmlschemas.google.com/" r:id="rId19" roundtripDataSignature="AMtx7mj1dU5tl36z8edXZvHqJw8Ww7bJDQ=="/>
     </p:ext>
   </p:extLst>
 </p:presentation>
@@ -1094,7 +1094,7 @@
   <p:cSld>
     <p:spTree>
       <p:nvGrpSpPr>
-        <p:cNvPr id="317" name="Shape 317"/>
+        <p:cNvPr id="316" name="Shape 316"/>
         <p:cNvGrpSpPr/>
         <p:nvPr/>
       </p:nvGrpSpPr>
@@ -1108,7 +1108,7 @@
       </p:grpSpPr>
       <p:sp>
         <p:nvSpPr>
-          <p:cNvPr id="318" name="Google Shape;318;g39683255e89_0_2:notes"/>
+          <p:cNvPr id="317" name="Google Shape;317;g39683255e89_0_2:notes"/>
           <p:cNvSpPr/>
           <p:nvPr>
             <p:ph idx="2" type="sldImg"/>
@@ -1153,7 +1153,7 @@
       </p:sp>
       <p:sp>
         <p:nvSpPr>
-          <p:cNvPr id="319" name="Google Shape;319;g39683255e89_0_2:notes"/>
+          <p:cNvPr id="318" name="Google Shape;318;g39683255e89_0_2:notes"/>
           <p:cNvSpPr txBox="1"/>
           <p:nvPr>
             <p:ph idx="1" type="body"/>
@@ -1196,7 +1196,7 @@
       </p:sp>
       <p:sp>
         <p:nvSpPr>
-          <p:cNvPr id="320" name="Google Shape;320;g39683255e89_0_2:notes"/>
+          <p:cNvPr id="319" name="Google Shape;319;g39683255e89_0_2:notes"/>
           <p:cNvSpPr txBox="1"/>
           <p:nvPr>
             <p:ph idx="12" type="sldNum"/>
@@ -1251,7 +1251,7 @@
   <p:cSld>
     <p:spTree>
       <p:nvGrpSpPr>
-        <p:cNvPr id="342" name="Shape 342"/>
+        <p:cNvPr id="341" name="Shape 341"/>
         <p:cNvGrpSpPr/>
         <p:nvPr/>
       </p:nvGrpSpPr>
@@ -1265,7 +1265,7 @@
       </p:grpSpPr>
       <p:sp>
         <p:nvSpPr>
-          <p:cNvPr id="343" name="Google Shape;343;g39683255e89_0_41:notes"/>
+          <p:cNvPr id="342" name="Google Shape;342;g39683255e89_0_41:notes"/>
           <p:cNvSpPr/>
           <p:nvPr>
             <p:ph idx="2" type="sldImg"/>
@@ -1310,7 +1310,7 @@
       </p:sp>
       <p:sp>
         <p:nvSpPr>
-          <p:cNvPr id="344" name="Google Shape;344;g39683255e89_0_41:notes"/>
+          <p:cNvPr id="343" name="Google Shape;343;g39683255e89_0_41:notes"/>
           <p:cNvSpPr txBox="1"/>
           <p:nvPr>
             <p:ph idx="1" type="body"/>
@@ -1353,7 +1353,7 @@
       </p:sp>
       <p:sp>
         <p:nvSpPr>
-          <p:cNvPr id="345" name="Google Shape;345;g39683255e89_0_41:notes"/>
+          <p:cNvPr id="344" name="Google Shape;344;g39683255e89_0_41:notes"/>
           <p:cNvSpPr txBox="1"/>
           <p:nvPr>
             <p:ph idx="12" type="sldNum"/>
@@ -1408,7 +1408,7 @@
   <p:cSld>
     <p:spTree>
       <p:nvGrpSpPr>
-        <p:cNvPr id="367" name="Shape 367"/>
+        <p:cNvPr id="366" name="Shape 366"/>
         <p:cNvGrpSpPr/>
         <p:nvPr/>
       </p:nvGrpSpPr>
@@ -1422,7 +1422,7 @@
       </p:grpSpPr>
       <p:sp>
         <p:nvSpPr>
-          <p:cNvPr id="368" name="Google Shape;368;g39683255e89_0_78:notes"/>
+          <p:cNvPr id="367" name="Google Shape;367;g39683255e89_0_78:notes"/>
           <p:cNvSpPr/>
           <p:nvPr>
             <p:ph idx="2" type="sldImg"/>
@@ -1467,7 +1467,7 @@
       </p:sp>
       <p:sp>
         <p:nvSpPr>
-          <p:cNvPr id="369" name="Google Shape;369;g39683255e89_0_78:notes"/>
+          <p:cNvPr id="368" name="Google Shape;368;g39683255e89_0_78:notes"/>
           <p:cNvSpPr txBox="1"/>
           <p:nvPr>
             <p:ph idx="1" type="body"/>
@@ -1510,7 +1510,7 @@
       </p:sp>
       <p:sp>
         <p:nvSpPr>
-          <p:cNvPr id="370" name="Google Shape;370;g39683255e89_0_78:notes"/>
+          <p:cNvPr id="369" name="Google Shape;369;g39683255e89_0_78:notes"/>
           <p:cNvSpPr txBox="1"/>
           <p:nvPr>
             <p:ph idx="12" type="sldNum"/>
@@ -1565,7 +1565,7 @@
   <p:cSld>
     <p:spTree>
       <p:nvGrpSpPr>
-        <p:cNvPr id="390" name="Shape 390"/>
+        <p:cNvPr id="389" name="Shape 389"/>
         <p:cNvGrpSpPr/>
         <p:nvPr/>
       </p:nvGrpSpPr>
@@ -1579,7 +1579,7 @@
       </p:grpSpPr>
       <p:sp>
         <p:nvSpPr>
-          <p:cNvPr id="391" name="Google Shape;391;p10:notes"/>
+          <p:cNvPr id="390" name="Google Shape;390;p10:notes"/>
           <p:cNvSpPr/>
           <p:nvPr>
             <p:ph idx="2" type="sldImg"/>
@@ -1618,7 +1618,7 @@
       </p:sp>
       <p:sp>
         <p:nvSpPr>
-          <p:cNvPr id="392" name="Google Shape;392;p10:notes"/>
+          <p:cNvPr id="391" name="Google Shape;391;p10:notes"/>
           <p:cNvSpPr txBox="1"/>
           <p:nvPr>
             <p:ph idx="1" type="body"/>
@@ -1669,7 +1669,7 @@
       </p:sp>
       <p:sp>
         <p:nvSpPr>
-          <p:cNvPr id="393" name="Google Shape;393;p10:notes"/>
+          <p:cNvPr id="392" name="Google Shape;392;p10:notes"/>
           <p:cNvSpPr txBox="1"/>
           <p:nvPr>
             <p:ph idx="12" type="sldNum"/>
@@ -2961,7 +2961,7 @@
   <p:cSld>
     <p:spTree>
       <p:nvGrpSpPr>
-        <p:cNvPr id="291" name="Shape 291"/>
+        <p:cNvPr id="290" name="Shape 290"/>
         <p:cNvGrpSpPr/>
         <p:nvPr/>
       </p:nvGrpSpPr>
@@ -2975,7 +2975,7 @@
       </p:grpSpPr>
       <p:sp>
         <p:nvSpPr>
-          <p:cNvPr id="292" name="Google Shape;292;p9:notes"/>
+          <p:cNvPr id="291" name="Google Shape;291;p9:notes"/>
           <p:cNvSpPr/>
           <p:nvPr>
             <p:ph idx="2" type="sldImg"/>
@@ -3014,7 +3014,7 @@
       </p:sp>
       <p:sp>
         <p:nvSpPr>
-          <p:cNvPr id="293" name="Google Shape;293;p9:notes"/>
+          <p:cNvPr id="292" name="Google Shape;292;p9:notes"/>
           <p:cNvSpPr txBox="1"/>
           <p:nvPr>
             <p:ph idx="1" type="body"/>
@@ -3065,7 +3065,7 @@
       </p:sp>
       <p:sp>
         <p:nvSpPr>
-          <p:cNvPr id="294" name="Google Shape;294;p9:notes"/>
+          <p:cNvPr id="293" name="Google Shape;293;p9:notes"/>
           <p:cNvSpPr txBox="1"/>
           <p:nvPr>
             <p:ph idx="12" type="sldNum"/>
@@ -4042,7 +4042,7 @@
     </p:bg>
     <p:spTree>
       <p:nvGrpSpPr>
-        <p:cNvPr id="321" name="Shape 321"/>
+        <p:cNvPr id="320" name="Shape 320"/>
         <p:cNvGrpSpPr/>
         <p:nvPr/>
       </p:nvGrpSpPr>
@@ -4056,7 +4056,7 @@
       </p:grpSpPr>
       <p:grpSp>
         <p:nvGrpSpPr>
-          <p:cNvPr id="322" name="Google Shape;322;g39683255e89_0_2"/>
+          <p:cNvPr id="321" name="Google Shape;321;g39683255e89_0_2"/>
           <p:cNvGrpSpPr/>
           <p:nvPr/>
         </p:nvGrpSpPr>
@@ -4070,7 +4070,7 @@
         </p:grpSpPr>
         <p:sp>
           <p:nvSpPr>
-            <p:cNvPr id="323" name="Google Shape;323;g39683255e89_0_2"/>
+            <p:cNvPr id="322" name="Google Shape;322;g39683255e89_0_2"/>
             <p:cNvSpPr/>
             <p:nvPr/>
           </p:nvSpPr>
@@ -4126,7 +4126,7 @@
         </p:sp>
         <p:sp>
           <p:nvSpPr>
-            <p:cNvPr id="324" name="Google Shape;324;g39683255e89_0_2"/>
+            <p:cNvPr id="323" name="Google Shape;323;g39683255e89_0_2"/>
             <p:cNvSpPr/>
             <p:nvPr/>
           </p:nvSpPr>
@@ -4175,7 +4175,7 @@
         </p:sp>
         <p:sp>
           <p:nvSpPr>
-            <p:cNvPr id="325" name="Google Shape;325;g39683255e89_0_2"/>
+            <p:cNvPr id="324" name="Google Shape;324;g39683255e89_0_2"/>
             <p:cNvSpPr/>
             <p:nvPr/>
           </p:nvSpPr>
@@ -4238,7 +4238,7 @@
         </p:sp>
         <p:sp>
           <p:nvSpPr>
-            <p:cNvPr id="326" name="Google Shape;326;g39683255e89_0_2"/>
+            <p:cNvPr id="325" name="Google Shape;325;g39683255e89_0_2"/>
             <p:cNvSpPr/>
             <p:nvPr/>
           </p:nvSpPr>
@@ -4287,7 +4287,7 @@
         </p:sp>
         <p:sp>
           <p:nvSpPr>
-            <p:cNvPr id="327" name="Google Shape;327;g39683255e89_0_2"/>
+            <p:cNvPr id="326" name="Google Shape;326;g39683255e89_0_2"/>
             <p:cNvSpPr/>
             <p:nvPr/>
           </p:nvSpPr>
@@ -4375,7 +4375,7 @@
       </p:grpSp>
       <p:grpSp>
         <p:nvGrpSpPr>
-          <p:cNvPr id="328" name="Google Shape;328;g39683255e89_0_2"/>
+          <p:cNvPr id="327" name="Google Shape;327;g39683255e89_0_2"/>
           <p:cNvGrpSpPr/>
           <p:nvPr/>
         </p:nvGrpSpPr>
@@ -4389,7 +4389,7 @@
         </p:grpSpPr>
         <p:sp>
           <p:nvSpPr>
-            <p:cNvPr id="329" name="Google Shape;329;g39683255e89_0_2"/>
+            <p:cNvPr id="328" name="Google Shape;328;g39683255e89_0_2"/>
             <p:cNvSpPr/>
             <p:nvPr/>
           </p:nvSpPr>
@@ -4446,7 +4446,7 @@
         </p:sp>
         <p:sp>
           <p:nvSpPr>
-            <p:cNvPr id="330" name="Google Shape;330;g39683255e89_0_2"/>
+            <p:cNvPr id="329" name="Google Shape;329;g39683255e89_0_2"/>
             <p:cNvSpPr/>
             <p:nvPr/>
           </p:nvSpPr>
@@ -4495,7 +4495,7 @@
         </p:sp>
         <p:sp>
           <p:nvSpPr>
-            <p:cNvPr id="331" name="Google Shape;331;g39683255e89_0_2"/>
+            <p:cNvPr id="330" name="Google Shape;330;g39683255e89_0_2"/>
             <p:cNvSpPr/>
             <p:nvPr/>
           </p:nvSpPr>
@@ -4570,7 +4570,7 @@
         </p:sp>
         <p:sp>
           <p:nvSpPr>
-            <p:cNvPr id="332" name="Google Shape;332;g39683255e89_0_2"/>
+            <p:cNvPr id="331" name="Google Shape;331;g39683255e89_0_2"/>
             <p:cNvSpPr/>
             <p:nvPr/>
           </p:nvSpPr>
@@ -4619,7 +4619,7 @@
         </p:sp>
         <p:sp>
           <p:nvSpPr>
-            <p:cNvPr id="333" name="Google Shape;333;g39683255e89_0_2"/>
+            <p:cNvPr id="332" name="Google Shape;332;g39683255e89_0_2"/>
             <p:cNvSpPr/>
             <p:nvPr/>
           </p:nvSpPr>
@@ -4683,7 +4683,7 @@
       </p:grpSp>
       <p:sp>
         <p:nvSpPr>
-          <p:cNvPr id="334" name="Google Shape;334;g39683255e89_0_2"/>
+          <p:cNvPr id="333" name="Google Shape;333;g39683255e89_0_2"/>
           <p:cNvSpPr/>
           <p:nvPr/>
         </p:nvSpPr>
@@ -4740,7 +4740,7 @@
       </p:sp>
       <p:sp>
         <p:nvSpPr>
-          <p:cNvPr id="335" name="Google Shape;335;g39683255e89_0_2"/>
+          <p:cNvPr id="334" name="Google Shape;334;g39683255e89_0_2"/>
           <p:cNvSpPr/>
           <p:nvPr/>
         </p:nvSpPr>
@@ -4803,7 +4803,7 @@
       </p:sp>
       <p:grpSp>
         <p:nvGrpSpPr>
-          <p:cNvPr id="336" name="Google Shape;336;g39683255e89_0_2"/>
+          <p:cNvPr id="335" name="Google Shape;335;g39683255e89_0_2"/>
           <p:cNvGrpSpPr/>
           <p:nvPr/>
         </p:nvGrpSpPr>
@@ -4817,7 +4817,7 @@
         </p:grpSpPr>
         <p:sp>
           <p:nvSpPr>
-            <p:cNvPr id="337" name="Google Shape;337;g39683255e89_0_2"/>
+            <p:cNvPr id="336" name="Google Shape;336;g39683255e89_0_2"/>
             <p:cNvSpPr/>
             <p:nvPr/>
           </p:nvSpPr>
@@ -4874,7 +4874,7 @@
         </p:sp>
         <p:sp>
           <p:nvSpPr>
-            <p:cNvPr id="338" name="Google Shape;338;g39683255e89_0_2"/>
+            <p:cNvPr id="337" name="Google Shape;337;g39683255e89_0_2"/>
             <p:cNvSpPr/>
             <p:nvPr/>
           </p:nvSpPr>
@@ -4949,7 +4949,7 @@
         </p:sp>
         <p:sp>
           <p:nvSpPr>
-            <p:cNvPr id="339" name="Google Shape;339;g39683255e89_0_2"/>
+            <p:cNvPr id="338" name="Google Shape;338;g39683255e89_0_2"/>
             <p:cNvSpPr/>
             <p:nvPr/>
           </p:nvSpPr>
@@ -4998,7 +4998,7 @@
         </p:sp>
         <p:sp>
           <p:nvSpPr>
-            <p:cNvPr id="340" name="Google Shape;340;g39683255e89_0_2"/>
+            <p:cNvPr id="339" name="Google Shape;339;g39683255e89_0_2"/>
             <p:cNvSpPr/>
             <p:nvPr/>
           </p:nvSpPr>
@@ -5121,7 +5121,7 @@
         </p:sp>
         <p:sp>
           <p:nvSpPr>
-            <p:cNvPr id="341" name="Google Shape;341;g39683255e89_0_2"/>
+            <p:cNvPr id="340" name="Google Shape;340;g39683255e89_0_2"/>
             <p:cNvSpPr/>
             <p:nvPr/>
           </p:nvSpPr>
@@ -5197,7 +5197,7 @@
     </p:bg>
     <p:spTree>
       <p:nvGrpSpPr>
-        <p:cNvPr id="346" name="Shape 346"/>
+        <p:cNvPr id="345" name="Shape 345"/>
         <p:cNvGrpSpPr/>
         <p:nvPr/>
       </p:nvGrpSpPr>
@@ -5211,7 +5211,7 @@
       </p:grpSpPr>
       <p:sp>
         <p:nvSpPr>
-          <p:cNvPr id="347" name="Google Shape;347;g39683255e89_0_41"/>
+          <p:cNvPr id="346" name="Google Shape;346;g39683255e89_0_41"/>
           <p:cNvSpPr/>
           <p:nvPr/>
         </p:nvSpPr>
@@ -5298,7 +5298,7 @@
       </p:sp>
       <p:sp>
         <p:nvSpPr>
-          <p:cNvPr id="348" name="Google Shape;348;g39683255e89_0_41"/>
+          <p:cNvPr id="347" name="Google Shape;347;g39683255e89_0_41"/>
           <p:cNvSpPr/>
           <p:nvPr/>
         </p:nvSpPr>
@@ -5362,7 +5362,7 @@
       </p:sp>
       <p:sp>
         <p:nvSpPr>
-          <p:cNvPr id="349" name="Google Shape;349;g39683255e89_0_41"/>
+          <p:cNvPr id="348" name="Google Shape;348;g39683255e89_0_41"/>
           <p:cNvSpPr/>
           <p:nvPr/>
         </p:nvSpPr>
@@ -5411,7 +5411,7 @@
       </p:sp>
       <p:sp>
         <p:nvSpPr>
-          <p:cNvPr id="350" name="Google Shape;350;g39683255e89_0_41"/>
+          <p:cNvPr id="349" name="Google Shape;349;g39683255e89_0_41"/>
           <p:cNvSpPr/>
           <p:nvPr/>
         </p:nvSpPr>
@@ -5486,7 +5486,7 @@
       </p:sp>
       <p:sp>
         <p:nvSpPr>
-          <p:cNvPr id="351" name="Google Shape;351;g39683255e89_0_41"/>
+          <p:cNvPr id="350" name="Google Shape;350;g39683255e89_0_41"/>
           <p:cNvSpPr/>
           <p:nvPr/>
         </p:nvSpPr>
@@ -5549,7 +5549,7 @@
       </p:sp>
       <p:sp>
         <p:nvSpPr>
-          <p:cNvPr id="352" name="Google Shape;352;g39683255e89_0_41"/>
+          <p:cNvPr id="351" name="Google Shape;351;g39683255e89_0_41"/>
           <p:cNvSpPr/>
           <p:nvPr/>
         </p:nvSpPr>
@@ -5605,7 +5605,7 @@
       </p:sp>
       <p:sp>
         <p:nvSpPr>
-          <p:cNvPr id="353" name="Google Shape;353;g39683255e89_0_41"/>
+          <p:cNvPr id="352" name="Google Shape;352;g39683255e89_0_41"/>
           <p:cNvSpPr/>
           <p:nvPr/>
         </p:nvSpPr>
@@ -5662,7 +5662,7 @@
       </p:sp>
       <p:sp>
         <p:nvSpPr>
-          <p:cNvPr id="354" name="Google Shape;354;g39683255e89_0_41"/>
+          <p:cNvPr id="353" name="Google Shape;353;g39683255e89_0_41"/>
           <p:cNvSpPr/>
           <p:nvPr/>
         </p:nvSpPr>
@@ -5725,7 +5725,7 @@
       </p:sp>
       <p:sp>
         <p:nvSpPr>
-          <p:cNvPr id="355" name="Google Shape;355;g39683255e89_0_41"/>
+          <p:cNvPr id="354" name="Google Shape;354;g39683255e89_0_41"/>
           <p:cNvSpPr/>
           <p:nvPr/>
         </p:nvSpPr>
@@ -5774,7 +5774,7 @@
       </p:sp>
       <p:sp>
         <p:nvSpPr>
-          <p:cNvPr id="356" name="Google Shape;356;g39683255e89_0_41"/>
+          <p:cNvPr id="355" name="Google Shape;355;g39683255e89_0_41"/>
           <p:cNvSpPr/>
           <p:nvPr/>
         </p:nvSpPr>
@@ -5849,7 +5849,7 @@
       </p:sp>
       <p:sp>
         <p:nvSpPr>
-          <p:cNvPr id="357" name="Google Shape;357;g39683255e89_0_41"/>
+          <p:cNvPr id="356" name="Google Shape;356;g39683255e89_0_41"/>
           <p:cNvSpPr/>
           <p:nvPr/>
         </p:nvSpPr>
@@ -5912,7 +5912,7 @@
       </p:sp>
       <p:sp>
         <p:nvSpPr>
-          <p:cNvPr id="358" name="Google Shape;358;g39683255e89_0_41"/>
+          <p:cNvPr id="357" name="Google Shape;357;g39683255e89_0_41"/>
           <p:cNvSpPr/>
           <p:nvPr/>
         </p:nvSpPr>
@@ -5976,7 +5976,7 @@
       </p:sp>
       <p:sp>
         <p:nvSpPr>
-          <p:cNvPr id="359" name="Google Shape;359;g39683255e89_0_41"/>
+          <p:cNvPr id="358" name="Google Shape;358;g39683255e89_0_41"/>
           <p:cNvSpPr/>
           <p:nvPr/>
         </p:nvSpPr>
@@ -6025,7 +6025,7 @@
       </p:sp>
       <p:sp>
         <p:nvSpPr>
-          <p:cNvPr id="360" name="Google Shape;360;g39683255e89_0_41"/>
+          <p:cNvPr id="359" name="Google Shape;359;g39683255e89_0_41"/>
           <p:cNvSpPr/>
           <p:nvPr/>
         </p:nvSpPr>
@@ -6100,7 +6100,7 @@
       </p:sp>
       <p:sp>
         <p:nvSpPr>
-          <p:cNvPr id="361" name="Google Shape;361;g39683255e89_0_41"/>
+          <p:cNvPr id="360" name="Google Shape;360;g39683255e89_0_41"/>
           <p:cNvSpPr/>
           <p:nvPr/>
         </p:nvSpPr>
@@ -6149,7 +6149,7 @@
       </p:sp>
       <p:sp>
         <p:nvSpPr>
-          <p:cNvPr id="362" name="Google Shape;362;g39683255e89_0_41"/>
+          <p:cNvPr id="361" name="Google Shape;361;g39683255e89_0_41"/>
           <p:cNvSpPr/>
           <p:nvPr/>
         </p:nvSpPr>
@@ -6212,7 +6212,7 @@
       </p:sp>
       <p:sp>
         <p:nvSpPr>
-          <p:cNvPr id="363" name="Google Shape;363;g39683255e89_0_41"/>
+          <p:cNvPr id="362" name="Google Shape;362;g39683255e89_0_41"/>
           <p:cNvSpPr/>
           <p:nvPr/>
         </p:nvSpPr>
@@ -6275,7 +6275,7 @@
       </p:sp>
       <p:sp>
         <p:nvSpPr>
-          <p:cNvPr id="364" name="Google Shape;364;g39683255e89_0_41"/>
+          <p:cNvPr id="363" name="Google Shape;363;g39683255e89_0_41"/>
           <p:cNvSpPr/>
           <p:nvPr/>
         </p:nvSpPr>
@@ -6332,7 +6332,7 @@
       </p:sp>
       <p:sp>
         <p:nvSpPr>
-          <p:cNvPr id="365" name="Google Shape;365;g39683255e89_0_41"/>
+          <p:cNvPr id="364" name="Google Shape;364;g39683255e89_0_41"/>
           <p:cNvSpPr/>
           <p:nvPr/>
         </p:nvSpPr>
@@ -6381,7 +6381,7 @@
       </p:sp>
       <p:sp>
         <p:nvSpPr>
-          <p:cNvPr id="366" name="Google Shape;366;g39683255e89_0_41"/>
+          <p:cNvPr id="365" name="Google Shape;365;g39683255e89_0_41"/>
           <p:cNvSpPr/>
           <p:nvPr/>
         </p:nvSpPr>
@@ -6522,7 +6522,7 @@
     </p:bg>
     <p:spTree>
       <p:nvGrpSpPr>
-        <p:cNvPr id="371" name="Shape 371"/>
+        <p:cNvPr id="370" name="Shape 370"/>
         <p:cNvGrpSpPr/>
         <p:nvPr/>
       </p:nvGrpSpPr>
@@ -6536,7 +6536,7 @@
       </p:grpSpPr>
       <p:sp>
         <p:nvSpPr>
-          <p:cNvPr id="372" name="Google Shape;372;g39683255e89_0_78"/>
+          <p:cNvPr id="371" name="Google Shape;371;g39683255e89_0_78"/>
           <p:cNvSpPr/>
           <p:nvPr/>
         </p:nvSpPr>
@@ -6611,7 +6611,7 @@
       </p:sp>
       <p:sp>
         <p:nvSpPr>
-          <p:cNvPr id="373" name="Google Shape;373;g39683255e89_0_78"/>
+          <p:cNvPr id="372" name="Google Shape;372;g39683255e89_0_78"/>
           <p:cNvSpPr/>
           <p:nvPr/>
         </p:nvSpPr>
@@ -6667,7 +6667,7 @@
       </p:sp>
       <p:sp>
         <p:nvSpPr>
-          <p:cNvPr id="374" name="Google Shape;374;g39683255e89_0_78"/>
+          <p:cNvPr id="373" name="Google Shape;373;g39683255e89_0_78"/>
           <p:cNvSpPr/>
           <p:nvPr/>
         </p:nvSpPr>
@@ -6716,7 +6716,7 @@
       </p:sp>
       <p:sp>
         <p:nvSpPr>
-          <p:cNvPr id="375" name="Google Shape;375;g39683255e89_0_78"/>
+          <p:cNvPr id="374" name="Google Shape;374;g39683255e89_0_78"/>
           <p:cNvSpPr/>
           <p:nvPr/>
         </p:nvSpPr>
@@ -6779,7 +6779,7 @@
       </p:sp>
       <p:sp>
         <p:nvSpPr>
-          <p:cNvPr id="376" name="Google Shape;376;g39683255e89_0_78"/>
+          <p:cNvPr id="375" name="Google Shape;375;g39683255e89_0_78"/>
           <p:cNvSpPr/>
           <p:nvPr/>
         </p:nvSpPr>
@@ -6842,7 +6842,7 @@
       </p:sp>
       <p:sp>
         <p:nvSpPr>
-          <p:cNvPr id="377" name="Google Shape;377;g39683255e89_0_78"/>
+          <p:cNvPr id="376" name="Google Shape;376;g39683255e89_0_78"/>
           <p:cNvSpPr/>
           <p:nvPr/>
         </p:nvSpPr>
@@ -6898,7 +6898,7 @@
       </p:sp>
       <p:sp>
         <p:nvSpPr>
-          <p:cNvPr id="378" name="Google Shape;378;g39683255e89_0_78"/>
+          <p:cNvPr id="377" name="Google Shape;377;g39683255e89_0_78"/>
           <p:cNvSpPr/>
           <p:nvPr/>
         </p:nvSpPr>
@@ -6947,7 +6947,7 @@
       </p:sp>
       <p:sp>
         <p:nvSpPr>
-          <p:cNvPr id="379" name="Google Shape;379;g39683255e89_0_78"/>
+          <p:cNvPr id="378" name="Google Shape;378;g39683255e89_0_78"/>
           <p:cNvSpPr/>
           <p:nvPr/>
         </p:nvSpPr>
@@ -7010,7 +7010,7 @@
       </p:sp>
       <p:sp>
         <p:nvSpPr>
-          <p:cNvPr id="380" name="Google Shape;380;g39683255e89_0_78"/>
+          <p:cNvPr id="379" name="Google Shape;379;g39683255e89_0_78"/>
           <p:cNvSpPr/>
           <p:nvPr/>
         </p:nvSpPr>
@@ -7073,7 +7073,7 @@
       </p:sp>
       <p:sp>
         <p:nvSpPr>
-          <p:cNvPr id="381" name="Google Shape;381;g39683255e89_0_78"/>
+          <p:cNvPr id="380" name="Google Shape;380;g39683255e89_0_78"/>
           <p:cNvSpPr/>
           <p:nvPr/>
         </p:nvSpPr>
@@ -7129,7 +7129,7 @@
       </p:sp>
       <p:sp>
         <p:nvSpPr>
-          <p:cNvPr id="382" name="Google Shape;382;g39683255e89_0_78"/>
+          <p:cNvPr id="381" name="Google Shape;381;g39683255e89_0_78"/>
           <p:cNvSpPr/>
           <p:nvPr/>
         </p:nvSpPr>
@@ -7178,7 +7178,7 @@
       </p:sp>
       <p:sp>
         <p:nvSpPr>
-          <p:cNvPr id="383" name="Google Shape;383;g39683255e89_0_78"/>
+          <p:cNvPr id="382" name="Google Shape;382;g39683255e89_0_78"/>
           <p:cNvSpPr/>
           <p:nvPr/>
         </p:nvSpPr>
@@ -7241,7 +7241,7 @@
       </p:sp>
       <p:sp>
         <p:nvSpPr>
-          <p:cNvPr id="384" name="Google Shape;384;g39683255e89_0_78"/>
+          <p:cNvPr id="383" name="Google Shape;383;g39683255e89_0_78"/>
           <p:cNvSpPr/>
           <p:nvPr/>
         </p:nvSpPr>
@@ -7304,7 +7304,7 @@
       </p:sp>
       <p:sp>
         <p:nvSpPr>
-          <p:cNvPr id="385" name="Google Shape;385;g39683255e89_0_78"/>
+          <p:cNvPr id="384" name="Google Shape;384;g39683255e89_0_78"/>
           <p:cNvSpPr/>
           <p:nvPr/>
         </p:nvSpPr>
@@ -7360,7 +7360,7 @@
       </p:sp>
       <p:sp>
         <p:nvSpPr>
-          <p:cNvPr id="386" name="Google Shape;386;g39683255e89_0_78"/>
+          <p:cNvPr id="385" name="Google Shape;385;g39683255e89_0_78"/>
           <p:cNvSpPr/>
           <p:nvPr/>
         </p:nvSpPr>
@@ -7409,7 +7409,7 @@
       </p:sp>
       <p:sp>
         <p:nvSpPr>
-          <p:cNvPr id="387" name="Google Shape;387;g39683255e89_0_78"/>
+          <p:cNvPr id="386" name="Google Shape;386;g39683255e89_0_78"/>
           <p:cNvSpPr/>
           <p:nvPr/>
         </p:nvSpPr>
@@ -7472,7 +7472,7 @@
       </p:sp>
       <p:sp>
         <p:nvSpPr>
-          <p:cNvPr id="388" name="Google Shape;388;g39683255e89_0_78"/>
+          <p:cNvPr id="387" name="Google Shape;387;g39683255e89_0_78"/>
           <p:cNvSpPr/>
           <p:nvPr/>
         </p:nvSpPr>
@@ -7535,7 +7535,7 @@
       </p:sp>
       <p:sp>
         <p:nvSpPr>
-          <p:cNvPr id="389" name="Google Shape;389;g39683255e89_0_78"/>
+          <p:cNvPr id="388" name="Google Shape;388;g39683255e89_0_78"/>
           <p:cNvSpPr/>
           <p:nvPr/>
         </p:nvSpPr>
@@ -7610,7 +7610,7 @@
     </p:bg>
     <p:spTree>
       <p:nvGrpSpPr>
-        <p:cNvPr id="394" name="Shape 394"/>
+        <p:cNvPr id="393" name="Shape 393"/>
         <p:cNvGrpSpPr/>
         <p:nvPr/>
       </p:nvGrpSpPr>
@@ -7624,7 +7624,7 @@
       </p:grpSpPr>
       <p:sp>
         <p:nvSpPr>
-          <p:cNvPr id="395" name="Google Shape;395;p10"/>
+          <p:cNvPr id="394" name="Google Shape;394;p10"/>
           <p:cNvSpPr/>
           <p:nvPr/>
         </p:nvSpPr>
@@ -7681,7 +7681,7 @@
       </p:sp>
       <p:sp>
         <p:nvSpPr>
-          <p:cNvPr id="396" name="Google Shape;396;p10"/>
+          <p:cNvPr id="395" name="Google Shape;395;p10"/>
           <p:cNvSpPr/>
           <p:nvPr/>
         </p:nvSpPr>
@@ -7744,7 +7744,7 @@
       </p:sp>
       <p:sp>
         <p:nvSpPr>
-          <p:cNvPr id="397" name="Google Shape;397;p10"/>
+          <p:cNvPr id="396" name="Google Shape;396;p10"/>
           <p:cNvSpPr/>
           <p:nvPr/>
         </p:nvSpPr>
@@ -7801,7 +7801,7 @@
       </p:sp>
       <p:sp>
         <p:nvSpPr>
-          <p:cNvPr id="398" name="Google Shape;398;p10"/>
+          <p:cNvPr id="397" name="Google Shape;397;p10"/>
           <p:cNvSpPr/>
           <p:nvPr/>
         </p:nvSpPr>
@@ -7858,7 +7858,7 @@
       </p:sp>
       <p:sp>
         <p:nvSpPr>
-          <p:cNvPr id="399" name="Google Shape;399;p10"/>
+          <p:cNvPr id="398" name="Google Shape;398;p10"/>
           <p:cNvSpPr/>
           <p:nvPr/>
         </p:nvSpPr>
@@ -7921,7 +7921,7 @@
       </p:sp>
       <p:sp>
         <p:nvSpPr>
-          <p:cNvPr id="400" name="Google Shape;400;p10"/>
+          <p:cNvPr id="399" name="Google Shape;399;p10"/>
           <p:cNvSpPr/>
           <p:nvPr/>
         </p:nvSpPr>
@@ -7984,7 +7984,7 @@
       </p:sp>
       <p:sp>
         <p:nvSpPr>
-          <p:cNvPr id="401" name="Google Shape;401;p10"/>
+          <p:cNvPr id="400" name="Google Shape;400;p10"/>
           <p:cNvSpPr/>
           <p:nvPr/>
         </p:nvSpPr>
@@ -8047,7 +8047,7 @@
       </p:sp>
       <p:sp>
         <p:nvSpPr>
-          <p:cNvPr id="402" name="Google Shape;402;p10"/>
+          <p:cNvPr id="401" name="Google Shape;401;p10"/>
           <p:cNvSpPr/>
           <p:nvPr/>
         </p:nvSpPr>
@@ -8110,7 +8110,7 @@
       </p:sp>
       <p:sp>
         <p:nvSpPr>
-          <p:cNvPr id="403" name="Google Shape;403;p10"/>
+          <p:cNvPr id="402" name="Google Shape;402;p10"/>
           <p:cNvSpPr/>
           <p:nvPr/>
         </p:nvSpPr>
@@ -8167,7 +8167,7 @@
       </p:sp>
       <p:sp>
         <p:nvSpPr>
-          <p:cNvPr id="404" name="Google Shape;404;p10"/>
+          <p:cNvPr id="403" name="Google Shape;403;p10"/>
           <p:cNvSpPr/>
           <p:nvPr/>
         </p:nvSpPr>
@@ -8224,7 +8224,7 @@
       </p:sp>
       <p:sp>
         <p:nvSpPr>
-          <p:cNvPr id="405" name="Google Shape;405;p10"/>
+          <p:cNvPr id="404" name="Google Shape;404;p10"/>
           <p:cNvSpPr/>
           <p:nvPr/>
         </p:nvSpPr>
@@ -8287,7 +8287,7 @@
       </p:sp>
       <p:sp>
         <p:nvSpPr>
-          <p:cNvPr id="406" name="Google Shape;406;p10"/>
+          <p:cNvPr id="405" name="Google Shape;405;p10"/>
           <p:cNvSpPr/>
           <p:nvPr/>
         </p:nvSpPr>
@@ -8350,7 +8350,7 @@
       </p:sp>
       <p:sp>
         <p:nvSpPr>
-          <p:cNvPr id="407" name="Google Shape;407;p10"/>
+          <p:cNvPr id="406" name="Google Shape;406;p10"/>
           <p:cNvSpPr/>
           <p:nvPr/>
         </p:nvSpPr>
@@ -8413,7 +8413,7 @@
       </p:sp>
       <p:sp>
         <p:nvSpPr>
-          <p:cNvPr id="408" name="Google Shape;408;p10"/>
+          <p:cNvPr id="407" name="Google Shape;407;p10"/>
           <p:cNvSpPr/>
           <p:nvPr/>
         </p:nvSpPr>
@@ -8476,7 +8476,7 @@
       </p:sp>
       <p:sp>
         <p:nvSpPr>
-          <p:cNvPr id="409" name="Google Shape;409;p10"/>
+          <p:cNvPr id="408" name="Google Shape;408;p10"/>
           <p:cNvSpPr/>
           <p:nvPr/>
         </p:nvSpPr>
@@ -8533,7 +8533,7 @@
       </p:sp>
       <p:sp>
         <p:nvSpPr>
-          <p:cNvPr id="410" name="Google Shape;410;p10"/>
+          <p:cNvPr id="409" name="Google Shape;409;p10"/>
           <p:cNvSpPr/>
           <p:nvPr/>
         </p:nvSpPr>
@@ -8590,7 +8590,7 @@
       </p:sp>
       <p:sp>
         <p:nvSpPr>
-          <p:cNvPr id="411" name="Google Shape;411;p10"/>
+          <p:cNvPr id="410" name="Google Shape;410;p10"/>
           <p:cNvSpPr/>
           <p:nvPr/>
         </p:nvSpPr>
@@ -8653,7 +8653,7 @@
       </p:sp>
       <p:sp>
         <p:nvSpPr>
-          <p:cNvPr id="412" name="Google Shape;412;p10"/>
+          <p:cNvPr id="411" name="Google Shape;411;p10"/>
           <p:cNvSpPr/>
           <p:nvPr/>
         </p:nvSpPr>
@@ -8716,7 +8716,7 @@
       </p:sp>
       <p:sp>
         <p:nvSpPr>
-          <p:cNvPr id="413" name="Google Shape;413;p10"/>
+          <p:cNvPr id="412" name="Google Shape;412;p10"/>
           <p:cNvSpPr/>
           <p:nvPr/>
         </p:nvSpPr>
@@ -8779,7 +8779,7 @@
       </p:sp>
       <p:sp>
         <p:nvSpPr>
-          <p:cNvPr id="414" name="Google Shape;414;p10"/>
+          <p:cNvPr id="413" name="Google Shape;413;p10"/>
           <p:cNvSpPr/>
           <p:nvPr/>
         </p:nvSpPr>
@@ -8842,7 +8842,7 @@
       </p:sp>
       <p:sp>
         <p:nvSpPr>
-          <p:cNvPr id="415" name="Google Shape;415;p10"/>
+          <p:cNvPr id="414" name="Google Shape;414;p10"/>
           <p:cNvSpPr/>
           <p:nvPr/>
         </p:nvSpPr>
@@ -8899,7 +8899,7 @@
       </p:sp>
       <p:sp>
         <p:nvSpPr>
-          <p:cNvPr id="416" name="Google Shape;416;p10"/>
+          <p:cNvPr id="415" name="Google Shape;415;p10"/>
           <p:cNvSpPr/>
           <p:nvPr/>
         </p:nvSpPr>
@@ -8956,7 +8956,7 @@
       </p:sp>
       <p:sp>
         <p:nvSpPr>
-          <p:cNvPr id="417" name="Google Shape;417;p10"/>
+          <p:cNvPr id="416" name="Google Shape;416;p10"/>
           <p:cNvSpPr/>
           <p:nvPr/>
         </p:nvSpPr>
@@ -9019,7 +9019,7 @@
       </p:sp>
       <p:sp>
         <p:nvSpPr>
-          <p:cNvPr id="418" name="Google Shape;418;p10"/>
+          <p:cNvPr id="417" name="Google Shape;417;p10"/>
           <p:cNvSpPr/>
           <p:nvPr/>
         </p:nvSpPr>
@@ -9082,7 +9082,7 @@
       </p:sp>
       <p:sp>
         <p:nvSpPr>
-          <p:cNvPr id="419" name="Google Shape;419;p10"/>
+          <p:cNvPr id="418" name="Google Shape;418;p10"/>
           <p:cNvSpPr/>
           <p:nvPr/>
         </p:nvSpPr>
@@ -9219,7 +9219,7 @@
       </p:sp>
       <p:sp>
         <p:nvSpPr>
-          <p:cNvPr id="420" name="Google Shape;420;p10"/>
+          <p:cNvPr id="419" name="Google Shape;419;p10"/>
           <p:cNvSpPr/>
           <p:nvPr/>
         </p:nvSpPr>
@@ -9282,7 +9282,7 @@
       </p:sp>
       <p:sp>
         <p:nvSpPr>
-          <p:cNvPr id="421" name="Google Shape;421;p10"/>
+          <p:cNvPr id="420" name="Google Shape;420;p10"/>
           <p:cNvSpPr/>
           <p:nvPr/>
         </p:nvSpPr>
@@ -9339,7 +9339,7 @@
       </p:sp>
       <p:sp>
         <p:nvSpPr>
-          <p:cNvPr id="422" name="Google Shape;422;p10"/>
+          <p:cNvPr id="421" name="Google Shape;421;p10"/>
           <p:cNvSpPr/>
           <p:nvPr/>
         </p:nvSpPr>
@@ -9396,7 +9396,7 @@
       </p:sp>
       <p:sp>
         <p:nvSpPr>
-          <p:cNvPr id="423" name="Google Shape;423;p10"/>
+          <p:cNvPr id="422" name="Google Shape;422;p10"/>
           <p:cNvSpPr/>
           <p:nvPr/>
         </p:nvSpPr>
@@ -9459,7 +9459,7 @@
       </p:sp>
       <p:sp>
         <p:nvSpPr>
-          <p:cNvPr id="424" name="Google Shape;424;p10"/>
+          <p:cNvPr id="423" name="Google Shape;423;p10"/>
           <p:cNvSpPr/>
           <p:nvPr/>
         </p:nvSpPr>
@@ -9522,7 +9522,7 @@
       </p:sp>
       <p:sp>
         <p:nvSpPr>
-          <p:cNvPr id="425" name="Google Shape;425;p10"/>
+          <p:cNvPr id="424" name="Google Shape;424;p10"/>
           <p:cNvSpPr/>
           <p:nvPr/>
         </p:nvSpPr>
@@ -9585,7 +9585,7 @@
       </p:sp>
       <p:sp>
         <p:nvSpPr>
-          <p:cNvPr id="426" name="Google Shape;426;p10"/>
+          <p:cNvPr id="425" name="Google Shape;425;p10"/>
           <p:cNvSpPr/>
           <p:nvPr/>
         </p:nvSpPr>
@@ -22634,7 +22634,7 @@
             <a:tbl>
               <a:tblPr>
                 <a:noFill/>
-                <a:tableStyleId>{1D65D8CD-92B0-4D7A-B6FC-24D738DE7A7E}</a:tableStyleId>
+                <a:tableStyleId>{40F4C8DC-9B22-4493-AA9A-FF226E0E957E}</a:tableStyleId>
               </a:tblPr>
               <a:tblGrid>
                 <a:gridCol w="1280150"/>
@@ -25342,228 +25342,6 @@
         </p:nvSpPr>
         <p:spPr>
           <a:xfrm>
-            <a:off x="320040" y="1261872"/>
-            <a:ext cx="4754880" cy="2286000"/>
-          </a:xfrm>
-          <a:prstGeom prst="rect">
-            <a:avLst/>
-          </a:prstGeom>
-          <a:solidFill>
-            <a:srgbClr val="05294A"/>
-          </a:solidFill>
-          <a:ln cap="flat" cmpd="sng" w="12700">
-            <a:solidFill>
-              <a:srgbClr val="00C8FF"/>
-            </a:solidFill>
-            <a:prstDash val="solid"/>
-            <a:round/>
-            <a:headEnd len="sm" w="sm" type="none"/>
-            <a:tailEnd len="sm" w="sm" type="none"/>
-          </a:ln>
-        </p:spPr>
-        <p:txBody>
-          <a:bodyPr anchorCtr="0" anchor="t" bIns="45700" lIns="91425" spcFirstLastPara="1" rIns="91425" wrap="square" tIns="45700">
-            <a:noAutofit/>
-          </a:bodyPr>
-          <a:lstStyle/>
-          <a:p>
-            <a:pPr indent="0" lvl="0" marL="0" marR="0" rtl="0" algn="l">
-              <a:spcBef>
-                <a:spcPts val="0"/>
-              </a:spcBef>
-              <a:spcAft>
-                <a:spcPts val="0"/>
-              </a:spcAft>
-              <a:buNone/>
-            </a:pPr>
-            <a:r>
-              <a:t/>
-            </a:r>
-            <a:endParaRPr sz="1800">
-              <a:solidFill>
-                <a:schemeClr val="dk1"/>
-              </a:solidFill>
-              <a:latin typeface="Calibri"/>
-              <a:ea typeface="Calibri"/>
-              <a:cs typeface="Calibri"/>
-              <a:sym typeface="Calibri"/>
-            </a:endParaRPr>
-          </a:p>
-        </p:txBody>
-      </p:sp>
-      <p:sp>
-        <p:nvSpPr>
-          <p:cNvPr id="270" name="Google Shape;270;p8"/>
-          <p:cNvSpPr/>
-          <p:nvPr/>
-        </p:nvSpPr>
-        <p:spPr>
-          <a:xfrm>
-            <a:off x="370265" y="1280172"/>
-            <a:ext cx="4755000" cy="2286000"/>
-          </a:xfrm>
-          <a:prstGeom prst="rect">
-            <a:avLst/>
-          </a:prstGeom>
-          <a:noFill/>
-          <a:ln>
-            <a:noFill/>
-          </a:ln>
-        </p:spPr>
-        <p:txBody>
-          <a:bodyPr anchorCtr="0" anchor="ctr" bIns="45700" lIns="91425" spcFirstLastPara="1" rIns="91425" wrap="square" tIns="45700">
-            <a:noAutofit/>
-          </a:bodyPr>
-          <a:lstStyle/>
-          <a:p>
-            <a:pPr indent="0" lvl="0" marL="0" marR="0" rtl="0" algn="ctr">
-              <a:spcBef>
-                <a:spcPts val="0"/>
-              </a:spcBef>
-              <a:spcAft>
-                <a:spcPts val="0"/>
-              </a:spcAft>
-              <a:buClr>
-                <a:srgbClr val="7BAFC8"/>
-              </a:buClr>
-              <a:buSzPts val="1200"/>
-              <a:buFont typeface="Calibri"/>
-              <a:buNone/>
-            </a:pPr>
-            <a:r>
-              <a:rPr lang="en-US" sz="1200">
-                <a:solidFill>
-                  <a:srgbClr val="7BAFC8"/>
-                </a:solidFill>
-                <a:latin typeface="Calibri"/>
-                <a:ea typeface="Calibri"/>
-                <a:cs typeface="Calibri"/>
-                <a:sym typeface="Calibri"/>
-              </a:rPr>
-              <a:t>[ CAPTURA DEL PANEL WEB ]</a:t>
-            </a:r>
-            <a:endParaRPr sz="1200">
-              <a:solidFill>
-                <a:schemeClr val="dk1"/>
-              </a:solidFill>
-              <a:latin typeface="Calibri"/>
-              <a:ea typeface="Calibri"/>
-              <a:cs typeface="Calibri"/>
-              <a:sym typeface="Calibri"/>
-            </a:endParaRPr>
-          </a:p>
-          <a:p>
-            <a:pPr indent="0" lvl="0" marL="0" marR="0" rtl="0" algn="ctr">
-              <a:spcBef>
-                <a:spcPts val="0"/>
-              </a:spcBef>
-              <a:spcAft>
-                <a:spcPts val="0"/>
-              </a:spcAft>
-              <a:buClr>
-                <a:schemeClr val="dk1"/>
-              </a:buClr>
-              <a:buSzPts val="1200"/>
-              <a:buFont typeface="Calibri"/>
-              <a:buNone/>
-            </a:pPr>
-            <a:r>
-              <a:t/>
-            </a:r>
-            <a:endParaRPr sz="1200">
-              <a:solidFill>
-                <a:schemeClr val="dk1"/>
-              </a:solidFill>
-              <a:latin typeface="Calibri"/>
-              <a:ea typeface="Calibri"/>
-              <a:cs typeface="Calibri"/>
-              <a:sym typeface="Calibri"/>
-            </a:endParaRPr>
-          </a:p>
-          <a:p>
-            <a:pPr indent="0" lvl="0" marL="0" marR="0" rtl="0" algn="ctr">
-              <a:spcBef>
-                <a:spcPts val="0"/>
-              </a:spcBef>
-              <a:spcAft>
-                <a:spcPts val="0"/>
-              </a:spcAft>
-              <a:buClr>
-                <a:srgbClr val="7BAFC8"/>
-              </a:buClr>
-              <a:buSzPts val="1200"/>
-              <a:buFont typeface="Calibri"/>
-              <a:buNone/>
-            </a:pPr>
-            <a:r>
-              <a:rPr lang="en-US" sz="1200">
-                <a:solidFill>
-                  <a:srgbClr val="7BAFC8"/>
-                </a:solidFill>
-                <a:latin typeface="Calibri"/>
-                <a:ea typeface="Calibri"/>
-                <a:cs typeface="Calibri"/>
-                <a:sym typeface="Calibri"/>
-              </a:rPr>
-              <a:t>Insertar aquí screenshot de</a:t>
-            </a:r>
-            <a:endParaRPr sz="1200">
-              <a:solidFill>
-                <a:schemeClr val="dk1"/>
-              </a:solidFill>
-              <a:latin typeface="Calibri"/>
-              <a:ea typeface="Calibri"/>
-              <a:cs typeface="Calibri"/>
-              <a:sym typeface="Calibri"/>
-            </a:endParaRPr>
-          </a:p>
-          <a:p>
-            <a:pPr indent="0" lvl="0" marL="0" marR="0" rtl="0" algn="ctr">
-              <a:spcBef>
-                <a:spcPts val="0"/>
-              </a:spcBef>
-              <a:spcAft>
-                <a:spcPts val="0"/>
-              </a:spcAft>
-              <a:buClr>
-                <a:srgbClr val="7BAFC8"/>
-              </a:buClr>
-              <a:buSzPts val="1200"/>
-              <a:buFont typeface="Calibri"/>
-              <a:buNone/>
-            </a:pPr>
-            <a:r>
-              <a:rPr lang="en-US" sz="1200">
-                <a:solidFill>
-                  <a:srgbClr val="7BAFC8"/>
-                </a:solidFill>
-                <a:latin typeface="Calibri"/>
-                <a:ea typeface="Calibri"/>
-                <a:cs typeface="Calibri"/>
-                <a:sym typeface="Calibri"/>
-              </a:rPr>
-              <a:t>http://localhost</a:t>
-            </a:r>
-            <a:endParaRPr sz="1200">
-              <a:solidFill>
-                <a:schemeClr val="dk1"/>
-              </a:solidFill>
-              <a:latin typeface="Calibri"/>
-              <a:ea typeface="Calibri"/>
-              <a:cs typeface="Calibri"/>
-              <a:sym typeface="Calibri"/>
-            </a:endParaRPr>
-          </a:p>
-        </p:txBody>
-      </p:sp>
-      <p:sp>
-        <p:nvSpPr>
-          <p:cNvPr id="271" name="Google Shape;271;p8"/>
-          <p:cNvSpPr/>
-          <p:nvPr/>
-        </p:nvSpPr>
-        <p:spPr>
-          <a:xfrm>
             <a:off x="365760" y="3657600"/>
             <a:ext cx="4754880" cy="210312"/>
           </a:xfrm>
@@ -25633,7 +25411,7 @@
       </p:sp>
       <p:sp>
         <p:nvSpPr>
-          <p:cNvPr id="272" name="Google Shape;272;p8"/>
+          <p:cNvPr id="270" name="Google Shape;270;p8"/>
           <p:cNvSpPr/>
           <p:nvPr/>
         </p:nvSpPr>
@@ -25708,7 +25486,7 @@
       </p:sp>
       <p:sp>
         <p:nvSpPr>
-          <p:cNvPr id="273" name="Google Shape;273;p8"/>
+          <p:cNvPr id="271" name="Google Shape;271;p8"/>
           <p:cNvSpPr/>
           <p:nvPr/>
         </p:nvSpPr>
@@ -25783,7 +25561,7 @@
       </p:sp>
       <p:sp>
         <p:nvSpPr>
-          <p:cNvPr id="274" name="Google Shape;274;p8"/>
+          <p:cNvPr id="272" name="Google Shape;272;p8"/>
           <p:cNvSpPr/>
           <p:nvPr/>
         </p:nvSpPr>
@@ -25858,7 +25636,7 @@
       </p:sp>
       <p:sp>
         <p:nvSpPr>
-          <p:cNvPr id="275" name="Google Shape;275;p8"/>
+          <p:cNvPr id="273" name="Google Shape;273;p8"/>
           <p:cNvSpPr/>
           <p:nvPr/>
         </p:nvSpPr>
@@ -25933,7 +25711,7 @@
       </p:sp>
       <p:sp>
         <p:nvSpPr>
-          <p:cNvPr id="276" name="Google Shape;276;p8"/>
+          <p:cNvPr id="274" name="Google Shape;274;p8"/>
           <p:cNvSpPr/>
           <p:nvPr/>
         </p:nvSpPr>
@@ -25997,7 +25775,7 @@
       </p:sp>
       <p:sp>
         <p:nvSpPr>
-          <p:cNvPr id="277" name="Google Shape;277;p8"/>
+          <p:cNvPr id="275" name="Google Shape;275;p8"/>
           <p:cNvSpPr/>
           <p:nvPr/>
         </p:nvSpPr>
@@ -26054,7 +25832,7 @@
       </p:sp>
       <p:pic>
         <p:nvPicPr>
-          <p:cNvPr descr="preencoded.png" id="278" name="Google Shape;278;p8"/>
+          <p:cNvPr descr="preencoded.png" id="276" name="Google Shape;276;p8"/>
           <p:cNvPicPr preferRelativeResize="0"/>
           <p:nvPr/>
         </p:nvPicPr>
@@ -26081,7 +25859,7 @@
       </p:pic>
       <p:sp>
         <p:nvSpPr>
-          <p:cNvPr id="279" name="Google Shape;279;p8"/>
+          <p:cNvPr id="277" name="Google Shape;277;p8"/>
           <p:cNvSpPr/>
           <p:nvPr/>
         </p:nvSpPr>
@@ -26144,7 +25922,7 @@
       </p:sp>
       <p:sp>
         <p:nvSpPr>
-          <p:cNvPr id="280" name="Google Shape;280;p8"/>
+          <p:cNvPr id="278" name="Google Shape;278;p8"/>
           <p:cNvSpPr/>
           <p:nvPr/>
         </p:nvSpPr>
@@ -26301,7 +26079,7 @@
       </p:sp>
       <p:sp>
         <p:nvSpPr>
-          <p:cNvPr id="281" name="Google Shape;281;p8"/>
+          <p:cNvPr id="279" name="Google Shape;279;p8"/>
           <p:cNvSpPr/>
           <p:nvPr/>
         </p:nvSpPr>
@@ -26365,7 +26143,7 @@
       </p:sp>
       <p:sp>
         <p:nvSpPr>
-          <p:cNvPr id="282" name="Google Shape;282;p8"/>
+          <p:cNvPr id="280" name="Google Shape;280;p8"/>
           <p:cNvSpPr/>
           <p:nvPr/>
         </p:nvSpPr>
@@ -26422,7 +26200,7 @@
       </p:sp>
       <p:pic>
         <p:nvPicPr>
-          <p:cNvPr descr="preencoded.png" id="283" name="Google Shape;283;p8"/>
+          <p:cNvPr descr="preencoded.png" id="281" name="Google Shape;281;p8"/>
           <p:cNvPicPr preferRelativeResize="0"/>
           <p:nvPr/>
         </p:nvPicPr>
@@ -26449,7 +26227,7 @@
       </p:pic>
       <p:sp>
         <p:nvSpPr>
-          <p:cNvPr id="284" name="Google Shape;284;p8"/>
+          <p:cNvPr id="282" name="Google Shape;282;p8"/>
           <p:cNvSpPr/>
           <p:nvPr/>
         </p:nvSpPr>
@@ -26512,7 +26290,7 @@
       </p:sp>
       <p:sp>
         <p:nvSpPr>
-          <p:cNvPr id="285" name="Google Shape;285;p8"/>
+          <p:cNvPr id="283" name="Google Shape;283;p8"/>
           <p:cNvSpPr/>
           <p:nvPr/>
         </p:nvSpPr>
@@ -26575,7 +26353,7 @@
       </p:sp>
       <p:sp>
         <p:nvSpPr>
-          <p:cNvPr id="286" name="Google Shape;286;p8"/>
+          <p:cNvPr id="284" name="Google Shape;284;p8"/>
           <p:cNvSpPr/>
           <p:nvPr/>
         </p:nvSpPr>
@@ -26638,7 +26416,7 @@
       </p:sp>
       <p:sp>
         <p:nvSpPr>
-          <p:cNvPr id="287" name="Google Shape;287;p8"/>
+          <p:cNvPr id="285" name="Google Shape;285;p8"/>
           <p:cNvSpPr/>
           <p:nvPr/>
         </p:nvSpPr>
@@ -26701,7 +26479,7 @@
       </p:sp>
       <p:sp>
         <p:nvSpPr>
-          <p:cNvPr id="288" name="Google Shape;288;p8"/>
+          <p:cNvPr id="286" name="Google Shape;286;p8"/>
           <p:cNvSpPr/>
           <p:nvPr/>
         </p:nvSpPr>
@@ -26764,7 +26542,7 @@
       </p:sp>
       <p:sp>
         <p:nvSpPr>
-          <p:cNvPr id="289" name="Google Shape;289;p8"/>
+          <p:cNvPr id="287" name="Google Shape;287;p8"/>
           <p:cNvSpPr/>
           <p:nvPr/>
         </p:nvSpPr>
@@ -26827,7 +26605,7 @@
       </p:sp>
       <p:sp>
         <p:nvSpPr>
-          <p:cNvPr id="290" name="Google Shape;290;p8"/>
+          <p:cNvPr id="288" name="Google Shape;288;p8"/>
           <p:cNvSpPr/>
           <p:nvPr/>
         </p:nvSpPr>
@@ -26888,6 +26666,34 @@
           </a:p>
         </p:txBody>
       </p:sp>
+      <p:pic>
+        <p:nvPicPr>
+          <p:cNvPr id="289" name="Google Shape;289;p8"/>
+          <p:cNvPicPr preferRelativeResize="0"/>
+          <p:nvPr/>
+        </p:nvPicPr>
+        <p:blipFill>
+          <a:blip r:embed="rId5">
+            <a:alphaModFix/>
+          </a:blip>
+          <a:stretch>
+            <a:fillRect/>
+          </a:stretch>
+        </p:blipFill>
+        <p:spPr>
+          <a:xfrm>
+            <a:off x="373638" y="1212975"/>
+            <a:ext cx="4647679" cy="2420374"/>
+          </a:xfrm>
+          <a:prstGeom prst="rect">
+            <a:avLst/>
+          </a:prstGeom>
+          <a:noFill/>
+          <a:ln>
+            <a:noFill/>
+          </a:ln>
+        </p:spPr>
+      </p:pic>
     </p:spTree>
   </p:cSld>
   <p:clrMapOvr>
@@ -26908,7 +26714,7 @@
     </p:bg>
     <p:spTree>
       <p:nvGrpSpPr>
-        <p:cNvPr id="295" name="Shape 295"/>
+        <p:cNvPr id="294" name="Shape 294"/>
         <p:cNvGrpSpPr/>
         <p:nvPr/>
       </p:nvGrpSpPr>
@@ -26922,7 +26728,7 @@
       </p:grpSpPr>
       <p:sp>
         <p:nvSpPr>
-          <p:cNvPr id="296" name="Google Shape;296;p9"/>
+          <p:cNvPr id="295" name="Google Shape;295;p9"/>
           <p:cNvSpPr/>
           <p:nvPr/>
         </p:nvSpPr>
@@ -26979,7 +26785,7 @@
       </p:sp>
       <p:sp>
         <p:nvSpPr>
-          <p:cNvPr id="297" name="Google Shape;297;p9"/>
+          <p:cNvPr id="296" name="Google Shape;296;p9"/>
           <p:cNvSpPr/>
           <p:nvPr/>
         </p:nvSpPr>
@@ -27042,7 +26848,7 @@
       </p:sp>
       <p:sp>
         <p:nvSpPr>
-          <p:cNvPr id="298" name="Google Shape;298;p9"/>
+          <p:cNvPr id="297" name="Google Shape;297;p9"/>
           <p:cNvSpPr/>
           <p:nvPr/>
         </p:nvSpPr>
@@ -27099,7 +26905,7 @@
       </p:sp>
       <p:sp>
         <p:nvSpPr>
-          <p:cNvPr id="299" name="Google Shape;299;p9"/>
+          <p:cNvPr id="298" name="Google Shape;298;p9"/>
           <p:cNvSpPr/>
           <p:nvPr/>
         </p:nvSpPr>
@@ -27156,7 +26962,7 @@
       </p:sp>
       <p:sp>
         <p:nvSpPr>
-          <p:cNvPr id="300" name="Google Shape;300;p9"/>
+          <p:cNvPr id="299" name="Google Shape;299;p9"/>
           <p:cNvSpPr/>
           <p:nvPr/>
         </p:nvSpPr>
@@ -27219,7 +27025,7 @@
       </p:sp>
       <p:sp>
         <p:nvSpPr>
-          <p:cNvPr id="301" name="Google Shape;301;p9"/>
+          <p:cNvPr id="300" name="Google Shape;300;p9"/>
           <p:cNvSpPr/>
           <p:nvPr/>
         </p:nvSpPr>
@@ -27282,7 +27088,7 @@
       </p:sp>
       <p:sp>
         <p:nvSpPr>
-          <p:cNvPr id="302" name="Google Shape;302;p9"/>
+          <p:cNvPr id="301" name="Google Shape;301;p9"/>
           <p:cNvSpPr/>
           <p:nvPr/>
         </p:nvSpPr>
@@ -27339,7 +27145,7 @@
       </p:sp>
       <p:sp>
         <p:nvSpPr>
-          <p:cNvPr id="303" name="Google Shape;303;p9"/>
+          <p:cNvPr id="302" name="Google Shape;302;p9"/>
           <p:cNvSpPr/>
           <p:nvPr/>
         </p:nvSpPr>
@@ -27396,7 +27202,7 @@
       </p:sp>
       <p:sp>
         <p:nvSpPr>
-          <p:cNvPr id="304" name="Google Shape;304;p9"/>
+          <p:cNvPr id="303" name="Google Shape;303;p9"/>
           <p:cNvSpPr/>
           <p:nvPr/>
         </p:nvSpPr>
@@ -27459,7 +27265,7 @@
       </p:sp>
       <p:sp>
         <p:nvSpPr>
-          <p:cNvPr id="305" name="Google Shape;305;p9"/>
+          <p:cNvPr id="304" name="Google Shape;304;p9"/>
           <p:cNvSpPr/>
           <p:nvPr/>
         </p:nvSpPr>
@@ -27522,7 +27328,7 @@
       </p:sp>
       <p:sp>
         <p:nvSpPr>
-          <p:cNvPr id="306" name="Google Shape;306;p9"/>
+          <p:cNvPr id="305" name="Google Shape;305;p9"/>
           <p:cNvSpPr/>
           <p:nvPr/>
         </p:nvSpPr>
@@ -27579,7 +27385,7 @@
       </p:sp>
       <p:sp>
         <p:nvSpPr>
-          <p:cNvPr id="307" name="Google Shape;307;p9"/>
+          <p:cNvPr id="306" name="Google Shape;306;p9"/>
           <p:cNvSpPr/>
           <p:nvPr/>
         </p:nvSpPr>
@@ -27636,7 +27442,7 @@
       </p:sp>
       <p:sp>
         <p:nvSpPr>
-          <p:cNvPr id="308" name="Google Shape;308;p9"/>
+          <p:cNvPr id="307" name="Google Shape;307;p9"/>
           <p:cNvSpPr/>
           <p:nvPr/>
         </p:nvSpPr>
@@ -27699,7 +27505,7 @@
       </p:sp>
       <p:sp>
         <p:nvSpPr>
-          <p:cNvPr id="309" name="Google Shape;309;p9"/>
+          <p:cNvPr id="308" name="Google Shape;308;p9"/>
           <p:cNvSpPr/>
           <p:nvPr/>
         </p:nvSpPr>
@@ -27762,7 +27568,7 @@
       </p:sp>
       <p:sp>
         <p:nvSpPr>
-          <p:cNvPr id="310" name="Google Shape;310;p9"/>
+          <p:cNvPr id="309" name="Google Shape;309;p9"/>
           <p:cNvSpPr/>
           <p:nvPr/>
         </p:nvSpPr>
@@ -27819,7 +27625,7 @@
       </p:sp>
       <p:sp>
         <p:nvSpPr>
-          <p:cNvPr id="311" name="Google Shape;311;p9"/>
+          <p:cNvPr id="310" name="Google Shape;310;p9"/>
           <p:cNvSpPr/>
           <p:nvPr/>
         </p:nvSpPr>
@@ -27876,7 +27682,7 @@
       </p:sp>
       <p:sp>
         <p:nvSpPr>
-          <p:cNvPr id="312" name="Google Shape;312;p9"/>
+          <p:cNvPr id="311" name="Google Shape;311;p9"/>
           <p:cNvSpPr/>
           <p:nvPr/>
         </p:nvSpPr>
@@ -27939,7 +27745,7 @@
       </p:sp>
       <p:sp>
         <p:nvSpPr>
-          <p:cNvPr id="313" name="Google Shape;313;p9"/>
+          <p:cNvPr id="312" name="Google Shape;312;p9"/>
           <p:cNvSpPr/>
           <p:nvPr/>
         </p:nvSpPr>
@@ -28002,7 +27808,7 @@
       </p:sp>
       <p:grpSp>
         <p:nvGrpSpPr>
-          <p:cNvPr id="314" name="Google Shape;314;p9"/>
+          <p:cNvPr id="313" name="Google Shape;313;p9"/>
           <p:cNvGrpSpPr/>
           <p:nvPr/>
         </p:nvGrpSpPr>
@@ -28016,7 +27822,7 @@
         </p:grpSpPr>
         <p:pic>
           <p:nvPicPr>
-            <p:cNvPr id="315" name="Google Shape;315;p9"/>
+            <p:cNvPr id="314" name="Google Shape;314;p9"/>
             <p:cNvPicPr preferRelativeResize="0"/>
             <p:nvPr/>
           </p:nvPicPr>
@@ -28044,7 +27850,7 @@
         </p:pic>
         <p:pic>
           <p:nvPicPr>
-            <p:cNvPr id="316" name="Google Shape;316;p9"/>
+            <p:cNvPr id="315" name="Google Shape;315;p9"/>
             <p:cNvPicPr preferRelativeResize="0"/>
             <p:nvPr/>
           </p:nvPicPr>
